--- a/Curriculo/Fase3_Basico2/decks/Basico2_S02_Jay.pptx
+++ b/Curriculo/Fase3_Basico2/decks/Basico2_S02_Jay.pptx
@@ -141,7 +141,7 @@
   <p:extLst>
     <p:ext uri="{521415D9-36F7-43E2-AB2F-B90AF26B5E84}">
       <p14:sectionLst xmlns:p14="http://schemas.microsoft.com/office/powerpoint/2010/main">
-        <p14:section name="Semana 2" id="{2967D460-2CCC-23C8-20F1-65E121C6FEBB}">
+        <p14:section name="Semana 2" id="{1F39AF7E-1B5D-EFBF-38C0-B4D36D1F4A42}">
           <p14:sldIdLst>
             <p14:sldId id="256"/>
             <p14:sldId id="257"/>
@@ -214,7 +214,7 @@
     </p:spTree>
     <p:extLst>
       <p:ext uri="{BB962C8B-B14F-4D97-AF65-F5344CB8AC3E}">
-        <p14:creationId xmlns:p14="http://schemas.microsoft.com/office/powerpoint/2010/main" val="3665338419"/>
+        <p14:creationId xmlns:p14="http://schemas.microsoft.com/office/powerpoint/2010/main" val="3878583602"/>
       </p:ext>
     </p:extLst>
   </p:cSld>
@@ -361,7 +361,7 @@
             <a:r>
               <a:rPr lang="en-US" dirty="0"/>
               <a:t>21:00–21:01. Inicia la grabación en la nube (Basico2_S02_2026-10-21). A 2–3 por nombre: «카밀라 씨, 안녕하세요! 요즘 어떻게 지내요?» → «잘 지내요. 선생님은요?» (si alguien te dice ___ 씨는요?, sonríe y modela 선생님은요?). Pon el chat en 'solo anfitrión' para el quiz y crea 5 salas vacías con 'elegir sala' (sin abrirlas).
-Imagen sugerida: Dos relojes: Santiago 21:00 (miércoles) · 서울 09:00 (jueves)
+Imagen: incluida (dibujo de la casa).
 Fuente: Nueva
 Lámina 1</a:t>
             </a:r>
@@ -451,7 +451,7 @@
             <a:r>
               <a:rPr lang="en-US" dirty="0"/>
               <a:t>21:13–21:14 (1 min). «Para decir tu edad necesitas las decenas nativas; no hay que memorizarlas hoy: están en tu tarjeta de números.» Dilas una vez tú solo; el grupo repite solo 스물, 서른, 마흔; luego 스무 살 · 스물다섯 살 · 서른한 살. «Veinte exacto es 스무 살; veintiuno, 스물한 살. La pregunta: 몇 살이에요? [멷싸리에요]. Regla de la casa: tu edad puede ser real, inventada o la de tu mascota.» (KO) «제 강아지는 세 살이에요.»
-Imagen sugerida: Opcional: foto de la mascota de Jay para 제 강아지는 세 살이에요.
+Imagen: incluida (dibujo de la casa).
 Fuente: Nueva
 Lámina 10</a:t>
             </a:r>
@@ -541,7 +541,7 @@
             <a:r>
               <a:rPr lang="en-US" dirty="0"/>
               <a:t>21:14–21:15 (1 min 30, unos 15 s por alumno). Di los 6 nombres juntos y pide micrófonos abiertos. Tres alumnos, edad: «소피아 씨, 몇 살이에요?» → «___ 살이에요.»; si dice 이십오 살: «나이는… 스물다섯 살.» y gesto de 'otra vez'. Tres alumnos, reloj: «다니엘 씨, 몇 시예요?»; si dice 사 시: «네 시» (4 dedos + 'nativo'). Máximo dos intentos y «잘했어요!» a cada uno.
-Imagen sugerida: Tres relojes: 4:00 · 11:00 · 7:00
+Imagen: incluida (dibujo de la casa).
 Fuente: Nueva
 Lámina 11</a:t>
             </a:r>
@@ -1076,7 +1076,7 @@
             <a:r>
               <a:rPr lang="en-US" dirty="0"/>
               <a:t>21:21–21:23 (2 min 50, unos 10 s por alumno). Comparte la hoja 'Calendario del curso'. «Yo le pregunto a Camila; Camila responde y le pregunta a quien sigue en la lista de Zoom, por su nombre. La fecha va en coreano.» (KO) «카밀라 씨, 생일이 언제예요?»; mientras hablan, escribes el nombre en la fila del mes; con 유월 o 시월 bien dichos, «잘했어요!»; si alguien dice 육월, repites «유월» y sigue. Si hay un cumpleaños esta semana: «와! 생일 축하해요!» (reconocer). A las 21:22:50, corta: los que faltan lo dicen en su sala (R3).
-Imagen sugerida: Hoja 'Calendario del curso' compartida en pantalla: 12 filas, de 일월 a 십이월, con una columna para los nombres
+Imagen: incluida (dibujo de la casa).
 Fuente: Nueva
 Lámina 17</a:t>
             </a:r>
@@ -1344,7 +1344,6 @@
             <a:r>
               <a:rPr lang="en-US" dirty="0"/>
               <a:t>21:01, unos segundos, de paso hacia el quiz. «Hoy: tu edad, tu cumpleaños, tu teléfono y la hora a la que haces las cosas.»
-Imagen sugerida: Logo azul de Academia Seúl (plantilla de la casa)
 Fuente: Portada de la plantilla
 Lámina 2</a:t>
             </a:r>
@@ -1701,7 +1700,7 @@
             <a:r>
               <a:rPr lang="en-US" dirty="0"/>
               <a:t>21:29–21:30 (1 min). «En muchas familias coreanas el cumpleaños empieza con esta sopa de algas, 미역국. Es la sopa que toma la mamá después del parto: en tu cumpleaños te recuerda a ella. En Latinoamérica tenemos torta y 'cumpleaños feliz'; en Corea también hay torta y la misma melodía, pero el 미역국 es lo que sabe a cumpleaños.» Coro ×2: «따라 하세요: 생일에 미역국을 먹어요.» Chat: «¿Qué comes tú en tu cumpleaños?» (lee 1 respuesta). La canción no se canta, y no adelantes el 미역국 del 수능 (semana 6).
-Imagen sugerida: Foto con licencia libre de un plato de 미역국 (sopa de algas)
+Imagen: incluida (dibujo de la casa).
 Fuente: Nueva
 Lámina 23</a:t>
             </a:r>
@@ -2325,7 +2324,7 @@
             <a:r>
               <a:rPr lang="en-US" dirty="0"/>
               <a:t>21:01–21:04. «Quiz 1: cinco preguntas sobre la semana 1. Empiecen ya; respondan en el chat en una sola línea. Hoy el chat me llega solo a mí. Tienen hasta las 21:03 y media.» Lee cada ítem una vez mientras responden; el 5, en coreano y despacio, y explica que 무엇에 대한 이야기입니까 es la pregunta del TOPIK ('¿de qué se habla?'), solo para reconocer. A las 21:03:30 guarda el chat y lee la clave (aparece con clic): 1 이 · 2 이 y 은 · 3 없어요 · 4 살아요 · 5 ③ 취미. En el 2, si pusieron 이 en la respuesta, no está mal: punto igual.
-Imagen sugerida: Dibujo para el ítem 3: una casa con un gato y ningún perro
+Imagen: incluida (dibujo de la casa).
 Fuente: Nueva
 Lámina 3</a:t>
             </a:r>
@@ -3038,7 +3037,7 @@
             <a:r>
               <a:rPr lang="en-US" dirty="0"/>
               <a:t>21:05–21:06 (1 min 30). Señala cada reloj: «여러분, 지금 칠레는 밤 아홉 시예요. 한국은 아침 아홉 시예요.» «오늘은 시월 이십일 일 수요일이에요. 한국은… 시월 이십이 일 목요일이에요!» (ES) «En Corea ya es mañana: jueves, nueve de la mañana; mientras ustedes terminan el día, allá la gente llega a la oficina. Hoy van a poder decir todo esto: la hora, la fecha, tu edad, tu cumpleaños y tu teléfono.»
-Imagen sugerida: Dos relojes (Santiago 21:05 · 서울 09:05) y el calendario de octubre de 2026 con el 21 y el 22 marcados
+Imagen: incluida (dibujo de la casa).
 Fuente: Nueva (calendario) + A1_Nivel_1/05_Fechas_Numeros/Clase_Numeros_Fechas_Hora.pptx L3 (fotos de reloj y calendario)
 Lámina 5</a:t>
             </a:r>
@@ -3395,7 +3394,7 @@
             <a:r>
               <a:rPr lang="en-US" dirty="0"/>
               <a:t>21:11–21:13 (1 min 30). Coro: «따라 하세요: 한 시, 두 시, 세 시, 네 시, 다섯 시, 여섯 시, 일곱 시, 여덟 시, 아홉 시, 열 시, 열한 시, 열두 시.» «La pregunta: 몇 시예요?, '¿qué hora es?'. 몇 es 'cuántos' o 'qué número'. Ojo con la ㅊ de 몇: se oye [멷씨], con la ㅅ apretada; en diez minutos les explico por qué.» Escribe [멷씨] en el chat.
-Imagen sugerida: Reloj analógico con las 12 horas rotuladas en 한글 (한 시 … 열두 시)
+Imagen: incluida (dibujo de la casa).
 Fuente: Clase_Numeros_Fechas_Hora.pptx L11 (parte 'la regla'), adaptada
 Lámina 9</a:t>
             </a:r>
@@ -4456,7 +4455,7 @@
         <p:spPr>
           <a:xfrm>
             <a:off x="548640" y="1325880"/>
-            <a:ext cx="6949440" cy="548640"/>
+            <a:ext cx="5669280" cy="548640"/>
           </a:xfrm>
           <a:prstGeom prst="rect">
             <a:avLst/>
@@ -4505,7 +4504,7 @@
         <p:spPr>
           <a:xfrm>
             <a:off x="548640" y="1965960"/>
-            <a:ext cx="6949440" cy="4206240"/>
+            <a:ext cx="5669280" cy="4206240"/>
           </a:xfrm>
           <a:prstGeom prst="rect">
             <a:avLst/>
@@ -4641,12 +4640,12 @@
         </p:nvSpPr>
         <p:spPr>
           <a:xfrm>
-            <a:off x="8001000" y="1417320"/>
-            <a:ext cx="3611880" cy="4480560"/>
+            <a:off x="6446520" y="1371600"/>
+            <a:ext cx="5193792" cy="4800600"/>
           </a:xfrm>
           <a:prstGeom prst="roundRect">
             <a:avLst>
-              <a:gd name="adj" fmla="val 6329"/>
+              <a:gd name="adj" fmla="val 4762"/>
             </a:avLst>
           </a:prstGeom>
           <a:solidFill>
@@ -4660,82 +4659,24 @@
           </a:ln>
         </p:spPr>
       </p:sp>
-      <p:sp>
-        <p:nvSpPr>
-          <p:cNvPr id="6" name="ko_grande"/>
-          <p:cNvSpPr txBox="1"/>
-          <p:nvPr/>
-        </p:nvSpPr>
-        <p:spPr>
-          <a:xfrm>
-            <a:off x="8092440" y="1874520"/>
-            <a:ext cx="3429000" cy="2926080"/>
-          </a:xfrm>
-          <a:prstGeom prst="rect">
-            <a:avLst/>
-          </a:prstGeom>
-          <a:noFill/>
-          <a:ln/>
-        </p:spPr>
-        <p:txBody>
-          <a:bodyPr wrap="square" lIns="0" tIns="0" rIns="0" bIns="0" rtlCol="0" anchor="ctr">
-            <a:normAutofit/>
-          </a:bodyPr>
-          <a:lstStyle/>
-          <a:p>
-            <a:pPr marL="0" indent="0" algn="ctr" eaLnBrk="1">
-              <a:buNone/>
-            </a:pPr>
-            <a:r>
-              <a:rPr lang="ko-KR" altLang="en-US" sz="4100" b="1" dirty="0">
-                <a:solidFill>
-                  <a:srgbClr val="4236F6"/>
-                </a:solidFill>
-                <a:latin typeface="Malgun Gothic" pitchFamily="34" charset="0"/>
-                <a:ea typeface="Malgun Gothic" pitchFamily="34" charset="-122"/>
-                <a:cs typeface="Malgun Gothic" pitchFamily="34" charset="-120"/>
-              </a:rPr>
-              <a:t>안녕하세요</a:t>
-            </a:r>
-            <a:r>
-              <a:rPr lang="en-US" sz="4100" b="1" dirty="0">
-                <a:solidFill>
-                  <a:srgbClr val="4236F6"/>
-                </a:solidFill>
-              </a:rPr>
-              <a:t>!</a:t>
-            </a:r>
-            <a:endParaRPr lang="en-US" sz="4100" dirty="0"/>
-          </a:p>
-        </p:txBody>
-      </p:sp>
       <p:pic>
         <p:nvPicPr>
-          <p:cNvPr id="7" name="Media 0">
-            <a:hlinkClick r:id="" action="ppaction://media"/>
-          </p:cNvPr>
+          <p:cNvPr id="6" name="imagen" descr="C:\Users\Chingu\AppData\Local\Temp\claude\C--Users-Chingu-Desktop-ACADEMIASEULWEB\d4111e1b-5523-44ea-97b2-b1a1d9545b9e\scratchpad\decks\cache\img_ec3e66a794069602.png"/>
           <p:cNvPicPr>
             <a:picLocks noChangeAspect="1"/>
           </p:cNvPicPr>
-          <p:nvPr>
-            <a:audioFile r:link="rId2"/>
-            <p:extLst>
-              <p:ext uri="{DAA4B4D4-6D71-4841-9C94-3DE7FCFB9230}">
-                <p14:media xmlns:p14="http://schemas.microsoft.com/office/powerpoint/2010/main" r:embed="rId1"/>
-              </p:ext>
-            </p:extLst>
-          </p:nvPr>
+          <p:nvPr/>
         </p:nvPicPr>
         <p:blipFill>
-          <a:blip r:embed="rId5"/>
+          <a:blip r:embed="rId3"/>
           <a:stretch>
             <a:fillRect/>
           </a:stretch>
         </p:blipFill>
         <p:spPr>
           <a:xfrm>
-            <a:off x="9601200" y="4983480"/>
-            <a:ext cx="384048" cy="384048"/>
+            <a:off x="7040833" y="1463040"/>
+            <a:ext cx="4005165" cy="4617720"/>
           </a:xfrm>
           <a:prstGeom prst="rect">
             <a:avLst/>
@@ -4882,16 +4823,40 @@
           </a:p>
         </p:txBody>
       </p:sp>
-      <p:sp>
-        <p:nvSpPr>
-          <p:cNvPr id="3" name="Text 1"/>
+      <p:pic>
+        <p:nvPicPr>
+          <p:cNvPr id="3" name="imagen" descr="C:\Users\Chingu\AppData\Local\Temp\claude\C--Users-Chingu-Desktop-ACADEMIASEULWEB\d4111e1b-5523-44ea-97b2-b1a1d9545b9e\scratchpad\decks\cache\img_ed23416044732916.png"/>
+          <p:cNvPicPr>
+            <a:picLocks noChangeAspect="1"/>
+          </p:cNvPicPr>
+          <p:nvPr/>
+        </p:nvPicPr>
+        <p:blipFill>
+          <a:blip r:embed="rId3"/>
+          <a:stretch>
+            <a:fillRect/>
+          </a:stretch>
+        </p:blipFill>
+        <p:spPr>
+          <a:xfrm>
+            <a:off x="7754112" y="1508760"/>
+            <a:ext cx="3886200" cy="4480560"/>
+          </a:xfrm>
+          <a:prstGeom prst="rect">
+            <a:avLst/>
+          </a:prstGeom>
+        </p:spPr>
+      </p:pic>
+      <p:sp>
+        <p:nvSpPr>
+          <p:cNvPr id="4" name="Text 1"/>
           <p:cNvSpPr txBox="1"/>
           <p:nvPr/>
         </p:nvSpPr>
         <p:spPr>
           <a:xfrm>
             <a:off x="548640" y="1325880"/>
-            <a:ext cx="11064240" cy="457200"/>
+            <a:ext cx="6931152" cy="457200"/>
           </a:xfrm>
           <a:prstGeom prst="rect">
             <a:avLst/>
@@ -4917,7 +4882,7 @@
                 <a:ea typeface="Malgun Gothic" pitchFamily="34" charset="-122"/>
                 <a:cs typeface="Malgun Gothic" pitchFamily="34" charset="-120"/>
               </a:rPr>
-              <a:t>Tu edad: real o inventada · 제 강아지는 세 살이에요</a:t>
+              <a:t>Tu edad: real o inventada · 제 강아지는 세 살이에요</a:t>
             </a:r>
             <a:r>
               <a:rPr lang="en-US" sz="1800" i="1" dirty="0">
@@ -4933,18 +4898,18 @@
       </p:sp>
       <p:sp>
         <p:nvSpPr>
-          <p:cNvPr id="4" name="tile_0"/>
+          <p:cNvPr id="5" name="tile_0"/>
           <p:cNvSpPr/>
           <p:nvPr/>
         </p:nvSpPr>
         <p:spPr>
           <a:xfrm>
             <a:off x="548640" y="1874520"/>
-            <a:ext cx="1388582" cy="2034540"/>
+            <a:ext cx="1561338" cy="1280160"/>
           </a:xfrm>
           <a:prstGeom prst="roundRect">
             <a:avLst>
-              <a:gd name="adj" fmla="val 9878"/>
+              <a:gd name="adj" fmla="val 10714"/>
             </a:avLst>
           </a:prstGeom>
           <a:solidFill>
@@ -4960,14 +4925,14 @@
       </p:sp>
       <p:sp>
         <p:nvSpPr>
-          <p:cNvPr id="5" name="Text 3"/>
+          <p:cNvPr id="6" name="Text 3"/>
           <p:cNvSpPr txBox="1"/>
           <p:nvPr/>
         </p:nvSpPr>
         <p:spPr>
           <a:xfrm>
             <a:off x="548640" y="1947672"/>
-            <a:ext cx="1388582" cy="1261415"/>
+            <a:ext cx="1561338" cy="793699"/>
           </a:xfrm>
           <a:prstGeom prst="rect">
             <a:avLst/>
@@ -4985,7 +4950,7 @@
               <a:buNone/>
             </a:pPr>
             <a:r>
-              <a:rPr lang="ko-KR" altLang="en-US" sz="4500" b="1" dirty="0">
+              <a:rPr lang="ko-KR" altLang="en-US" sz="2400" b="1" dirty="0">
                 <a:solidFill>
                   <a:srgbClr val="4236F6"/>
                 </a:solidFill>
@@ -4995,20 +4960,20 @@
               </a:rPr>
               <a:t>스물</a:t>
             </a:r>
-            <a:endParaRPr lang="en-US" sz="4500" dirty="0"/>
+            <a:endParaRPr lang="en-US" sz="2400" dirty="0"/>
           </a:p>
         </p:txBody>
       </p:sp>
       <p:sp>
         <p:nvSpPr>
-          <p:cNvPr id="6" name="Text 4"/>
+          <p:cNvPr id="7" name="Text 4"/>
           <p:cNvSpPr txBox="1"/>
           <p:nvPr/>
         </p:nvSpPr>
         <p:spPr>
           <a:xfrm>
-            <a:off x="594360" y="3176626"/>
-            <a:ext cx="1297142" cy="695858"/>
+            <a:off x="594360" y="2693822"/>
+            <a:ext cx="1469898" cy="424282"/>
           </a:xfrm>
           <a:prstGeom prst="rect">
             <a:avLst/>
@@ -5026,31 +4991,31 @@
               <a:buNone/>
             </a:pPr>
             <a:r>
-              <a:rPr lang="en-US" sz="1700" dirty="0">
+              <a:rPr lang="en-US" sz="1200" dirty="0">
                 <a:solidFill>
                   <a:srgbClr val="5C5F6B"/>
                 </a:solidFill>
               </a:rPr>
               <a:t>20</a:t>
             </a:r>
-            <a:endParaRPr lang="en-US" sz="1700" dirty="0"/>
+            <a:endParaRPr lang="en-US" sz="1200" dirty="0"/>
           </a:p>
         </p:txBody>
       </p:sp>
       <p:sp>
         <p:nvSpPr>
-          <p:cNvPr id="7" name="tile_1"/>
+          <p:cNvPr id="8" name="tile_1"/>
           <p:cNvSpPr/>
           <p:nvPr/>
         </p:nvSpPr>
         <p:spPr>
           <a:xfrm>
-            <a:off x="2165822" y="1874520"/>
-            <a:ext cx="1388582" cy="2034540"/>
+            <a:off x="2338578" y="1874520"/>
+            <a:ext cx="1561338" cy="1280160"/>
           </a:xfrm>
           <a:prstGeom prst="roundRect">
             <a:avLst>
-              <a:gd name="adj" fmla="val 9878"/>
+              <a:gd name="adj" fmla="val 10714"/>
             </a:avLst>
           </a:prstGeom>
           <a:solidFill>
@@ -5066,14 +5031,14 @@
       </p:sp>
       <p:sp>
         <p:nvSpPr>
-          <p:cNvPr id="8" name="Text 6"/>
+          <p:cNvPr id="9" name="Text 6"/>
           <p:cNvSpPr txBox="1"/>
           <p:nvPr/>
         </p:nvSpPr>
         <p:spPr>
           <a:xfrm>
-            <a:off x="2165822" y="1947672"/>
-            <a:ext cx="1388582" cy="1261415"/>
+            <a:off x="2338578" y="1947672"/>
+            <a:ext cx="1561338" cy="793699"/>
           </a:xfrm>
           <a:prstGeom prst="rect">
             <a:avLst/>
@@ -5091,7 +5056,7 @@
               <a:buNone/>
             </a:pPr>
             <a:r>
-              <a:rPr lang="ko-KR" altLang="en-US" sz="4500" b="1" dirty="0">
+              <a:rPr lang="ko-KR" altLang="en-US" sz="2400" b="1" dirty="0">
                 <a:solidFill>
                   <a:srgbClr val="4236F6"/>
                 </a:solidFill>
@@ -5101,20 +5066,20 @@
               </a:rPr>
               <a:t>서른</a:t>
             </a:r>
-            <a:endParaRPr lang="en-US" sz="4500" dirty="0"/>
+            <a:endParaRPr lang="en-US" sz="2400" dirty="0"/>
           </a:p>
         </p:txBody>
       </p:sp>
       <p:sp>
         <p:nvSpPr>
-          <p:cNvPr id="9" name="Text 7"/>
+          <p:cNvPr id="10" name="Text 7"/>
           <p:cNvSpPr txBox="1"/>
           <p:nvPr/>
         </p:nvSpPr>
         <p:spPr>
           <a:xfrm>
-            <a:off x="2211542" y="3176626"/>
-            <a:ext cx="1297142" cy="695858"/>
+            <a:off x="2384298" y="2693822"/>
+            <a:ext cx="1469898" cy="424282"/>
           </a:xfrm>
           <a:prstGeom prst="rect">
             <a:avLst/>
@@ -5132,31 +5097,31 @@
               <a:buNone/>
             </a:pPr>
             <a:r>
-              <a:rPr lang="en-US" sz="1700" dirty="0">
+              <a:rPr lang="en-US" sz="1200" dirty="0">
                 <a:solidFill>
                   <a:srgbClr val="5C5F6B"/>
                 </a:solidFill>
               </a:rPr>
               <a:t>30</a:t>
             </a:r>
-            <a:endParaRPr lang="en-US" sz="1700" dirty="0"/>
+            <a:endParaRPr lang="en-US" sz="1200" dirty="0"/>
           </a:p>
         </p:txBody>
       </p:sp>
       <p:sp>
         <p:nvSpPr>
-          <p:cNvPr id="10" name="tile_2"/>
+          <p:cNvPr id="11" name="tile_2"/>
           <p:cNvSpPr/>
           <p:nvPr/>
         </p:nvSpPr>
         <p:spPr>
           <a:xfrm>
-            <a:off x="3783003" y="1874520"/>
-            <a:ext cx="1388582" cy="2034540"/>
+            <a:off x="4128516" y="1874520"/>
+            <a:ext cx="1561338" cy="1280160"/>
           </a:xfrm>
           <a:prstGeom prst="roundRect">
             <a:avLst>
-              <a:gd name="adj" fmla="val 9878"/>
+              <a:gd name="adj" fmla="val 10714"/>
             </a:avLst>
           </a:prstGeom>
           <a:solidFill>
@@ -5172,14 +5137,14 @@
       </p:sp>
       <p:sp>
         <p:nvSpPr>
-          <p:cNvPr id="11" name="Text 9"/>
+          <p:cNvPr id="12" name="Text 9"/>
           <p:cNvSpPr txBox="1"/>
           <p:nvPr/>
         </p:nvSpPr>
         <p:spPr>
           <a:xfrm>
-            <a:off x="3783003" y="1947672"/>
-            <a:ext cx="1388582" cy="1261415"/>
+            <a:off x="4128516" y="1947672"/>
+            <a:ext cx="1561338" cy="793699"/>
           </a:xfrm>
           <a:prstGeom prst="rect">
             <a:avLst/>
@@ -5197,7 +5162,7 @@
               <a:buNone/>
             </a:pPr>
             <a:r>
-              <a:rPr lang="ko-KR" altLang="en-US" sz="4500" b="1" dirty="0">
+              <a:rPr lang="ko-KR" altLang="en-US" sz="2400" b="1" dirty="0">
                 <a:solidFill>
                   <a:srgbClr val="4236F6"/>
                 </a:solidFill>
@@ -5207,20 +5172,20 @@
               </a:rPr>
               <a:t>마흔</a:t>
             </a:r>
-            <a:endParaRPr lang="en-US" sz="4500" dirty="0"/>
+            <a:endParaRPr lang="en-US" sz="2400" dirty="0"/>
           </a:p>
         </p:txBody>
       </p:sp>
       <p:sp>
         <p:nvSpPr>
-          <p:cNvPr id="12" name="Text 10"/>
+          <p:cNvPr id="13" name="Text 10"/>
           <p:cNvSpPr txBox="1"/>
           <p:nvPr/>
         </p:nvSpPr>
         <p:spPr>
           <a:xfrm>
-            <a:off x="3828723" y="3176626"/>
-            <a:ext cx="1297142" cy="695858"/>
+            <a:off x="4174236" y="2693822"/>
+            <a:ext cx="1469898" cy="424282"/>
           </a:xfrm>
           <a:prstGeom prst="rect">
             <a:avLst/>
@@ -5238,31 +5203,31 @@
               <a:buNone/>
             </a:pPr>
             <a:r>
-              <a:rPr lang="en-US" sz="1700" dirty="0">
+              <a:rPr lang="en-US" sz="1200" dirty="0">
                 <a:solidFill>
                   <a:srgbClr val="5C5F6B"/>
                 </a:solidFill>
               </a:rPr>
               <a:t>40</a:t>
             </a:r>
-            <a:endParaRPr lang="en-US" sz="1700" dirty="0"/>
+            <a:endParaRPr lang="en-US" sz="1200" dirty="0"/>
           </a:p>
         </p:txBody>
       </p:sp>
       <p:sp>
         <p:nvSpPr>
-          <p:cNvPr id="13" name="tile_3"/>
+          <p:cNvPr id="14" name="tile_3"/>
           <p:cNvSpPr/>
           <p:nvPr/>
         </p:nvSpPr>
         <p:spPr>
           <a:xfrm>
-            <a:off x="5400185" y="1874520"/>
-            <a:ext cx="1388582" cy="2034540"/>
+            <a:off x="5918454" y="1874520"/>
+            <a:ext cx="1561338" cy="1280160"/>
           </a:xfrm>
           <a:prstGeom prst="roundRect">
             <a:avLst>
-              <a:gd name="adj" fmla="val 9878"/>
+              <a:gd name="adj" fmla="val 10714"/>
             </a:avLst>
           </a:prstGeom>
           <a:solidFill>
@@ -5278,14 +5243,14 @@
       </p:sp>
       <p:sp>
         <p:nvSpPr>
-          <p:cNvPr id="14" name="Text 12"/>
+          <p:cNvPr id="15" name="Text 12"/>
           <p:cNvSpPr txBox="1"/>
           <p:nvPr/>
         </p:nvSpPr>
         <p:spPr>
           <a:xfrm>
-            <a:off x="5400185" y="1947672"/>
-            <a:ext cx="1388582" cy="1261415"/>
+            <a:off x="5918454" y="1947672"/>
+            <a:ext cx="1561338" cy="793699"/>
           </a:xfrm>
           <a:prstGeom prst="rect">
             <a:avLst/>
@@ -5303,7 +5268,7 @@
               <a:buNone/>
             </a:pPr>
             <a:r>
-              <a:rPr lang="ko-KR" altLang="en-US" sz="7600" b="1" dirty="0">
+              <a:rPr lang="ko-KR" altLang="en-US" sz="2400" b="1" dirty="0">
                 <a:solidFill>
                   <a:srgbClr val="4236F6"/>
                 </a:solidFill>
@@ -5313,20 +5278,20 @@
               </a:rPr>
               <a:t>쉰</a:t>
             </a:r>
-            <a:endParaRPr lang="en-US" sz="7600" dirty="0"/>
+            <a:endParaRPr lang="en-US" sz="2400" dirty="0"/>
           </a:p>
         </p:txBody>
       </p:sp>
       <p:sp>
         <p:nvSpPr>
-          <p:cNvPr id="15" name="Text 13"/>
+          <p:cNvPr id="16" name="Text 13"/>
           <p:cNvSpPr txBox="1"/>
           <p:nvPr/>
         </p:nvSpPr>
         <p:spPr>
           <a:xfrm>
-            <a:off x="5445905" y="3176626"/>
-            <a:ext cx="1297142" cy="695858"/>
+            <a:off x="5964174" y="2693822"/>
+            <a:ext cx="1469898" cy="424282"/>
           </a:xfrm>
           <a:prstGeom prst="rect">
             <a:avLst/>
@@ -5344,31 +5309,31 @@
               <a:buNone/>
             </a:pPr>
             <a:r>
-              <a:rPr lang="en-US" sz="1700" dirty="0">
+              <a:rPr lang="en-US" sz="1200" dirty="0">
                 <a:solidFill>
                   <a:srgbClr val="5C5F6B"/>
                 </a:solidFill>
               </a:rPr>
               <a:t>50</a:t>
             </a:r>
-            <a:endParaRPr lang="en-US" sz="1700" dirty="0"/>
+            <a:endParaRPr lang="en-US" sz="1200" dirty="0"/>
           </a:p>
         </p:txBody>
       </p:sp>
       <p:sp>
         <p:nvSpPr>
-          <p:cNvPr id="16" name="tile_4"/>
+          <p:cNvPr id="17" name="tile_4"/>
           <p:cNvSpPr/>
           <p:nvPr/>
         </p:nvSpPr>
         <p:spPr>
           <a:xfrm>
-            <a:off x="7017367" y="1874520"/>
-            <a:ext cx="1388582" cy="2034540"/>
+            <a:off x="548640" y="3383280"/>
+            <a:ext cx="1561338" cy="1280160"/>
           </a:xfrm>
           <a:prstGeom prst="roundRect">
             <a:avLst>
-              <a:gd name="adj" fmla="val 9878"/>
+              <a:gd name="adj" fmla="val 10714"/>
             </a:avLst>
           </a:prstGeom>
           <a:solidFill>
@@ -5384,14 +5349,14 @@
       </p:sp>
       <p:sp>
         <p:nvSpPr>
-          <p:cNvPr id="17" name="Text 15"/>
+          <p:cNvPr id="18" name="Text 15"/>
           <p:cNvSpPr txBox="1"/>
           <p:nvPr/>
         </p:nvSpPr>
         <p:spPr>
           <a:xfrm>
-            <a:off x="7017367" y="1947672"/>
-            <a:ext cx="1388582" cy="1261415"/>
+            <a:off x="548640" y="3456432"/>
+            <a:ext cx="1561338" cy="793699"/>
           </a:xfrm>
           <a:prstGeom prst="rect">
             <a:avLst/>
@@ -5409,7 +5374,7 @@
               <a:buNone/>
             </a:pPr>
             <a:r>
-              <a:rPr lang="ko-KR" altLang="en-US" sz="4500" b="1" dirty="0">
+              <a:rPr lang="ko-KR" altLang="en-US" sz="2400" b="1" dirty="0">
                 <a:solidFill>
                   <a:srgbClr val="4236F6"/>
                 </a:solidFill>
@@ -5419,20 +5384,20 @@
               </a:rPr>
               <a:t>예순</a:t>
             </a:r>
-            <a:endParaRPr lang="en-US" sz="4500" dirty="0"/>
+            <a:endParaRPr lang="en-US" sz="2400" dirty="0"/>
           </a:p>
         </p:txBody>
       </p:sp>
       <p:sp>
         <p:nvSpPr>
-          <p:cNvPr id="18" name="Text 16"/>
+          <p:cNvPr id="19" name="Text 16"/>
           <p:cNvSpPr txBox="1"/>
           <p:nvPr/>
         </p:nvSpPr>
         <p:spPr>
           <a:xfrm>
-            <a:off x="7063087" y="3176626"/>
-            <a:ext cx="1297142" cy="695858"/>
+            <a:off x="594360" y="4202582"/>
+            <a:ext cx="1469898" cy="424282"/>
           </a:xfrm>
           <a:prstGeom prst="rect">
             <a:avLst/>
@@ -5450,31 +5415,31 @@
               <a:buNone/>
             </a:pPr>
             <a:r>
-              <a:rPr lang="en-US" sz="1700" dirty="0">
+              <a:rPr lang="en-US" sz="1200" dirty="0">
                 <a:solidFill>
                   <a:srgbClr val="5C5F6B"/>
                 </a:solidFill>
               </a:rPr>
               <a:t>60</a:t>
             </a:r>
-            <a:endParaRPr lang="en-US" sz="1700" dirty="0"/>
+            <a:endParaRPr lang="en-US" sz="1200" dirty="0"/>
           </a:p>
         </p:txBody>
       </p:sp>
       <p:sp>
         <p:nvSpPr>
-          <p:cNvPr id="19" name="tile_5"/>
+          <p:cNvPr id="20" name="tile_5"/>
           <p:cNvSpPr/>
           <p:nvPr/>
         </p:nvSpPr>
         <p:spPr>
           <a:xfrm>
-            <a:off x="8634549" y="1874520"/>
-            <a:ext cx="1388582" cy="2034540"/>
+            <a:off x="2338578" y="3383280"/>
+            <a:ext cx="1561338" cy="1280160"/>
           </a:xfrm>
           <a:prstGeom prst="roundRect">
             <a:avLst>
-              <a:gd name="adj" fmla="val 9878"/>
+              <a:gd name="adj" fmla="val 10714"/>
             </a:avLst>
           </a:prstGeom>
           <a:solidFill>
@@ -5490,14 +5455,14 @@
       </p:sp>
       <p:sp>
         <p:nvSpPr>
-          <p:cNvPr id="20" name="Text 18"/>
+          <p:cNvPr id="21" name="Text 18"/>
           <p:cNvSpPr txBox="1"/>
           <p:nvPr/>
         </p:nvSpPr>
         <p:spPr>
           <a:xfrm>
-            <a:off x="8634549" y="1947672"/>
-            <a:ext cx="1388582" cy="1261415"/>
+            <a:off x="2338578" y="3456432"/>
+            <a:ext cx="1561338" cy="793699"/>
           </a:xfrm>
           <a:prstGeom prst="rect">
             <a:avLst/>
@@ -5515,7 +5480,7 @@
               <a:buNone/>
             </a:pPr>
             <a:r>
-              <a:rPr lang="ko-KR" altLang="en-US" sz="4500" b="1" dirty="0">
+              <a:rPr lang="ko-KR" altLang="en-US" sz="2400" b="1" dirty="0">
                 <a:solidFill>
                   <a:srgbClr val="4236F6"/>
                 </a:solidFill>
@@ -5525,20 +5490,20 @@
               </a:rPr>
               <a:t>일흔</a:t>
             </a:r>
-            <a:endParaRPr lang="en-US" sz="4500" dirty="0"/>
+            <a:endParaRPr lang="en-US" sz="2400" dirty="0"/>
           </a:p>
         </p:txBody>
       </p:sp>
       <p:sp>
         <p:nvSpPr>
-          <p:cNvPr id="21" name="Text 19"/>
+          <p:cNvPr id="22" name="Text 19"/>
           <p:cNvSpPr txBox="1"/>
           <p:nvPr/>
         </p:nvSpPr>
         <p:spPr>
           <a:xfrm>
-            <a:off x="8680269" y="3176626"/>
-            <a:ext cx="1297142" cy="695858"/>
+            <a:off x="2384298" y="4202582"/>
+            <a:ext cx="1469898" cy="424282"/>
           </a:xfrm>
           <a:prstGeom prst="rect">
             <a:avLst/>
@@ -5556,31 +5521,31 @@
               <a:buNone/>
             </a:pPr>
             <a:r>
-              <a:rPr lang="en-US" sz="1700" dirty="0">
+              <a:rPr lang="en-US" sz="1200" dirty="0">
                 <a:solidFill>
                   <a:srgbClr val="5C5F6B"/>
                 </a:solidFill>
               </a:rPr>
               <a:t>70</a:t>
             </a:r>
-            <a:endParaRPr lang="en-US" sz="1700" dirty="0"/>
+            <a:endParaRPr lang="en-US" sz="1200" dirty="0"/>
           </a:p>
         </p:txBody>
       </p:sp>
       <p:sp>
         <p:nvSpPr>
-          <p:cNvPr id="22" name="tile_6"/>
+          <p:cNvPr id="23" name="tile_6"/>
           <p:cNvSpPr/>
           <p:nvPr/>
         </p:nvSpPr>
         <p:spPr>
           <a:xfrm>
-            <a:off x="10251730" y="1874520"/>
-            <a:ext cx="1388582" cy="2034540"/>
+            <a:off x="4128516" y="3383280"/>
+            <a:ext cx="1561338" cy="1280160"/>
           </a:xfrm>
           <a:prstGeom prst="roundRect">
             <a:avLst>
-              <a:gd name="adj" fmla="val 9878"/>
+              <a:gd name="adj" fmla="val 10714"/>
             </a:avLst>
           </a:prstGeom>
           <a:solidFill>
@@ -5596,14 +5561,14 @@
       </p:sp>
       <p:sp>
         <p:nvSpPr>
-          <p:cNvPr id="23" name="Text 21"/>
+          <p:cNvPr id="24" name="Text 21"/>
           <p:cNvSpPr txBox="1"/>
           <p:nvPr/>
         </p:nvSpPr>
         <p:spPr>
           <a:xfrm>
-            <a:off x="10251730" y="1947672"/>
-            <a:ext cx="1388582" cy="1261415"/>
+            <a:off x="4128516" y="3456432"/>
+            <a:ext cx="1561338" cy="793699"/>
           </a:xfrm>
           <a:prstGeom prst="rect">
             <a:avLst/>
@@ -5621,7 +5586,7 @@
               <a:buNone/>
             </a:pPr>
             <a:r>
-              <a:rPr lang="ko-KR" altLang="en-US" sz="4500" b="1" dirty="0">
+              <a:rPr lang="ko-KR" altLang="en-US" sz="2400" b="1" dirty="0">
                 <a:solidFill>
                   <a:srgbClr val="4236F6"/>
                 </a:solidFill>
@@ -5631,20 +5596,20 @@
               </a:rPr>
               <a:t>여든</a:t>
             </a:r>
-            <a:endParaRPr lang="en-US" sz="4500" dirty="0"/>
+            <a:endParaRPr lang="en-US" sz="2400" dirty="0"/>
           </a:p>
         </p:txBody>
       </p:sp>
       <p:sp>
         <p:nvSpPr>
-          <p:cNvPr id="24" name="Text 22"/>
+          <p:cNvPr id="25" name="Text 22"/>
           <p:cNvSpPr txBox="1"/>
           <p:nvPr/>
         </p:nvSpPr>
         <p:spPr>
           <a:xfrm>
-            <a:off x="10297450" y="3176626"/>
-            <a:ext cx="1297142" cy="695858"/>
+            <a:off x="4174236" y="4202582"/>
+            <a:ext cx="1469898" cy="424282"/>
           </a:xfrm>
           <a:prstGeom prst="rect">
             <a:avLst/>
@@ -5662,31 +5627,31 @@
               <a:buNone/>
             </a:pPr>
             <a:r>
-              <a:rPr lang="en-US" sz="1700" dirty="0">
+              <a:rPr lang="en-US" sz="1200" dirty="0">
                 <a:solidFill>
                   <a:srgbClr val="5C5F6B"/>
                 </a:solidFill>
               </a:rPr>
               <a:t>80</a:t>
             </a:r>
-            <a:endParaRPr lang="en-US" sz="1700" dirty="0"/>
+            <a:endParaRPr lang="en-US" sz="1200" dirty="0"/>
           </a:p>
         </p:txBody>
       </p:sp>
       <p:sp>
         <p:nvSpPr>
-          <p:cNvPr id="25" name="tile_7"/>
+          <p:cNvPr id="26" name="tile_7"/>
           <p:cNvSpPr/>
           <p:nvPr/>
         </p:nvSpPr>
         <p:spPr>
           <a:xfrm>
-            <a:off x="548640" y="4137660"/>
-            <a:ext cx="1388582" cy="2034540"/>
+            <a:off x="5918454" y="3383280"/>
+            <a:ext cx="1561338" cy="1280160"/>
           </a:xfrm>
           <a:prstGeom prst="roundRect">
             <a:avLst>
-              <a:gd name="adj" fmla="val 9878"/>
+              <a:gd name="adj" fmla="val 10714"/>
             </a:avLst>
           </a:prstGeom>
           <a:solidFill>
@@ -5702,14 +5667,14 @@
       </p:sp>
       <p:sp>
         <p:nvSpPr>
-          <p:cNvPr id="26" name="Text 24"/>
+          <p:cNvPr id="27" name="Text 24"/>
           <p:cNvSpPr txBox="1"/>
           <p:nvPr/>
         </p:nvSpPr>
         <p:spPr>
           <a:xfrm>
-            <a:off x="548640" y="4210812"/>
-            <a:ext cx="1388582" cy="1261415"/>
+            <a:off x="5918454" y="3456432"/>
+            <a:ext cx="1561338" cy="793699"/>
           </a:xfrm>
           <a:prstGeom prst="rect">
             <a:avLst/>
@@ -5727,7 +5692,7 @@
               <a:buNone/>
             </a:pPr>
             <a:r>
-              <a:rPr lang="ko-KR" altLang="en-US" sz="4500" b="1" dirty="0">
+              <a:rPr lang="ko-KR" altLang="en-US" sz="2400" b="1" dirty="0">
                 <a:solidFill>
                   <a:srgbClr val="4236F6"/>
                 </a:solidFill>
@@ -5737,20 +5702,20 @@
               </a:rPr>
               <a:t>아흔</a:t>
             </a:r>
-            <a:endParaRPr lang="en-US" sz="4500" dirty="0"/>
+            <a:endParaRPr lang="en-US" sz="2400" dirty="0"/>
           </a:p>
         </p:txBody>
       </p:sp>
       <p:sp>
         <p:nvSpPr>
-          <p:cNvPr id="27" name="Text 25"/>
+          <p:cNvPr id="28" name="Text 25"/>
           <p:cNvSpPr txBox="1"/>
           <p:nvPr/>
         </p:nvSpPr>
         <p:spPr>
           <a:xfrm>
-            <a:off x="594360" y="5439766"/>
-            <a:ext cx="1297142" cy="695858"/>
+            <a:off x="5964174" y="4202582"/>
+            <a:ext cx="1469898" cy="424282"/>
           </a:xfrm>
           <a:prstGeom prst="rect">
             <a:avLst/>
@@ -5768,31 +5733,31 @@
               <a:buNone/>
             </a:pPr>
             <a:r>
-              <a:rPr lang="en-US" sz="1700" dirty="0">
+              <a:rPr lang="en-US" sz="1200" dirty="0">
                 <a:solidFill>
                   <a:srgbClr val="5C5F6B"/>
                 </a:solidFill>
               </a:rPr>
               <a:t>90</a:t>
             </a:r>
-            <a:endParaRPr lang="en-US" sz="1700" dirty="0"/>
+            <a:endParaRPr lang="en-US" sz="1200" dirty="0"/>
           </a:p>
         </p:txBody>
       </p:sp>
       <p:sp>
         <p:nvSpPr>
-          <p:cNvPr id="28" name="tile_8"/>
+          <p:cNvPr id="29" name="tile_8"/>
           <p:cNvSpPr/>
           <p:nvPr/>
         </p:nvSpPr>
         <p:spPr>
           <a:xfrm>
-            <a:off x="2165822" y="4137660"/>
-            <a:ext cx="1388582" cy="2034540"/>
+            <a:off x="548640" y="4892040"/>
+            <a:ext cx="1561338" cy="1280160"/>
           </a:xfrm>
           <a:prstGeom prst="roundRect">
             <a:avLst>
-              <a:gd name="adj" fmla="val 9878"/>
+              <a:gd name="adj" fmla="val 10714"/>
             </a:avLst>
           </a:prstGeom>
           <a:solidFill>
@@ -5808,14 +5773,14 @@
       </p:sp>
       <p:sp>
         <p:nvSpPr>
-          <p:cNvPr id="29" name="Text 27"/>
+          <p:cNvPr id="30" name="Text 27"/>
           <p:cNvSpPr txBox="1"/>
           <p:nvPr/>
         </p:nvSpPr>
         <p:spPr>
           <a:xfrm>
-            <a:off x="2165822" y="4210812"/>
-            <a:ext cx="1388582" cy="1261415"/>
+            <a:off x="548640" y="4965192"/>
+            <a:ext cx="1561338" cy="793699"/>
           </a:xfrm>
           <a:prstGeom prst="rect">
             <a:avLst/>
@@ -5833,7 +5798,7 @@
               <a:buNone/>
             </a:pPr>
             <a:r>
-              <a:rPr lang="ko-KR" altLang="en-US" sz="3800" b="1" dirty="0">
+              <a:rPr lang="ko-KR" altLang="en-US" sz="2400" b="1" dirty="0">
                 <a:solidFill>
                   <a:srgbClr val="4236F6"/>
                 </a:solidFill>
@@ -5841,39 +5806,22 @@
                 <a:ea typeface="Malgun Gothic" pitchFamily="34" charset="-122"/>
                 <a:cs typeface="Malgun Gothic" pitchFamily="34" charset="-120"/>
               </a:rPr>
-              <a:t>스무</a:t>
-            </a:r>
-            <a:endParaRPr lang="en-US" sz="3800" dirty="0"/>
-          </a:p>
-          <a:p>
-            <a:pPr marL="0" indent="0" algn="ctr" eaLnBrk="1">
-              <a:buNone/>
-            </a:pPr>
-            <a:r>
-              <a:rPr lang="ko-KR" altLang="en-US" sz="3800" b="1" dirty="0">
-                <a:solidFill>
-                  <a:srgbClr val="4236F6"/>
-                </a:solidFill>
-                <a:latin typeface="Malgun Gothic" pitchFamily="34" charset="0"/>
-                <a:ea typeface="Malgun Gothic" pitchFamily="34" charset="-122"/>
-                <a:cs typeface="Malgun Gothic" pitchFamily="34" charset="-120"/>
-              </a:rPr>
-              <a:t>살</a:t>
-            </a:r>
-            <a:endParaRPr lang="en-US" sz="3800" dirty="0"/>
+              <a:t>스무 살</a:t>
+            </a:r>
+            <a:endParaRPr lang="en-US" sz="2400" dirty="0"/>
           </a:p>
         </p:txBody>
       </p:sp>
       <p:sp>
         <p:nvSpPr>
-          <p:cNvPr id="30" name="Text 28"/>
+          <p:cNvPr id="31" name="Text 28"/>
           <p:cNvSpPr txBox="1"/>
           <p:nvPr/>
         </p:nvSpPr>
         <p:spPr>
           <a:xfrm>
-            <a:off x="2211542" y="5439766"/>
-            <a:ext cx="1297142" cy="695858"/>
+            <a:off x="594360" y="5711342"/>
+            <a:ext cx="1469898" cy="424282"/>
           </a:xfrm>
           <a:prstGeom prst="rect">
             <a:avLst/>
@@ -5891,31 +5839,31 @@
               <a:buNone/>
             </a:pPr>
             <a:r>
-              <a:rPr lang="en-US" sz="1700" dirty="0">
+              <a:rPr lang="en-US" sz="1200" dirty="0">
                 <a:solidFill>
                   <a:srgbClr val="5C5F6B"/>
                 </a:solidFill>
               </a:rPr>
               <a:t>20 años</a:t>
             </a:r>
-            <a:endParaRPr lang="en-US" sz="1700" dirty="0"/>
+            <a:endParaRPr lang="en-US" sz="1200" dirty="0"/>
           </a:p>
         </p:txBody>
       </p:sp>
       <p:sp>
         <p:nvSpPr>
-          <p:cNvPr id="31" name="tile_9"/>
+          <p:cNvPr id="32" name="tile_9"/>
           <p:cNvSpPr/>
           <p:nvPr/>
         </p:nvSpPr>
         <p:spPr>
           <a:xfrm>
-            <a:off x="3783003" y="4137660"/>
-            <a:ext cx="1388582" cy="2034540"/>
+            <a:off x="2338578" y="4892040"/>
+            <a:ext cx="1561338" cy="1280160"/>
           </a:xfrm>
           <a:prstGeom prst="roundRect">
             <a:avLst>
-              <a:gd name="adj" fmla="val 9878"/>
+              <a:gd name="adj" fmla="val 10714"/>
             </a:avLst>
           </a:prstGeom>
           <a:solidFill>
@@ -5931,14 +5879,14 @@
       </p:sp>
       <p:sp>
         <p:nvSpPr>
-          <p:cNvPr id="32" name="Text 30"/>
+          <p:cNvPr id="33" name="Text 30"/>
           <p:cNvSpPr txBox="1"/>
           <p:nvPr/>
         </p:nvSpPr>
         <p:spPr>
           <a:xfrm>
-            <a:off x="3783003" y="4210812"/>
-            <a:ext cx="1388582" cy="1261415"/>
+            <a:off x="2338578" y="4965192"/>
+            <a:ext cx="1561338" cy="793699"/>
           </a:xfrm>
           <a:prstGeom prst="rect">
             <a:avLst/>
@@ -5956,7 +5904,7 @@
               <a:buNone/>
             </a:pPr>
             <a:r>
-              <a:rPr lang="ko-KR" altLang="en-US" sz="2200" b="1" dirty="0">
+              <a:rPr lang="ko-KR" altLang="en-US" sz="1900" b="1" dirty="0">
                 <a:solidFill>
                   <a:srgbClr val="4236F6"/>
                 </a:solidFill>
@@ -5964,39 +5912,22 @@
                 <a:ea typeface="Malgun Gothic" pitchFamily="34" charset="-122"/>
                 <a:cs typeface="Malgun Gothic" pitchFamily="34" charset="-120"/>
               </a:rPr>
-              <a:t>스물다섯</a:t>
-            </a:r>
-            <a:endParaRPr lang="en-US" sz="2200" dirty="0"/>
-          </a:p>
-          <a:p>
-            <a:pPr marL="0" indent="0" algn="ctr" eaLnBrk="1">
-              <a:buNone/>
-            </a:pPr>
-            <a:r>
-              <a:rPr lang="ko-KR" altLang="en-US" sz="2200" b="1" dirty="0">
-                <a:solidFill>
-                  <a:srgbClr val="4236F6"/>
-                </a:solidFill>
-                <a:latin typeface="Malgun Gothic" pitchFamily="34" charset="0"/>
-                <a:ea typeface="Malgun Gothic" pitchFamily="34" charset="-122"/>
-                <a:cs typeface="Malgun Gothic" pitchFamily="34" charset="-120"/>
-              </a:rPr>
-              <a:t>살</a:t>
-            </a:r>
-            <a:endParaRPr lang="en-US" sz="2200" dirty="0"/>
+              <a:t>스물다섯 살</a:t>
+            </a:r>
+            <a:endParaRPr lang="en-US" sz="1900" dirty="0"/>
           </a:p>
         </p:txBody>
       </p:sp>
       <p:sp>
         <p:nvSpPr>
-          <p:cNvPr id="33" name="Text 31"/>
+          <p:cNvPr id="34" name="Text 31"/>
           <p:cNvSpPr txBox="1"/>
           <p:nvPr/>
         </p:nvSpPr>
         <p:spPr>
           <a:xfrm>
-            <a:off x="3828723" y="5439766"/>
-            <a:ext cx="1297142" cy="695858"/>
+            <a:off x="2384298" y="5711342"/>
+            <a:ext cx="1469898" cy="424282"/>
           </a:xfrm>
           <a:prstGeom prst="rect">
             <a:avLst/>
@@ -6014,31 +5945,31 @@
               <a:buNone/>
             </a:pPr>
             <a:r>
-              <a:rPr lang="en-US" sz="1700" dirty="0">
+              <a:rPr lang="en-US" sz="1200" dirty="0">
                 <a:solidFill>
                   <a:srgbClr val="5C5F6B"/>
                 </a:solidFill>
               </a:rPr>
               <a:t>25 años</a:t>
             </a:r>
-            <a:endParaRPr lang="en-US" sz="1700" dirty="0"/>
+            <a:endParaRPr lang="en-US" sz="1200" dirty="0"/>
           </a:p>
         </p:txBody>
       </p:sp>
       <p:sp>
         <p:nvSpPr>
-          <p:cNvPr id="34" name="tile_10"/>
+          <p:cNvPr id="35" name="tile_10"/>
           <p:cNvSpPr/>
           <p:nvPr/>
         </p:nvSpPr>
         <p:spPr>
           <a:xfrm>
-            <a:off x="5400185" y="4137660"/>
-            <a:ext cx="1388582" cy="2034540"/>
+            <a:off x="4128516" y="4892040"/>
+            <a:ext cx="1561338" cy="1280160"/>
           </a:xfrm>
           <a:prstGeom prst="roundRect">
             <a:avLst>
-              <a:gd name="adj" fmla="val 9878"/>
+              <a:gd name="adj" fmla="val 10714"/>
             </a:avLst>
           </a:prstGeom>
           <a:solidFill>
@@ -6054,14 +5985,14 @@
       </p:sp>
       <p:sp>
         <p:nvSpPr>
-          <p:cNvPr id="35" name="Text 33"/>
+          <p:cNvPr id="36" name="Text 33"/>
           <p:cNvSpPr txBox="1"/>
           <p:nvPr/>
         </p:nvSpPr>
         <p:spPr>
           <a:xfrm>
-            <a:off x="5400185" y="4210812"/>
-            <a:ext cx="1388582" cy="1261415"/>
+            <a:off x="4128516" y="4965192"/>
+            <a:ext cx="1561338" cy="793699"/>
           </a:xfrm>
           <a:prstGeom prst="rect">
             <a:avLst/>
@@ -6079,7 +6010,7 @@
               <a:buNone/>
             </a:pPr>
             <a:r>
-              <a:rPr lang="ko-KR" altLang="en-US" sz="3000" b="1" dirty="0">
+              <a:rPr lang="ko-KR" altLang="en-US" sz="2400" b="1" dirty="0">
                 <a:solidFill>
                   <a:srgbClr val="4236F6"/>
                 </a:solidFill>
@@ -6087,39 +6018,22 @@
                 <a:ea typeface="Malgun Gothic" pitchFamily="34" charset="-122"/>
                 <a:cs typeface="Malgun Gothic" pitchFamily="34" charset="-120"/>
               </a:rPr>
-              <a:t>서른한</a:t>
-            </a:r>
-            <a:endParaRPr lang="en-US" sz="3000" dirty="0"/>
-          </a:p>
-          <a:p>
-            <a:pPr marL="0" indent="0" algn="ctr" eaLnBrk="1">
-              <a:buNone/>
-            </a:pPr>
-            <a:r>
-              <a:rPr lang="ko-KR" altLang="en-US" sz="3000" b="1" dirty="0">
-                <a:solidFill>
-                  <a:srgbClr val="4236F6"/>
-                </a:solidFill>
-                <a:latin typeface="Malgun Gothic" pitchFamily="34" charset="0"/>
-                <a:ea typeface="Malgun Gothic" pitchFamily="34" charset="-122"/>
-                <a:cs typeface="Malgun Gothic" pitchFamily="34" charset="-120"/>
-              </a:rPr>
-              <a:t>살</a:t>
-            </a:r>
-            <a:endParaRPr lang="en-US" sz="3000" dirty="0"/>
+              <a:t>서른한 살</a:t>
+            </a:r>
+            <a:endParaRPr lang="en-US" sz="2400" dirty="0"/>
           </a:p>
         </p:txBody>
       </p:sp>
       <p:sp>
         <p:nvSpPr>
-          <p:cNvPr id="36" name="Text 34"/>
+          <p:cNvPr id="37" name="Text 34"/>
           <p:cNvSpPr txBox="1"/>
           <p:nvPr/>
         </p:nvSpPr>
         <p:spPr>
           <a:xfrm>
-            <a:off x="5445905" y="5439766"/>
-            <a:ext cx="1297142" cy="695858"/>
+            <a:off x="4174236" y="5711342"/>
+            <a:ext cx="1469898" cy="424282"/>
           </a:xfrm>
           <a:prstGeom prst="rect">
             <a:avLst/>
@@ -6137,20 +6051,20 @@
               <a:buNone/>
             </a:pPr>
             <a:r>
-              <a:rPr lang="en-US" sz="1700" dirty="0">
+              <a:rPr lang="en-US" sz="1200" dirty="0">
                 <a:solidFill>
                   <a:srgbClr val="5C5F6B"/>
                 </a:solidFill>
               </a:rPr>
               <a:t>31 años</a:t>
             </a:r>
-            <a:endParaRPr lang="en-US" sz="1700" dirty="0"/>
+            <a:endParaRPr lang="en-US" sz="1200" dirty="0"/>
           </a:p>
         </p:txBody>
       </p:sp>
       <p:sp>
         <p:nvSpPr>
-          <p:cNvPr id="37" name="Slide Number Placeholder 0"/>
+          <p:cNvPr id="38" name="Slide Number Placeholder 0"/>
           <p:cNvSpPr>
             <a:spLocks noGrp="1"/>
           </p:cNvSpPr>
@@ -6278,7 +6192,7 @@
         <p:spPr>
           <a:xfrm>
             <a:off x="548640" y="1325880"/>
-            <a:ext cx="11064240" cy="548640"/>
+            <a:ext cx="11091672" cy="548640"/>
           </a:xfrm>
           <a:prstGeom prst="rect">
             <a:avLst/>
@@ -6345,7 +6259,7 @@
         </p:nvSpPr>
         <p:spPr>
           <a:xfrm>
-            <a:off x="548640" y="2171700"/>
+            <a:off x="548640" y="2215134"/>
             <a:ext cx="457200" cy="457200"/>
           </a:xfrm>
           <a:prstGeom prst="ellipse">
@@ -6370,7 +6284,7 @@
         </p:nvSpPr>
         <p:spPr>
           <a:xfrm>
-            <a:off x="548640" y="2171700"/>
+            <a:off x="548640" y="2215134"/>
             <a:ext cx="457200" cy="457200"/>
           </a:xfrm>
           <a:prstGeom prst="rect">
@@ -6400,16 +6314,40 @@
           </a:p>
         </p:txBody>
       </p:sp>
-      <p:sp>
-        <p:nvSpPr>
-          <p:cNvPr id="6" name="Text 4"/>
+      <p:pic>
+        <p:nvPicPr>
+          <p:cNvPr id="6" name="item_img_0" descr="C:\Users\Chingu\AppData\Local\Temp\claude\C--Users-Chingu-Desktop-ACADEMIASEULWEB\d4111e1b-5523-44ea-97b2-b1a1d9545b9e\scratchpad\decks\cache\img_a58c50f703ed105a.png"/>
+          <p:cNvPicPr>
+            <a:picLocks noChangeAspect="1"/>
+          </p:cNvPicPr>
+          <p:nvPr/>
+        </p:nvPicPr>
+        <p:blipFill>
+          <a:blip r:embed="rId3"/>
+          <a:stretch>
+            <a:fillRect/>
+          </a:stretch>
+        </p:blipFill>
+        <p:spPr>
+          <a:xfrm>
+            <a:off x="1115568" y="1986534"/>
+            <a:ext cx="914400" cy="914400"/>
+          </a:xfrm>
+          <a:prstGeom prst="rect">
+            <a:avLst/>
+          </a:prstGeom>
+        </p:spPr>
+      </p:pic>
+      <p:sp>
+        <p:nvSpPr>
+          <p:cNvPr id="7" name="Text 4"/>
           <p:cNvSpPr txBox="1"/>
           <p:nvPr/>
         </p:nvSpPr>
         <p:spPr>
           <a:xfrm>
-            <a:off x="1188720" y="1965960"/>
-            <a:ext cx="5285232" cy="868680"/>
+            <a:off x="2212848" y="1965960"/>
+            <a:ext cx="4261104" cy="955548"/>
           </a:xfrm>
           <a:prstGeom prst="rect">
             <a:avLst/>
@@ -6451,18 +6389,18 @@
       </p:sp>
       <p:sp>
         <p:nvSpPr>
-          <p:cNvPr id="7" name="rev_5_caja"/>
+          <p:cNvPr id="8" name="rev_5_caja"/>
           <p:cNvSpPr/>
           <p:nvPr/>
         </p:nvSpPr>
         <p:spPr>
           <a:xfrm>
             <a:off x="6702552" y="2002536"/>
-            <a:ext cx="4937760" cy="795528"/>
+            <a:ext cx="4937760" cy="882396"/>
           </a:xfrm>
           <a:prstGeom prst="roundRect">
             <a:avLst>
-              <a:gd name="adj" fmla="val 13793"/>
+              <a:gd name="adj" fmla="val 12435"/>
             </a:avLst>
           </a:prstGeom>
           <a:solidFill>
@@ -6478,14 +6416,14 @@
       </p:sp>
       <p:sp>
         <p:nvSpPr>
-          <p:cNvPr id="8" name="rev_5_txt"/>
+          <p:cNvPr id="9" name="rev_5_txt"/>
           <p:cNvSpPr txBox="1"/>
           <p:nvPr/>
         </p:nvSpPr>
         <p:spPr>
           <a:xfrm>
             <a:off x="6793992" y="2002536"/>
-            <a:ext cx="4754880" cy="795528"/>
+            <a:ext cx="4754880" cy="882396"/>
           </a:xfrm>
           <a:prstGeom prst="rect">
             <a:avLst/>
@@ -6511,7 +6449,7 @@
                 <a:ea typeface="Malgun Gothic" pitchFamily="34" charset="-122"/>
                 <a:cs typeface="Malgun Gothic" pitchFamily="34" charset="-120"/>
               </a:rPr>
-              <a:t>네 시예요</a:t>
+              <a:t>네 시예요</a:t>
             </a:r>
             <a:r>
               <a:rPr lang="en-US" sz="2200" b="1" dirty="0">
@@ -6527,13 +6465,13 @@
       </p:sp>
       <p:sp>
         <p:nvSpPr>
-          <p:cNvPr id="9" name="num_1"/>
+          <p:cNvPr id="10" name="num_1"/>
           <p:cNvSpPr/>
           <p:nvPr/>
         </p:nvSpPr>
         <p:spPr>
           <a:xfrm>
-            <a:off x="548640" y="3168396"/>
+            <a:off x="548640" y="3298698"/>
             <a:ext cx="457200" cy="457200"/>
           </a:xfrm>
           <a:prstGeom prst="ellipse">
@@ -6552,13 +6490,13 @@
       </p:sp>
       <p:sp>
         <p:nvSpPr>
-          <p:cNvPr id="10" name="Text 8"/>
+          <p:cNvPr id="11" name="Text 8"/>
           <p:cNvSpPr txBox="1"/>
           <p:nvPr/>
         </p:nvSpPr>
         <p:spPr>
           <a:xfrm>
-            <a:off x="548640" y="3168396"/>
+            <a:off x="548640" y="3298698"/>
             <a:ext cx="457200" cy="457200"/>
           </a:xfrm>
           <a:prstGeom prst="rect">
@@ -6588,16 +6526,40 @@
           </a:p>
         </p:txBody>
       </p:sp>
-      <p:sp>
-        <p:nvSpPr>
-          <p:cNvPr id="11" name="Text 9"/>
+      <p:pic>
+        <p:nvPicPr>
+          <p:cNvPr id="12" name="item_img_1" descr="C:\Users\Chingu\AppData\Local\Temp\claude\C--Users-Chingu-Desktop-ACADEMIASEULWEB\d4111e1b-5523-44ea-97b2-b1a1d9545b9e\scratchpad\decks\cache\img_0fbebb8ebc297c19.png"/>
+          <p:cNvPicPr>
+            <a:picLocks noChangeAspect="1"/>
+          </p:cNvPicPr>
+          <p:nvPr/>
+        </p:nvPicPr>
+        <p:blipFill>
+          <a:blip r:embed="rId4"/>
+          <a:stretch>
+            <a:fillRect/>
+          </a:stretch>
+        </p:blipFill>
+        <p:spPr>
+          <a:xfrm>
+            <a:off x="1115568" y="3070098"/>
+            <a:ext cx="914400" cy="914400"/>
+          </a:xfrm>
+          <a:prstGeom prst="rect">
+            <a:avLst/>
+          </a:prstGeom>
+        </p:spPr>
+      </p:pic>
+      <p:sp>
+        <p:nvSpPr>
+          <p:cNvPr id="13" name="Text 9"/>
           <p:cNvSpPr txBox="1"/>
           <p:nvPr/>
         </p:nvSpPr>
         <p:spPr>
           <a:xfrm>
-            <a:off x="1188720" y="2962656"/>
-            <a:ext cx="5285232" cy="868680"/>
+            <a:off x="2212848" y="3049524"/>
+            <a:ext cx="4261104" cy="955548"/>
           </a:xfrm>
           <a:prstGeom prst="rect">
             <a:avLst/>
@@ -6639,18 +6601,18 @@
       </p:sp>
       <p:sp>
         <p:nvSpPr>
-          <p:cNvPr id="12" name="rev_6_caja"/>
+          <p:cNvPr id="14" name="rev_6_caja"/>
           <p:cNvSpPr/>
           <p:nvPr/>
         </p:nvSpPr>
         <p:spPr>
           <a:xfrm>
-            <a:off x="6702552" y="2999232"/>
-            <a:ext cx="4937760" cy="795528"/>
+            <a:off x="6702552" y="3086100"/>
+            <a:ext cx="4937760" cy="882396"/>
           </a:xfrm>
           <a:prstGeom prst="roundRect">
             <a:avLst>
-              <a:gd name="adj" fmla="val 13793"/>
+              <a:gd name="adj" fmla="val 12435"/>
             </a:avLst>
           </a:prstGeom>
           <a:solidFill>
@@ -6666,14 +6628,14 @@
       </p:sp>
       <p:sp>
         <p:nvSpPr>
-          <p:cNvPr id="13" name="rev_6_txt"/>
+          <p:cNvPr id="15" name="rev_6_txt"/>
           <p:cNvSpPr txBox="1"/>
           <p:nvPr/>
         </p:nvSpPr>
         <p:spPr>
           <a:xfrm>
-            <a:off x="6793992" y="2999232"/>
-            <a:ext cx="4754880" cy="795528"/>
+            <a:off x="6793992" y="3086100"/>
+            <a:ext cx="4754880" cy="882396"/>
           </a:xfrm>
           <a:prstGeom prst="rect">
             <a:avLst/>
@@ -6715,13 +6677,13 @@
       </p:sp>
       <p:sp>
         <p:nvSpPr>
-          <p:cNvPr id="14" name="num_2"/>
+          <p:cNvPr id="16" name="num_2"/>
           <p:cNvSpPr/>
           <p:nvPr/>
         </p:nvSpPr>
         <p:spPr>
           <a:xfrm>
-            <a:off x="548640" y="4165092"/>
+            <a:off x="548640" y="4382262"/>
             <a:ext cx="457200" cy="457200"/>
           </a:xfrm>
           <a:prstGeom prst="ellipse">
@@ -6740,13 +6702,13 @@
       </p:sp>
       <p:sp>
         <p:nvSpPr>
-          <p:cNvPr id="15" name="Text 13"/>
+          <p:cNvPr id="17" name="Text 13"/>
           <p:cNvSpPr txBox="1"/>
           <p:nvPr/>
         </p:nvSpPr>
         <p:spPr>
           <a:xfrm>
-            <a:off x="548640" y="4165092"/>
+            <a:off x="548640" y="4382262"/>
             <a:ext cx="457200" cy="457200"/>
           </a:xfrm>
           <a:prstGeom prst="rect">
@@ -6776,16 +6738,40 @@
           </a:p>
         </p:txBody>
       </p:sp>
-      <p:sp>
-        <p:nvSpPr>
-          <p:cNvPr id="16" name="Text 14"/>
+      <p:pic>
+        <p:nvPicPr>
+          <p:cNvPr id="18" name="item_img_2" descr="C:\Users\Chingu\AppData\Local\Temp\claude\C--Users-Chingu-Desktop-ACADEMIASEULWEB\d4111e1b-5523-44ea-97b2-b1a1d9545b9e\scratchpad\decks\cache\img_0668c7a115ab8755.png"/>
+          <p:cNvPicPr>
+            <a:picLocks noChangeAspect="1"/>
+          </p:cNvPicPr>
+          <p:nvPr/>
+        </p:nvPicPr>
+        <p:blipFill>
+          <a:blip r:embed="rId5"/>
+          <a:stretch>
+            <a:fillRect/>
+          </a:stretch>
+        </p:blipFill>
+        <p:spPr>
+          <a:xfrm>
+            <a:off x="1115568" y="4153662"/>
+            <a:ext cx="914400" cy="914400"/>
+          </a:xfrm>
+          <a:prstGeom prst="rect">
+            <a:avLst/>
+          </a:prstGeom>
+        </p:spPr>
+      </p:pic>
+      <p:sp>
+        <p:nvSpPr>
+          <p:cNvPr id="19" name="Text 14"/>
           <p:cNvSpPr txBox="1"/>
           <p:nvPr/>
         </p:nvSpPr>
         <p:spPr>
           <a:xfrm>
-            <a:off x="1188720" y="3959352"/>
-            <a:ext cx="5285232" cy="868680"/>
+            <a:off x="2212848" y="4133088"/>
+            <a:ext cx="4261104" cy="955548"/>
           </a:xfrm>
           <a:prstGeom prst="rect">
             <a:avLst/>
@@ -6827,18 +6813,18 @@
       </p:sp>
       <p:sp>
         <p:nvSpPr>
-          <p:cNvPr id="17" name="rev_7_caja"/>
+          <p:cNvPr id="20" name="rev_7_caja"/>
           <p:cNvSpPr/>
           <p:nvPr/>
         </p:nvSpPr>
         <p:spPr>
           <a:xfrm>
-            <a:off x="6702552" y="3995928"/>
-            <a:ext cx="4937760" cy="795528"/>
+            <a:off x="6702552" y="4169664"/>
+            <a:ext cx="4937760" cy="882396"/>
           </a:xfrm>
           <a:prstGeom prst="roundRect">
             <a:avLst>
-              <a:gd name="adj" fmla="val 13793"/>
+              <a:gd name="adj" fmla="val 12435"/>
             </a:avLst>
           </a:prstGeom>
           <a:solidFill>
@@ -6854,14 +6840,14 @@
       </p:sp>
       <p:sp>
         <p:nvSpPr>
-          <p:cNvPr id="18" name="rev_7_txt"/>
+          <p:cNvPr id="21" name="rev_7_txt"/>
           <p:cNvSpPr txBox="1"/>
           <p:nvPr/>
         </p:nvSpPr>
         <p:spPr>
           <a:xfrm>
-            <a:off x="6793992" y="3995928"/>
-            <a:ext cx="4754880" cy="795528"/>
+            <a:off x="6793992" y="4169664"/>
+            <a:ext cx="4754880" cy="882396"/>
           </a:xfrm>
           <a:prstGeom prst="rect">
             <a:avLst/>
@@ -6887,7 +6873,7 @@
                 <a:ea typeface="Malgun Gothic" pitchFamily="34" charset="-122"/>
                 <a:cs typeface="Malgun Gothic" pitchFamily="34" charset="-120"/>
               </a:rPr>
-              <a:t>일곱 시예요</a:t>
+              <a:t>일곱 시예요</a:t>
             </a:r>
             <a:r>
               <a:rPr lang="en-US" sz="2200" b="1" dirty="0">
@@ -6903,13 +6889,13 @@
       </p:sp>
       <p:sp>
         <p:nvSpPr>
-          <p:cNvPr id="19" name="num_3"/>
+          <p:cNvPr id="22" name="num_3"/>
           <p:cNvSpPr/>
           <p:nvPr/>
         </p:nvSpPr>
         <p:spPr>
           <a:xfrm>
-            <a:off x="548640" y="5161788"/>
+            <a:off x="548640" y="5465826"/>
             <a:ext cx="457200" cy="457200"/>
           </a:xfrm>
           <a:prstGeom prst="ellipse">
@@ -6928,13 +6914,13 @@
       </p:sp>
       <p:sp>
         <p:nvSpPr>
-          <p:cNvPr id="20" name="Text 18"/>
+          <p:cNvPr id="23" name="Text 18"/>
           <p:cNvSpPr txBox="1"/>
           <p:nvPr/>
         </p:nvSpPr>
         <p:spPr>
           <a:xfrm>
-            <a:off x="548640" y="5161788"/>
+            <a:off x="548640" y="5465826"/>
             <a:ext cx="457200" cy="457200"/>
           </a:xfrm>
           <a:prstGeom prst="rect">
@@ -6966,14 +6952,14 @@
       </p:sp>
       <p:sp>
         <p:nvSpPr>
-          <p:cNvPr id="21" name="Text 19"/>
+          <p:cNvPr id="24" name="Text 19"/>
           <p:cNvSpPr txBox="1"/>
           <p:nvPr/>
         </p:nvSpPr>
         <p:spPr>
           <a:xfrm>
-            <a:off x="1188720" y="4956048"/>
-            <a:ext cx="5285232" cy="868680"/>
+            <a:off x="2212848" y="5216652"/>
+            <a:ext cx="4261104" cy="955548"/>
           </a:xfrm>
           <a:prstGeom prst="rect">
             <a:avLst/>
@@ -7015,18 +7001,18 @@
       </p:sp>
       <p:sp>
         <p:nvSpPr>
-          <p:cNvPr id="22" name="rev_8_caja"/>
+          <p:cNvPr id="25" name="rev_8_caja"/>
           <p:cNvSpPr/>
           <p:nvPr/>
         </p:nvSpPr>
         <p:spPr>
           <a:xfrm>
-            <a:off x="6702552" y="4992624"/>
-            <a:ext cx="4937760" cy="795528"/>
+            <a:off x="6702552" y="5253228"/>
+            <a:ext cx="4937760" cy="882396"/>
           </a:xfrm>
           <a:prstGeom prst="roundRect">
             <a:avLst>
-              <a:gd name="adj" fmla="val 13793"/>
+              <a:gd name="adj" fmla="val 12435"/>
             </a:avLst>
           </a:prstGeom>
           <a:solidFill>
@@ -7042,14 +7028,14 @@
       </p:sp>
       <p:sp>
         <p:nvSpPr>
-          <p:cNvPr id="23" name="rev_8_txt"/>
+          <p:cNvPr id="26" name="rev_8_txt"/>
           <p:cNvSpPr txBox="1"/>
           <p:nvPr/>
         </p:nvSpPr>
         <p:spPr>
           <a:xfrm>
-            <a:off x="6793992" y="4992624"/>
-            <a:ext cx="4754880" cy="795528"/>
+            <a:off x="6793992" y="5253228"/>
+            <a:ext cx="4754880" cy="882396"/>
           </a:xfrm>
           <a:prstGeom prst="rect">
             <a:avLst/>
@@ -7094,7 +7080,7 @@
                 <a:ea typeface="Malgun Gothic" pitchFamily="34" charset="-122"/>
                 <a:cs typeface="Malgun Gothic" pitchFamily="34" charset="-120"/>
               </a:rPr>
-              <a:t>스무 살 </a:t>
+              <a:t>스무 살 </a:t>
             </a:r>
             <a:r>
               <a:rPr lang="en-US" sz="2200" b="1" dirty="0">
@@ -7148,7 +7134,7 @@
       </p:sp>
       <p:sp>
         <p:nvSpPr>
-          <p:cNvPr id="25" name="Slide Number Placeholder 0"/>
+          <p:cNvPr id="27" name="Slide Number Placeholder 0"/>
           <p:cNvSpPr>
             <a:spLocks noGrp="1"/>
           </p:cNvSpPr>
@@ -7233,7 +7219,7 @@
                                           </p:stCondLst>
                                         </p:cTn>
                                         <p:tgtEl>
-                                          <p:spTgt spid="7"/>
+                                          <p:spTgt spid="8"/>
                                         </p:tgtEl>
                                         <p:attrNameLst>
                                           <p:attrName>style.visibility</p:attrName>
@@ -7260,7 +7246,7 @@
                                           </p:stCondLst>
                                         </p:cTn>
                                         <p:tgtEl>
-                                          <p:spTgt spid="8"/>
+                                          <p:spTgt spid="9"/>
                                         </p:tgtEl>
                                         <p:attrNameLst>
                                           <p:attrName>style.visibility</p:attrName>
@@ -7305,7 +7291,7 @@
                                           </p:stCondLst>
                                         </p:cTn>
                                         <p:tgtEl>
-                                          <p:spTgt spid="12"/>
+                                          <p:spTgt spid="14"/>
                                         </p:tgtEl>
                                         <p:attrNameLst>
                                           <p:attrName>style.visibility</p:attrName>
@@ -7332,7 +7318,7 @@
                                           </p:stCondLst>
                                         </p:cTn>
                                         <p:tgtEl>
-                                          <p:spTgt spid="13"/>
+                                          <p:spTgt spid="15"/>
                                         </p:tgtEl>
                                         <p:attrNameLst>
                                           <p:attrName>style.visibility</p:attrName>
@@ -7377,7 +7363,7 @@
                                           </p:stCondLst>
                                         </p:cTn>
                                         <p:tgtEl>
-                                          <p:spTgt spid="17"/>
+                                          <p:spTgt spid="20"/>
                                         </p:tgtEl>
                                         <p:attrNameLst>
                                           <p:attrName>style.visibility</p:attrName>
@@ -7404,7 +7390,7 @@
                                           </p:stCondLst>
                                         </p:cTn>
                                         <p:tgtEl>
-                                          <p:spTgt spid="18"/>
+                                          <p:spTgt spid="21"/>
                                         </p:tgtEl>
                                         <p:attrNameLst>
                                           <p:attrName>style.visibility</p:attrName>
@@ -7449,7 +7435,7 @@
                                           </p:stCondLst>
                                         </p:cTn>
                                         <p:tgtEl>
-                                          <p:spTgt spid="22"/>
+                                          <p:spTgt spid="25"/>
                                         </p:tgtEl>
                                         <p:attrNameLst>
                                           <p:attrName>style.visibility</p:attrName>
@@ -7476,7 +7462,7 @@
                                           </p:stCondLst>
                                         </p:cTn>
                                         <p:tgtEl>
-                                          <p:spTgt spid="23"/>
+                                          <p:spTgt spid="26"/>
                                         </p:tgtEl>
                                         <p:attrNameLst>
                                           <p:attrName>style.visibility</p:attrName>
@@ -7517,10 +7503,10 @@
       </p:par>
     </p:tnLst>
     <p:bldLst>
-      <p:bldP spid="8" grpId="0" animBg="1"/>
-      <p:bldP spid="13" grpId="0" animBg="1"/>
-      <p:bldP spid="18" grpId="0" animBg="1"/>
-      <p:bldP spid="23" grpId="0" animBg="1"/>
+      <p:bldP spid="9" grpId="0" animBg="1"/>
+      <p:bldP spid="15" grpId="0" animBg="1"/>
+      <p:bldP spid="21" grpId="0" animBg="1"/>
+      <p:bldP spid="26" grpId="0" animBg="1"/>
     </p:bldLst>
   </p:timing>
 </p:sld>
@@ -7630,7 +7616,7 @@
         <p:spPr>
           <a:xfrm>
             <a:off x="548640" y="1325880"/>
-            <a:ext cx="11064240" cy="457200"/>
+            <a:ext cx="11091672" cy="457200"/>
           </a:xfrm>
           <a:prstGeom prst="rect">
             <a:avLst/>
@@ -7876,7 +7862,7 @@
               <a:buNone/>
             </a:pPr>
             <a:r>
-              <a:rPr lang="ko-KR" altLang="en-US" sz="4500" b="1" dirty="0">
+              <a:rPr lang="ko-KR" altLang="en-US" sz="3000" b="1" dirty="0">
                 <a:solidFill>
                   <a:srgbClr val="4236F6"/>
                 </a:solidFill>
@@ -7886,7 +7872,7 @@
               </a:rPr>
               <a:t>일월</a:t>
             </a:r>
-            <a:endParaRPr lang="en-US" sz="4500" dirty="0"/>
+            <a:endParaRPr lang="en-US" sz="3000" dirty="0"/>
           </a:p>
         </p:txBody>
       </p:sp>
@@ -7982,7 +7968,7 @@
               <a:buNone/>
             </a:pPr>
             <a:r>
-              <a:rPr lang="ko-KR" altLang="en-US" sz="4500" b="1" dirty="0">
+              <a:rPr lang="ko-KR" altLang="en-US" sz="3000" b="1" dirty="0">
                 <a:solidFill>
                   <a:srgbClr val="4236F6"/>
                 </a:solidFill>
@@ -7992,7 +7978,7 @@
               </a:rPr>
               <a:t>이월</a:t>
             </a:r>
-            <a:endParaRPr lang="en-US" sz="4500" dirty="0"/>
+            <a:endParaRPr lang="en-US" sz="3000" dirty="0"/>
           </a:p>
         </p:txBody>
       </p:sp>
@@ -8088,7 +8074,7 @@
               <a:buNone/>
             </a:pPr>
             <a:r>
-              <a:rPr lang="ko-KR" altLang="en-US" sz="4500" b="1" dirty="0">
+              <a:rPr lang="ko-KR" altLang="en-US" sz="3000" b="1" dirty="0">
                 <a:solidFill>
                   <a:srgbClr val="4236F6"/>
                 </a:solidFill>
@@ -8098,7 +8084,7 @@
               </a:rPr>
               <a:t>삼월</a:t>
             </a:r>
-            <a:endParaRPr lang="en-US" sz="4500" dirty="0"/>
+            <a:endParaRPr lang="en-US" sz="3000" dirty="0"/>
           </a:p>
         </p:txBody>
       </p:sp>
@@ -8194,7 +8180,7 @@
               <a:buNone/>
             </a:pPr>
             <a:r>
-              <a:rPr lang="ko-KR" altLang="en-US" sz="4500" b="1" dirty="0">
+              <a:rPr lang="ko-KR" altLang="en-US" sz="3000" b="1" dirty="0">
                 <a:solidFill>
                   <a:srgbClr val="4236F6"/>
                 </a:solidFill>
@@ -8204,7 +8190,7 @@
               </a:rPr>
               <a:t>사월</a:t>
             </a:r>
-            <a:endParaRPr lang="en-US" sz="4500" dirty="0"/>
+            <a:endParaRPr lang="en-US" sz="3000" dirty="0"/>
           </a:p>
         </p:txBody>
       </p:sp>
@@ -8300,7 +8286,7 @@
               <a:buNone/>
             </a:pPr>
             <a:r>
-              <a:rPr lang="ko-KR" altLang="en-US" sz="4500" b="1" dirty="0">
+              <a:rPr lang="ko-KR" altLang="en-US" sz="3000" b="1" dirty="0">
                 <a:solidFill>
                   <a:srgbClr val="4236F6"/>
                 </a:solidFill>
@@ -8310,7 +8296,7 @@
               </a:rPr>
               <a:t>오월</a:t>
             </a:r>
-            <a:endParaRPr lang="en-US" sz="4500" dirty="0"/>
+            <a:endParaRPr lang="en-US" sz="3000" dirty="0"/>
           </a:p>
         </p:txBody>
       </p:sp>
@@ -8406,7 +8392,7 @@
               <a:buNone/>
             </a:pPr>
             <a:r>
-              <a:rPr lang="ko-KR" altLang="en-US" sz="4500" b="1" dirty="0">
+              <a:rPr lang="ko-KR" altLang="en-US" sz="3000" b="1" dirty="0">
                 <a:solidFill>
                   <a:srgbClr val="4236F6"/>
                 </a:solidFill>
@@ -8416,7 +8402,7 @@
               </a:rPr>
               <a:t>유월</a:t>
             </a:r>
-            <a:endParaRPr lang="en-US" sz="4500" dirty="0"/>
+            <a:endParaRPr lang="en-US" sz="3000" dirty="0"/>
           </a:p>
         </p:txBody>
       </p:sp>
@@ -8523,7 +8509,7 @@
               <a:buNone/>
             </a:pPr>
             <a:r>
-              <a:rPr lang="ko-KR" altLang="en-US" sz="4500" b="1" dirty="0">
+              <a:rPr lang="ko-KR" altLang="en-US" sz="3000" b="1" dirty="0">
                 <a:solidFill>
                   <a:srgbClr val="4236F6"/>
                 </a:solidFill>
@@ -8533,7 +8519,7 @@
               </a:rPr>
               <a:t>칠월</a:t>
             </a:r>
-            <a:endParaRPr lang="en-US" sz="4500" dirty="0"/>
+            <a:endParaRPr lang="en-US" sz="3000" dirty="0"/>
           </a:p>
         </p:txBody>
       </p:sp>
@@ -8629,7 +8615,7 @@
               <a:buNone/>
             </a:pPr>
             <a:r>
-              <a:rPr lang="ko-KR" altLang="en-US" sz="4500" b="1" dirty="0">
+              <a:rPr lang="ko-KR" altLang="en-US" sz="3000" b="1" dirty="0">
                 <a:solidFill>
                   <a:srgbClr val="4236F6"/>
                 </a:solidFill>
@@ -8639,7 +8625,7 @@
               </a:rPr>
               <a:t>팔월</a:t>
             </a:r>
-            <a:endParaRPr lang="en-US" sz="4500" dirty="0"/>
+            <a:endParaRPr lang="en-US" sz="3000" dirty="0"/>
           </a:p>
         </p:txBody>
       </p:sp>
@@ -8735,7 +8721,7 @@
               <a:buNone/>
             </a:pPr>
             <a:r>
-              <a:rPr lang="ko-KR" altLang="en-US" sz="4500" b="1" dirty="0">
+              <a:rPr lang="ko-KR" altLang="en-US" sz="3000" b="1" dirty="0">
                 <a:solidFill>
                   <a:srgbClr val="4236F6"/>
                 </a:solidFill>
@@ -8745,7 +8731,7 @@
               </a:rPr>
               <a:t>구월</a:t>
             </a:r>
-            <a:endParaRPr lang="en-US" sz="4500" dirty="0"/>
+            <a:endParaRPr lang="en-US" sz="3000" dirty="0"/>
           </a:p>
         </p:txBody>
       </p:sp>
@@ -8841,7 +8827,7 @@
               <a:buNone/>
             </a:pPr>
             <a:r>
-              <a:rPr lang="ko-KR" altLang="en-US" sz="4500" b="1" dirty="0">
+              <a:rPr lang="ko-KR" altLang="en-US" sz="3000" b="1" dirty="0">
                 <a:solidFill>
                   <a:srgbClr val="4236F6"/>
                 </a:solidFill>
@@ -8851,7 +8837,7 @@
               </a:rPr>
               <a:t>시월</a:t>
             </a:r>
-            <a:endParaRPr lang="en-US" sz="4500" dirty="0"/>
+            <a:endParaRPr lang="en-US" sz="3000" dirty="0"/>
           </a:p>
         </p:txBody>
       </p:sp>
@@ -9836,7 +9822,7 @@
         <p:spPr>
           <a:xfrm>
             <a:off x="548640" y="1325880"/>
-            <a:ext cx="11064240" cy="457200"/>
+            <a:ext cx="11091672" cy="457200"/>
           </a:xfrm>
           <a:prstGeom prst="rect">
             <a:avLst/>
@@ -9874,7 +9860,7 @@
           <p:nvPr>
             <p:extLst>
               <p:ext uri="{D42A27DB-BD31-4B8C-83A1-F6EECF244321}">
-                <p14:modId xmlns:p14="http://schemas.microsoft.com/office/powerpoint/2010/main" val="3559752395"/>
+                <p14:modId xmlns:p14="http://schemas.microsoft.com/office/powerpoint/2010/main" val="2681782397"/>
               </p:ext>
             </p:extLst>
           </p:nvPr>
@@ -11952,7 +11938,7 @@
                 <a:ea typeface="Malgun Gothic" pitchFamily="34" charset="-122"/>
                 <a:cs typeface="Malgun Gothic" pitchFamily="34" charset="-120"/>
               </a:rPr>
-              <a:t>세 시 반 </a:t>
+              <a:t>세 시 반 </a:t>
             </a:r>
             <a:r>
               <a:rPr lang="en-US" sz="2200" dirty="0">
@@ -11971,7 +11957,7 @@
                 <a:ea typeface="Malgun Gothic" pitchFamily="34" charset="-122"/>
                 <a:cs typeface="Malgun Gothic" pitchFamily="34" charset="-120"/>
               </a:rPr>
-              <a:t>세 시 삼십 분</a:t>
+              <a:t>세 시 삼십 분</a:t>
             </a:r>
             <a:endParaRPr lang="en-US" sz="2200" dirty="0"/>
           </a:p>
@@ -12118,7 +12104,7 @@
                 <a:ea typeface="Malgun Gothic" pitchFamily="34" charset="-122"/>
                 <a:cs typeface="Malgun Gothic" pitchFamily="34" charset="-120"/>
               </a:rPr>
-              <a:t>아침 일곱 시 </a:t>
+              <a:t>아침 일곱 시 </a:t>
             </a:r>
             <a:r>
               <a:rPr lang="en-US" sz="2200" dirty="0">
@@ -12137,7 +12123,7 @@
                 <a:ea typeface="Malgun Gothic" pitchFamily="34" charset="-122"/>
                 <a:cs typeface="Malgun Gothic" pitchFamily="34" charset="-120"/>
               </a:rPr>
-              <a:t>오후 세 시 십오 분 </a:t>
+              <a:t>오후 세 시 십오 분 </a:t>
             </a:r>
             <a:r>
               <a:rPr lang="en-US" sz="2200" dirty="0">
@@ -12156,7 +12142,7 @@
                 <a:ea typeface="Malgun Gothic" pitchFamily="34" charset="-122"/>
                 <a:cs typeface="Malgun Gothic" pitchFamily="34" charset="-120"/>
               </a:rPr>
-              <a:t>밤 아홉 시 반</a:t>
+              <a:t>밤 아홉 시 반</a:t>
             </a:r>
             <a:endParaRPr lang="en-US" sz="2200" dirty="0"/>
           </a:p>
@@ -12177,7 +12163,7 @@
                 <a:ea typeface="Malgun Gothic" pitchFamily="34" charset="-122"/>
                 <a:cs typeface="Malgun Gothic" pitchFamily="34" charset="-120"/>
               </a:rPr>
-              <a:t>Nadie dice 'las veintiuna': 21:00 = 밤 아홉 시</a:t>
+              <a:t>Nadie dice 'las veintiuna': 21:00 = 밤 아홉 시</a:t>
             </a:r>
             <a:endParaRPr lang="en-US" sz="2200" dirty="0"/>
           </a:p>
@@ -12455,7 +12441,7 @@
         <p:spPr>
           <a:xfrm>
             <a:off x="548640" y="1325880"/>
-            <a:ext cx="11064240" cy="548640"/>
+            <a:ext cx="11091672" cy="548640"/>
           </a:xfrm>
           <a:prstGeom prst="rect">
             <a:avLst/>
@@ -12560,7 +12546,7 @@
         </p:nvSpPr>
         <p:spPr>
           <a:xfrm>
-            <a:off x="548640" y="2171700"/>
+            <a:off x="548640" y="2574950"/>
             <a:ext cx="457200" cy="457200"/>
           </a:xfrm>
           <a:prstGeom prst="ellipse">
@@ -12585,7 +12571,7 @@
         </p:nvSpPr>
         <p:spPr>
           <a:xfrm>
-            <a:off x="548640" y="2171700"/>
+            <a:off x="548640" y="2574950"/>
             <a:ext cx="457200" cy="457200"/>
           </a:xfrm>
           <a:prstGeom prst="rect">
@@ -12623,7 +12609,7 @@
         </p:nvSpPr>
         <p:spPr>
           <a:xfrm>
-            <a:off x="1188720" y="1965960"/>
+            <a:off x="1188720" y="2369210"/>
             <a:ext cx="6080760" cy="868680"/>
           </a:xfrm>
           <a:prstGeom prst="rect">
@@ -12661,7 +12647,7 @@
         </p:nvSpPr>
         <p:spPr>
           <a:xfrm>
-            <a:off x="7498080" y="2002536"/>
+            <a:off x="7498080" y="2405786"/>
             <a:ext cx="4142232" cy="795528"/>
           </a:xfrm>
           <a:prstGeom prst="roundRect">
@@ -12688,7 +12674,7 @@
         </p:nvSpPr>
         <p:spPr>
           <a:xfrm>
-            <a:off x="7589520" y="2002536"/>
+            <a:off x="7589520" y="2405786"/>
             <a:ext cx="3959352" cy="795528"/>
           </a:xfrm>
           <a:prstGeom prst="rect">
@@ -12726,7 +12712,7 @@
         </p:nvSpPr>
         <p:spPr>
           <a:xfrm>
-            <a:off x="548640" y="3168396"/>
+            <a:off x="548640" y="3571646"/>
             <a:ext cx="457200" cy="457200"/>
           </a:xfrm>
           <a:prstGeom prst="ellipse">
@@ -12751,7 +12737,7 @@
         </p:nvSpPr>
         <p:spPr>
           <a:xfrm>
-            <a:off x="548640" y="3168396"/>
+            <a:off x="548640" y="3571646"/>
             <a:ext cx="457200" cy="457200"/>
           </a:xfrm>
           <a:prstGeom prst="rect">
@@ -12789,7 +12775,7 @@
         </p:nvSpPr>
         <p:spPr>
           <a:xfrm>
-            <a:off x="1188720" y="2962656"/>
+            <a:off x="1188720" y="3365906"/>
             <a:ext cx="6080760" cy="868680"/>
           </a:xfrm>
           <a:prstGeom prst="rect">
@@ -12827,7 +12813,7 @@
         </p:nvSpPr>
         <p:spPr>
           <a:xfrm>
-            <a:off x="7498080" y="2999232"/>
+            <a:off x="7498080" y="3402482"/>
             <a:ext cx="4142232" cy="795528"/>
           </a:xfrm>
           <a:prstGeom prst="roundRect">
@@ -12854,7 +12840,7 @@
         </p:nvSpPr>
         <p:spPr>
           <a:xfrm>
-            <a:off x="7589520" y="2999232"/>
+            <a:off x="7589520" y="3402482"/>
             <a:ext cx="3959352" cy="795528"/>
           </a:xfrm>
           <a:prstGeom prst="rect">
@@ -12903,7 +12889,7 @@
         </p:nvSpPr>
         <p:spPr>
           <a:xfrm>
-            <a:off x="548640" y="4165092"/>
+            <a:off x="548640" y="4568342"/>
             <a:ext cx="457200" cy="457200"/>
           </a:xfrm>
           <a:prstGeom prst="ellipse">
@@ -12928,7 +12914,7 @@
         </p:nvSpPr>
         <p:spPr>
           <a:xfrm>
-            <a:off x="548640" y="4165092"/>
+            <a:off x="548640" y="4568342"/>
             <a:ext cx="457200" cy="457200"/>
           </a:xfrm>
           <a:prstGeom prst="rect">
@@ -12966,7 +12952,7 @@
         </p:nvSpPr>
         <p:spPr>
           <a:xfrm>
-            <a:off x="1188720" y="3959352"/>
+            <a:off x="1188720" y="4362602"/>
             <a:ext cx="6080760" cy="868680"/>
           </a:xfrm>
           <a:prstGeom prst="rect">
@@ -13004,7 +12990,7 @@
         </p:nvSpPr>
         <p:spPr>
           <a:xfrm>
-            <a:off x="7498080" y="3995928"/>
+            <a:off x="7498080" y="4399178"/>
             <a:ext cx="4142232" cy="795528"/>
           </a:xfrm>
           <a:prstGeom prst="roundRect">
@@ -13031,7 +13017,7 @@
         </p:nvSpPr>
         <p:spPr>
           <a:xfrm>
-            <a:off x="7589520" y="3995928"/>
+            <a:off x="7589520" y="4399178"/>
             <a:ext cx="3959352" cy="795528"/>
           </a:xfrm>
           <a:prstGeom prst="rect">
@@ -13472,7 +13458,7 @@
         <p:spPr>
           <a:xfrm>
             <a:off x="548640" y="1325880"/>
-            <a:ext cx="6949440" cy="548640"/>
+            <a:ext cx="5669280" cy="548640"/>
           </a:xfrm>
           <a:prstGeom prst="rect">
             <a:avLst/>
@@ -13510,7 +13496,7 @@
         <p:spPr>
           <a:xfrm>
             <a:off x="548640" y="1965960"/>
-            <a:ext cx="6949440" cy="4206240"/>
+            <a:ext cx="5669280" cy="4206240"/>
           </a:xfrm>
           <a:prstGeom prst="rect">
             <a:avLst/>
@@ -13532,7 +13518,7 @@
               <a:buChar char="•"/>
             </a:pPr>
             <a:r>
-              <a:rPr lang="ko-KR" altLang="en-US" sz="2400" dirty="0">
+              <a:rPr lang="ko-KR" altLang="en-US" sz="2800" dirty="0">
                 <a:solidFill>
                   <a:srgbClr val="14142B"/>
                 </a:solidFill>
@@ -13543,7 +13529,7 @@
               <a:t>___ 씨</a:t>
             </a:r>
             <a:r>
-              <a:rPr lang="en-US" sz="2400" dirty="0">
+              <a:rPr lang="en-US" sz="2800" dirty="0">
                 <a:solidFill>
                   <a:srgbClr val="14142B"/>
                 </a:solidFill>
@@ -13551,7 +13537,7 @@
               <a:t>, </a:t>
             </a:r>
             <a:r>
-              <a:rPr lang="ko-KR" altLang="en-US" sz="2400" dirty="0">
+              <a:rPr lang="ko-KR" altLang="en-US" sz="2800" dirty="0">
                 <a:solidFill>
                   <a:srgbClr val="14142B"/>
                 </a:solidFill>
@@ -13562,14 +13548,14 @@
               <a:t>생일이 언제예요</a:t>
             </a:r>
             <a:r>
-              <a:rPr lang="en-US" sz="2400" dirty="0">
+              <a:rPr lang="en-US" sz="2800" dirty="0">
                 <a:solidFill>
                   <a:srgbClr val="14142B"/>
                 </a:solidFill>
               </a:rPr>
               <a:t>?</a:t>
             </a:r>
-            <a:endParaRPr lang="en-US" sz="2400" dirty="0"/>
+            <a:endParaRPr lang="en-US" sz="2800" dirty="0"/>
           </a:p>
           <a:p>
             <a:pPr marL="228600" indent="-228600" eaLnBrk="1">
@@ -13580,7 +13566,7 @@
               <a:buChar char="•"/>
             </a:pPr>
             <a:r>
-              <a:rPr lang="ko-KR" altLang="en-US" sz="2400" dirty="0">
+              <a:rPr lang="ko-KR" altLang="en-US" sz="2800" dirty="0">
                 <a:solidFill>
                   <a:srgbClr val="14142B"/>
                 </a:solidFill>
@@ -13591,7 +13577,7 @@
               <a:t>— 유월 십오 일이에요</a:t>
             </a:r>
             <a:r>
-              <a:rPr lang="en-US" sz="2400" dirty="0">
+              <a:rPr lang="en-US" sz="2800" dirty="0">
                 <a:solidFill>
                   <a:srgbClr val="14142B"/>
                 </a:solidFill>
@@ -13599,7 +13585,7 @@
               <a:t>. ___ </a:t>
             </a:r>
             <a:r>
-              <a:rPr lang="ko-KR" altLang="en-US" sz="2400" dirty="0">
+              <a:rPr lang="ko-KR" altLang="en-US" sz="2800" dirty="0">
                 <a:solidFill>
                   <a:srgbClr val="14142B"/>
                 </a:solidFill>
@@ -13610,7 +13596,7 @@
               <a:t>씨</a:t>
             </a:r>
             <a:r>
-              <a:rPr lang="en-US" sz="2400" dirty="0">
+              <a:rPr lang="en-US" sz="2800" dirty="0">
                 <a:solidFill>
                   <a:srgbClr val="14142B"/>
                 </a:solidFill>
@@ -13618,7 +13604,7 @@
               <a:t>, </a:t>
             </a:r>
             <a:r>
-              <a:rPr lang="ko-KR" altLang="en-US" sz="2400" dirty="0">
+              <a:rPr lang="ko-KR" altLang="en-US" sz="2800" dirty="0">
                 <a:solidFill>
                   <a:srgbClr val="14142B"/>
                 </a:solidFill>
@@ -13629,14 +13615,14 @@
               <a:t>생일이 언제예요</a:t>
             </a:r>
             <a:r>
-              <a:rPr lang="en-US" sz="2400" dirty="0">
+              <a:rPr lang="en-US" sz="2800" dirty="0">
                 <a:solidFill>
                   <a:srgbClr val="14142B"/>
                 </a:solidFill>
               </a:rPr>
               <a:t>?</a:t>
             </a:r>
-            <a:endParaRPr lang="en-US" sz="2400" dirty="0"/>
+            <a:endParaRPr lang="en-US" sz="2800" dirty="0"/>
           </a:p>
           <a:p>
             <a:pPr marL="228600" indent="-228600" eaLnBrk="1">
@@ -13647,14 +13633,14 @@
               <a:buChar char="•"/>
             </a:pPr>
             <a:r>
-              <a:rPr lang="en-US" sz="2400" dirty="0">
+              <a:rPr lang="en-US" sz="2800" dirty="0">
                 <a:solidFill>
                   <a:srgbClr val="14142B"/>
                 </a:solidFill>
               </a:rPr>
               <a:t>Respondes y le preguntas a quien sigue en la lista de Zoom</a:t>
             </a:r>
-            <a:endParaRPr lang="en-US" sz="2400" dirty="0"/>
+            <a:endParaRPr lang="en-US" sz="2800" dirty="0"/>
           </a:p>
           <a:p>
             <a:pPr marL="228600" indent="-228600" eaLnBrk="1">
@@ -13665,14 +13651,14 @@
               <a:buChar char="•"/>
             </a:pPr>
             <a:r>
-              <a:rPr lang="en-US" sz="2400" dirty="0">
+              <a:rPr lang="en-US" sz="2800" dirty="0">
                 <a:solidFill>
                   <a:srgbClr val="14142B"/>
                 </a:solidFill>
               </a:rPr>
               <a:t>Jay escribe tu nombre en el mes de tu cumpleaños</a:t>
             </a:r>
-            <a:endParaRPr lang="en-US" sz="2400" dirty="0"/>
+            <a:endParaRPr lang="en-US" sz="2800" dirty="0"/>
           </a:p>
         </p:txBody>
       </p:sp>
@@ -13684,12 +13670,12 @@
         </p:nvSpPr>
         <p:spPr>
           <a:xfrm>
-            <a:off x="8001000" y="1417320"/>
-            <a:ext cx="3611880" cy="4480560"/>
+            <a:off x="6446520" y="1371600"/>
+            <a:ext cx="5193792" cy="4800600"/>
           </a:xfrm>
           <a:prstGeom prst="roundRect">
             <a:avLst>
-              <a:gd name="adj" fmla="val 6329"/>
+              <a:gd name="adj" fmla="val 4762"/>
             </a:avLst>
           </a:prstGeom>
           <a:solidFill>
@@ -13703,99 +13689,24 @@
           </a:ln>
         </p:spPr>
       </p:sp>
-      <p:sp>
-        <p:nvSpPr>
-          <p:cNvPr id="6" name="ko_grande"/>
-          <p:cNvSpPr txBox="1"/>
-          <p:nvPr/>
-        </p:nvSpPr>
-        <p:spPr>
-          <a:xfrm>
-            <a:off x="8092440" y="1874520"/>
-            <a:ext cx="3429000" cy="2926080"/>
-          </a:xfrm>
-          <a:prstGeom prst="rect">
-            <a:avLst/>
-          </a:prstGeom>
-          <a:noFill/>
-          <a:ln/>
-        </p:spPr>
-        <p:txBody>
-          <a:bodyPr wrap="square" lIns="0" tIns="0" rIns="0" bIns="0" rtlCol="0" anchor="ctr">
-            <a:normAutofit/>
-          </a:bodyPr>
-          <a:lstStyle/>
-          <a:p>
-            <a:pPr marL="0" indent="0" algn="ctr" eaLnBrk="1">
-              <a:buNone/>
-            </a:pPr>
-            <a:r>
-              <a:rPr lang="ko-KR" altLang="en-US" sz="5000" b="1" dirty="0">
-                <a:solidFill>
-                  <a:srgbClr val="4236F6"/>
-                </a:solidFill>
-                <a:latin typeface="Malgun Gothic" pitchFamily="34" charset="0"/>
-                <a:ea typeface="Malgun Gothic" pitchFamily="34" charset="-122"/>
-                <a:cs typeface="Malgun Gothic" pitchFamily="34" charset="-120"/>
-              </a:rPr>
-              <a:t>생일이</a:t>
-            </a:r>
-            <a:endParaRPr lang="en-US" sz="5000" dirty="0"/>
-          </a:p>
-          <a:p>
-            <a:pPr marL="0" indent="0" algn="ctr" eaLnBrk="1">
-              <a:buNone/>
-            </a:pPr>
-            <a:r>
-              <a:rPr lang="ko-KR" altLang="en-US" sz="5000" b="1" dirty="0">
-                <a:solidFill>
-                  <a:srgbClr val="4236F6"/>
-                </a:solidFill>
-                <a:latin typeface="Malgun Gothic" pitchFamily="34" charset="0"/>
-                <a:ea typeface="Malgun Gothic" pitchFamily="34" charset="-122"/>
-                <a:cs typeface="Malgun Gothic" pitchFamily="34" charset="-120"/>
-              </a:rPr>
-              <a:t>언제예요</a:t>
-            </a:r>
-            <a:r>
-              <a:rPr lang="en-US" sz="5000" b="1" dirty="0">
-                <a:solidFill>
-                  <a:srgbClr val="4236F6"/>
-                </a:solidFill>
-              </a:rPr>
-              <a:t>?</a:t>
-            </a:r>
-            <a:endParaRPr lang="en-US" sz="5000" dirty="0"/>
-          </a:p>
-        </p:txBody>
-      </p:sp>
       <p:pic>
         <p:nvPicPr>
-          <p:cNvPr id="7" name="Media 0">
-            <a:hlinkClick r:id="" action="ppaction://media"/>
-          </p:cNvPr>
+          <p:cNvPr id="6" name="imagen" descr="C:\Users\Chingu\AppData\Local\Temp\claude\C--Users-Chingu-Desktop-ACADEMIASEULWEB\d4111e1b-5523-44ea-97b2-b1a1d9545b9e\scratchpad\decks\cache\img_f45e667b28625e68.png"/>
           <p:cNvPicPr>
             <a:picLocks noChangeAspect="1"/>
           </p:cNvPicPr>
-          <p:nvPr>
-            <a:audioFile r:link="rId2"/>
-            <p:extLst>
-              <p:ext uri="{DAA4B4D4-6D71-4841-9C94-3DE7FCFB9230}">
-                <p14:media xmlns:p14="http://schemas.microsoft.com/office/powerpoint/2010/main" r:embed="rId1"/>
-              </p:ext>
-            </p:extLst>
-          </p:nvPr>
+          <p:nvPr/>
         </p:nvPicPr>
         <p:blipFill>
-          <a:blip r:embed="rId5"/>
+          <a:blip r:embed="rId3"/>
           <a:stretch>
             <a:fillRect/>
           </a:stretch>
         </p:blipFill>
         <p:spPr>
           <a:xfrm>
-            <a:off x="9601200" y="4983480"/>
-            <a:ext cx="384048" cy="384048"/>
+            <a:off x="7040833" y="1463040"/>
+            <a:ext cx="4005165" cy="4617720"/>
           </a:xfrm>
           <a:prstGeom prst="rect">
             <a:avLst/>
@@ -13935,7 +13846,7 @@
         <p:spPr>
           <a:xfrm>
             <a:off x="548640" y="1325880"/>
-            <a:ext cx="11064240" cy="457200"/>
+            <a:ext cx="11091672" cy="457200"/>
           </a:xfrm>
           <a:prstGeom prst="rect">
             <a:avLst/>
@@ -13999,7 +13910,7 @@
                 <a:ea typeface="Malgun Gothic" pitchFamily="34" charset="-122"/>
                 <a:cs typeface="Malgun Gothic" pitchFamily="34" charset="-120"/>
               </a:rPr>
-              <a:t>수요일에 밤에 아홉 시에</a:t>
+              <a:t>수요일에 밤에 아홉 시에</a:t>
             </a:r>
             <a:r>
               <a:rPr lang="en-US" sz="1800" i="1" dirty="0">
@@ -14022,7 +13933,7 @@
           <p:nvPr>
             <p:extLst>
               <p:ext uri="{D42A27DB-BD31-4B8C-83A1-F6EECF244321}">
-                <p14:modId xmlns:p14="http://schemas.microsoft.com/office/powerpoint/2010/main" val="2265074320"/>
+                <p14:modId xmlns:p14="http://schemas.microsoft.com/office/powerpoint/2010/main" val="3121648736"/>
               </p:ext>
             </p:extLst>
           </p:nvPr>
@@ -14327,7 +14238,7 @@
                           <a:ea typeface="Malgun Gothic" pitchFamily="34" charset="-122"/>
                           <a:cs typeface="Malgun Gothic" pitchFamily="34" charset="-120"/>
                         </a:rPr>
-                        <a:t>일곱 시에</a:t>
+                        <a:t>일곱 시에</a:t>
                       </a:r>
                       <a:endParaRPr lang="en-US" sz="1200" dirty="0"/>
                     </a:p>
@@ -14391,7 +14302,7 @@
                           <a:ea typeface="Malgun Gothic" pitchFamily="34" charset="-122"/>
                           <a:cs typeface="Malgun Gothic" pitchFamily="34" charset="-120"/>
                         </a:rPr>
-                        <a:t>일곱 시에 일어나요</a:t>
+                        <a:t>일곱 시에 일어나요</a:t>
                       </a:r>
                       <a:r>
                         <a:rPr lang="en-US" sz="1800" dirty="0">
@@ -14939,7 +14850,7 @@
                           <a:ea typeface="Malgun Gothic" pitchFamily="34" charset="-122"/>
                           <a:cs typeface="Malgun Gothic" pitchFamily="34" charset="-120"/>
                         </a:rPr>
-                        <a:t>수요일 밤 아홉 시에</a:t>
+                        <a:t>수요일 밤 아홉 시에</a:t>
                       </a:r>
                       <a:endParaRPr lang="en-US" sz="1200" dirty="0"/>
                     </a:p>
@@ -15003,7 +14914,7 @@
                           <a:ea typeface="Malgun Gothic" pitchFamily="34" charset="-122"/>
                           <a:cs typeface="Malgun Gothic" pitchFamily="34" charset="-120"/>
                         </a:rPr>
-                        <a:t>수요일 밤 아홉 시에 한국어를 공부해요</a:t>
+                        <a:t>수요일 밤 아홉 시에 한국어를 공부해요</a:t>
                       </a:r>
                       <a:r>
                         <a:rPr lang="en-US" sz="1800" dirty="0">
@@ -15529,7 +15440,7 @@
                 <a:ea typeface="Malgun Gothic" pitchFamily="34" charset="-122"/>
                 <a:cs typeface="Malgun Gothic" pitchFamily="34" charset="-120"/>
               </a:rPr>
-              <a:t>매일 일곱 시에 일어나요</a:t>
+              <a:t>매일 일곱 시에 일어나요</a:t>
             </a:r>
             <a:r>
               <a:rPr lang="en-US" sz="2400" dirty="0">
@@ -15586,7 +15497,7 @@
                 <a:ea typeface="Malgun Gothic" pitchFamily="34" charset="-122"/>
                 <a:cs typeface="Malgun Gothic" pitchFamily="34" charset="-120"/>
               </a:rPr>
-              <a:t>일곱 시 </a:t>
+              <a:t>일곱 시 </a:t>
             </a:r>
             <a:r>
               <a:rPr lang="en-US" sz="2400" dirty="0">
@@ -16046,7 +15957,7 @@
         <p:spPr>
           <a:xfrm>
             <a:off x="548640" y="1325880"/>
-            <a:ext cx="11064240" cy="548640"/>
+            <a:ext cx="11091672" cy="548640"/>
           </a:xfrm>
           <a:prstGeom prst="rect">
             <a:avLst/>
@@ -16086,7 +15997,7 @@
         </p:nvSpPr>
         <p:spPr>
           <a:xfrm>
-            <a:off x="548640" y="2171700"/>
+            <a:off x="548640" y="2574950"/>
             <a:ext cx="457200" cy="457200"/>
           </a:xfrm>
           <a:prstGeom prst="ellipse">
@@ -16111,7 +16022,7 @@
         </p:nvSpPr>
         <p:spPr>
           <a:xfrm>
-            <a:off x="548640" y="2171700"/>
+            <a:off x="548640" y="2574950"/>
             <a:ext cx="457200" cy="457200"/>
           </a:xfrm>
           <a:prstGeom prst="rect">
@@ -16149,7 +16060,7 @@
         </p:nvSpPr>
         <p:spPr>
           <a:xfrm>
-            <a:off x="1188720" y="1965960"/>
+            <a:off x="1188720" y="2369210"/>
             <a:ext cx="6080760" cy="868680"/>
           </a:xfrm>
           <a:prstGeom prst="rect">
@@ -16198,7 +16109,7 @@
         </p:nvSpPr>
         <p:spPr>
           <a:xfrm>
-            <a:off x="7498080" y="2002536"/>
+            <a:off x="7498080" y="2405786"/>
             <a:ext cx="4142232" cy="795528"/>
           </a:xfrm>
           <a:prstGeom prst="roundRect">
@@ -16225,7 +16136,7 @@
         </p:nvSpPr>
         <p:spPr>
           <a:xfrm>
-            <a:off x="7589520" y="2002536"/>
+            <a:off x="7589520" y="2405786"/>
             <a:ext cx="3959352" cy="795528"/>
           </a:xfrm>
           <a:prstGeom prst="rect">
@@ -16274,7 +16185,7 @@
         </p:nvSpPr>
         <p:spPr>
           <a:xfrm>
-            <a:off x="548640" y="3168396"/>
+            <a:off x="548640" y="3571646"/>
             <a:ext cx="457200" cy="457200"/>
           </a:xfrm>
           <a:prstGeom prst="ellipse">
@@ -16299,7 +16210,7 @@
         </p:nvSpPr>
         <p:spPr>
           <a:xfrm>
-            <a:off x="548640" y="3168396"/>
+            <a:off x="548640" y="3571646"/>
             <a:ext cx="457200" cy="457200"/>
           </a:xfrm>
           <a:prstGeom prst="rect">
@@ -16337,7 +16248,7 @@
         </p:nvSpPr>
         <p:spPr>
           <a:xfrm>
-            <a:off x="1188720" y="2962656"/>
+            <a:off x="1188720" y="3365906"/>
             <a:ext cx="6080760" cy="868680"/>
           </a:xfrm>
           <a:prstGeom prst="rect">
@@ -16386,7 +16297,7 @@
         </p:nvSpPr>
         <p:spPr>
           <a:xfrm>
-            <a:off x="7498080" y="2999232"/>
+            <a:off x="7498080" y="3402482"/>
             <a:ext cx="4142232" cy="795528"/>
           </a:xfrm>
           <a:prstGeom prst="roundRect">
@@ -16413,7 +16324,7 @@
         </p:nvSpPr>
         <p:spPr>
           <a:xfrm>
-            <a:off x="7589520" y="2999232"/>
+            <a:off x="7589520" y="3402482"/>
             <a:ext cx="3959352" cy="795528"/>
           </a:xfrm>
           <a:prstGeom prst="rect">
@@ -16440,7 +16351,7 @@
                 <a:ea typeface="Malgun Gothic" pitchFamily="34" charset="-122"/>
                 <a:cs typeface="Malgun Gothic" pitchFamily="34" charset="-120"/>
               </a:rPr>
-              <a:t>Ej.: 일곱 시에 일어나요</a:t>
+              <a:t>Ej.: 일곱 시에 일어나요</a:t>
             </a:r>
             <a:r>
               <a:rPr lang="en-US" sz="2200" b="1" dirty="0">
@@ -16462,7 +16373,7 @@
         </p:nvSpPr>
         <p:spPr>
           <a:xfrm>
-            <a:off x="548640" y="4165092"/>
+            <a:off x="548640" y="4568342"/>
             <a:ext cx="457200" cy="457200"/>
           </a:xfrm>
           <a:prstGeom prst="ellipse">
@@ -16487,7 +16398,7 @@
         </p:nvSpPr>
         <p:spPr>
           <a:xfrm>
-            <a:off x="548640" y="4165092"/>
+            <a:off x="548640" y="4568342"/>
             <a:ext cx="457200" cy="457200"/>
           </a:xfrm>
           <a:prstGeom prst="rect">
@@ -16525,7 +16436,7 @@
         </p:nvSpPr>
         <p:spPr>
           <a:xfrm>
-            <a:off x="1188720" y="3959352"/>
+            <a:off x="1188720" y="4362602"/>
             <a:ext cx="6080760" cy="868680"/>
           </a:xfrm>
           <a:prstGeom prst="rect">
@@ -16574,7 +16485,7 @@
         </p:nvSpPr>
         <p:spPr>
           <a:xfrm>
-            <a:off x="7498080" y="3995928"/>
+            <a:off x="7498080" y="4399178"/>
             <a:ext cx="4142232" cy="795528"/>
           </a:xfrm>
           <a:prstGeom prst="roundRect">
@@ -16601,7 +16512,7 @@
         </p:nvSpPr>
         <p:spPr>
           <a:xfrm>
-            <a:off x="7589520" y="3995928"/>
+            <a:off x="7589520" y="4399178"/>
             <a:ext cx="3959352" cy="795528"/>
           </a:xfrm>
           <a:prstGeom prst="rect">
@@ -17034,7 +16945,7 @@
         <p:spPr>
           <a:xfrm>
             <a:off x="548640" y="1325880"/>
-            <a:ext cx="11064240" cy="457200"/>
+            <a:ext cx="11091672" cy="457200"/>
           </a:xfrm>
           <a:prstGeom prst="rect">
             <a:avLst/>
@@ -17060,7 +16971,7 @@
                 <a:ea typeface="Malgun Gothic" pitchFamily="34" charset="-122"/>
                 <a:cs typeface="Malgun Gothic" pitchFamily="34" charset="-120"/>
               </a:rPr>
-              <a:t>Ejemplo: nacida el 15/6/1996 → hoy, 서른 살 </a:t>
+              <a:t>Ejemplo: nacida el 15/6/1996 → hoy, 서른 살 </a:t>
             </a:r>
             <a:r>
               <a:rPr lang="en-US" sz="1800" i="1" dirty="0">
@@ -17398,7 +17309,7 @@
                 <a:ea typeface="Malgun Gothic" pitchFamily="34" charset="-122"/>
                 <a:cs typeface="Malgun Gothic" pitchFamily="34" charset="-120"/>
               </a:rPr>
-              <a:t>15/6/1996 → hoy: 서른 살 </a:t>
+              <a:t>15/6/1996 → hoy: 서른 살 </a:t>
             </a:r>
             <a:r>
               <a:rPr lang="en-US" sz="2000" dirty="0">
@@ -17542,7 +17453,7 @@
         <p:spPr>
           <a:xfrm>
             <a:off x="548640" y="1325880"/>
-            <a:ext cx="11064240" cy="457200"/>
+            <a:ext cx="11091672" cy="457200"/>
           </a:xfrm>
           <a:prstGeom prst="rect">
             <a:avLst/>
@@ -18140,16 +18051,40 @@
           </a:p>
         </p:txBody>
       </p:sp>
-      <p:sp>
-        <p:nvSpPr>
-          <p:cNvPr id="3" name="panel"/>
+      <p:pic>
+        <p:nvPicPr>
+          <p:cNvPr id="3" name="imagen" descr="C:\Users\Chingu\AppData\Local\Temp\claude\C--Users-Chingu-Desktop-ACADEMIASEULWEB\d4111e1b-5523-44ea-97b2-b1a1d9545b9e\scratchpad\decks\cache\img_ab8acc11b3f5e7c9.png"/>
+          <p:cNvPicPr>
+            <a:picLocks noChangeAspect="1"/>
+          </p:cNvPicPr>
+          <p:nvPr/>
+        </p:nvPicPr>
+        <p:blipFill>
+          <a:blip r:embed="rId3"/>
+          <a:stretch>
+            <a:fillRect/>
+          </a:stretch>
+        </p:blipFill>
+        <p:spPr>
+          <a:xfrm>
+            <a:off x="7754112" y="1508760"/>
+            <a:ext cx="3886200" cy="4480560"/>
+          </a:xfrm>
+          <a:prstGeom prst="rect">
+            <a:avLst/>
+          </a:prstGeom>
+        </p:spPr>
+      </p:pic>
+      <p:sp>
+        <p:nvSpPr>
+          <p:cNvPr id="4" name="panel"/>
           <p:cNvSpPr/>
           <p:nvPr/>
         </p:nvSpPr>
         <p:spPr>
           <a:xfrm>
-            <a:off x="1280160" y="1645920"/>
-            <a:ext cx="9628632" cy="3108960"/>
+            <a:off x="548640" y="1645920"/>
+            <a:ext cx="6931152" cy="3108960"/>
           </a:xfrm>
           <a:prstGeom prst="roundRect">
             <a:avLst>
@@ -18169,14 +18104,14 @@
       </p:sp>
       <p:sp>
         <p:nvSpPr>
-          <p:cNvPr id="4" name="frase_ko"/>
+          <p:cNvPr id="5" name="frase_ko"/>
           <p:cNvSpPr txBox="1"/>
           <p:nvPr/>
         </p:nvSpPr>
         <p:spPr>
           <a:xfrm>
-            <a:off x="1463040" y="1828800"/>
-            <a:ext cx="9262872" cy="1828800"/>
+            <a:off x="731520" y="1828800"/>
+            <a:ext cx="6565392" cy="1828800"/>
           </a:xfrm>
           <a:prstGeom prst="rect">
             <a:avLst/>
@@ -18194,7 +18129,7 @@
               <a:buNone/>
             </a:pPr>
             <a:r>
-              <a:rPr lang="ko-KR" altLang="en-US" sz="5800" b="1" dirty="0">
+              <a:rPr lang="ko-KR" altLang="en-US" sz="5700" b="1" dirty="0">
                 <a:solidFill>
                   <a:srgbClr val="4236F6"/>
                 </a:solidFill>
@@ -18202,30 +18137,47 @@
                 <a:ea typeface="Malgun Gothic" pitchFamily="34" charset="-122"/>
                 <a:cs typeface="Malgun Gothic" pitchFamily="34" charset="-120"/>
               </a:rPr>
-              <a:t>생일에 미역국을 먹어요</a:t>
-            </a:r>
-            <a:r>
-              <a:rPr lang="en-US" sz="5800" b="1" dirty="0">
+              <a:t>생일에 미역국을</a:t>
+            </a:r>
+            <a:endParaRPr lang="en-US" sz="5700" dirty="0"/>
+          </a:p>
+          <a:p>
+            <a:pPr marL="0" indent="0" algn="ctr" eaLnBrk="1">
+              <a:buNone/>
+            </a:pPr>
+            <a:r>
+              <a:rPr lang="ko-KR" altLang="en-US" sz="5700" b="1" dirty="0">
                 <a:solidFill>
                   <a:srgbClr val="4236F6"/>
                 </a:solidFill>
+                <a:latin typeface="Malgun Gothic" pitchFamily="34" charset="0"/>
+                <a:ea typeface="Malgun Gothic" pitchFamily="34" charset="-122"/>
+                <a:cs typeface="Malgun Gothic" pitchFamily="34" charset="-120"/>
+              </a:rPr>
+              <a:t>먹어요</a:t>
+            </a:r>
+            <a:r>
+              <a:rPr lang="en-US" sz="5700" b="1" dirty="0">
+                <a:solidFill>
+                  <a:srgbClr val="4236F6"/>
+                </a:solidFill>
               </a:rPr>
               <a:t>.</a:t>
             </a:r>
-            <a:endParaRPr lang="en-US" sz="5800" dirty="0"/>
+            <a:endParaRPr lang="en-US" sz="5700" dirty="0"/>
           </a:p>
         </p:txBody>
       </p:sp>
       <p:sp>
         <p:nvSpPr>
-          <p:cNvPr id="5" name="Text 3"/>
+          <p:cNvPr id="6" name="Text 3"/>
           <p:cNvSpPr txBox="1"/>
           <p:nvPr/>
         </p:nvSpPr>
         <p:spPr>
           <a:xfrm>
-            <a:off x="1463040" y="3657600"/>
-            <a:ext cx="9262872" cy="822960"/>
+            <a:off x="1051560" y="3657600"/>
+            <a:ext cx="5742432" cy="822960"/>
           </a:xfrm>
           <a:prstGeom prst="rect">
             <a:avLst/>
@@ -18256,14 +18208,14 @@
       </p:sp>
       <p:sp>
         <p:nvSpPr>
-          <p:cNvPr id="6" name="lista"/>
+          <p:cNvPr id="7" name="lista"/>
           <p:cNvSpPr txBox="1"/>
           <p:nvPr/>
         </p:nvSpPr>
         <p:spPr>
           <a:xfrm>
-            <a:off x="1280160" y="4937760"/>
-            <a:ext cx="9628632" cy="1234440"/>
+            <a:off x="548640" y="4937760"/>
+            <a:ext cx="6931152" cy="1234440"/>
           </a:xfrm>
           <a:prstGeom prst="rect">
             <a:avLst/>
@@ -18456,7 +18408,7 @@
         <p:spPr>
           <a:xfrm>
             <a:off x="548640" y="1325880"/>
-            <a:ext cx="11064240" cy="548640"/>
+            <a:ext cx="11091672" cy="548640"/>
           </a:xfrm>
           <a:prstGeom prst="rect">
             <a:avLst/>
@@ -18659,7 +18611,7 @@
                 <a:ea typeface="Malgun Gothic" pitchFamily="34" charset="-122"/>
                 <a:cs typeface="Malgun Gothic" pitchFamily="34" charset="-120"/>
               </a:rPr>
-              <a:t>밤 아홉 시 반이에요</a:t>
+              <a:t>밤 아홉 시 반이에요</a:t>
             </a:r>
             <a:r>
               <a:rPr lang="en-US" sz="2200" b="1" dirty="0">
@@ -18836,7 +18788,7 @@
                 <a:ea typeface="Malgun Gothic" pitchFamily="34" charset="-122"/>
                 <a:cs typeface="Malgun Gothic" pitchFamily="34" charset="-120"/>
               </a:rPr>
-              <a:t>일곱 시 </a:t>
+              <a:t>일곱 시 </a:t>
             </a:r>
             <a:r>
               <a:rPr lang="en-US" sz="2200" b="1" dirty="0">
@@ -19395,7 +19347,7 @@
                 <a:ea typeface="Malgun Gothic" pitchFamily="34" charset="-122"/>
                 <a:cs typeface="Malgun Gothic" pitchFamily="34" charset="-120"/>
               </a:rPr>
-              <a:t>세 시 반 </a:t>
+              <a:t>세 시 반 </a:t>
             </a:r>
             <a:r>
               <a:rPr lang="en-US" sz="2200" b="1" dirty="0">
@@ -19414,7 +19366,7 @@
                 <a:ea typeface="Malgun Gothic" pitchFamily="34" charset="-122"/>
                 <a:cs typeface="Malgun Gothic" pitchFamily="34" charset="-120"/>
               </a:rPr>
-              <a:t>세 시 삼십 분</a:t>
+              <a:t>세 시 삼십 분</a:t>
             </a:r>
             <a:endParaRPr lang="en-US" sz="2200" dirty="0"/>
           </a:p>
@@ -19586,7 +19538,7 @@
                 <a:ea typeface="Malgun Gothic" pitchFamily="34" charset="-122"/>
                 <a:cs typeface="Malgun Gothic" pitchFamily="34" charset="-120"/>
               </a:rPr>
-              <a:t>스무 살</a:t>
+              <a:t>스무 살</a:t>
             </a:r>
             <a:endParaRPr lang="en-US" sz="2200" dirty="0"/>
           </a:p>
@@ -20192,7 +20144,7 @@
         <p:spPr>
           <a:xfrm>
             <a:off x="548640" y="1325880"/>
-            <a:ext cx="11064240" cy="548640"/>
+            <a:ext cx="11091672" cy="548640"/>
           </a:xfrm>
           <a:prstGeom prst="rect">
             <a:avLst/>
@@ -20916,7 +20868,7 @@
                 <a:ea typeface="Malgun Gothic" pitchFamily="34" charset="-122"/>
                 <a:cs typeface="Malgun Gothic" pitchFamily="34" charset="-120"/>
               </a:rPr>
-              <a:t>한 시 사십오 분</a:t>
+              <a:t>한 시 사십오 분</a:t>
             </a:r>
             <a:endParaRPr lang="en-US" sz="2200" dirty="0"/>
           </a:p>
@@ -21276,7 +21228,7 @@
                 <a:ea typeface="Malgun Gothic" pitchFamily="34" charset="-122"/>
                 <a:cs typeface="Malgun Gothic" pitchFamily="34" charset="-120"/>
               </a:rPr>
-              <a:t>네 시</a:t>
+              <a:t>네 시</a:t>
             </a:r>
             <a:endParaRPr lang="en-US" sz="2200" dirty="0"/>
           </a:p>
@@ -21882,7 +21834,7 @@
         <p:spPr>
           <a:xfrm>
             <a:off x="548640" y="1325880"/>
-            <a:ext cx="11064240" cy="548640"/>
+            <a:ext cx="11091672" cy="548640"/>
           </a:xfrm>
           <a:prstGeom prst="rect">
             <a:avLst/>
@@ -22273,7 +22225,7 @@
                 <a:ea typeface="Malgun Gothic" pitchFamily="34" charset="-122"/>
                 <a:cs typeface="Malgun Gothic" pitchFamily="34" charset="-120"/>
               </a:rPr>
-              <a:t>아홉 시 이십 분</a:t>
+              <a:t>아홉 시 이십 분</a:t>
             </a:r>
             <a:endParaRPr lang="en-US" sz="2200" dirty="0"/>
           </a:p>
@@ -22614,7 +22566,7 @@
                 <a:ea typeface="Malgun Gothic" pitchFamily="34" charset="-122"/>
                 <a:cs typeface="Malgun Gothic" pitchFamily="34" charset="-120"/>
               </a:rPr>
-              <a:t>두 시 오 분</a:t>
+              <a:t>두 시 오 분</a:t>
             </a:r>
             <a:endParaRPr lang="en-US" sz="2200" dirty="0"/>
           </a:p>
@@ -23338,7 +23290,7 @@
         <p:spPr>
           <a:xfrm>
             <a:off x="548640" y="1325880"/>
-            <a:ext cx="11064240" cy="548640"/>
+            <a:ext cx="11091672" cy="548640"/>
           </a:xfrm>
           <a:prstGeom prst="rect">
             <a:avLst/>
@@ -23563,7 +23515,7 @@
                 <a:ea typeface="Malgun Gothic" pitchFamily="34" charset="-122"/>
                 <a:cs typeface="Malgun Gothic" pitchFamily="34" charset="-120"/>
               </a:rPr>
-              <a:t>일곱 시에 일어나요</a:t>
+              <a:t>일곱 시에 일어나요</a:t>
             </a:r>
             <a:r>
               <a:rPr lang="en-US" sz="2200" b="1" dirty="0">
@@ -25172,7 +25124,7 @@
         <p:spPr>
           <a:xfrm>
             <a:off x="548640" y="1325880"/>
-            <a:ext cx="11064240" cy="457200"/>
+            <a:ext cx="11091672" cy="457200"/>
           </a:xfrm>
           <a:prstGeom prst="rect">
             <a:avLst/>
@@ -25210,7 +25162,7 @@
           <p:nvPr>
             <p:extLst>
               <p:ext uri="{D42A27DB-BD31-4B8C-83A1-F6EECF244321}">
-                <p14:modId xmlns:p14="http://schemas.microsoft.com/office/powerpoint/2010/main" val="2444085113"/>
+                <p14:modId xmlns:p14="http://schemas.microsoft.com/office/powerpoint/2010/main" val="2294293003"/>
               </p:ext>
             </p:extLst>
           </p:nvPr>
@@ -26507,7 +26459,7 @@
         <p:spPr>
           <a:xfrm>
             <a:off x="548640" y="1325880"/>
-            <a:ext cx="11064240" cy="457200"/>
+            <a:ext cx="11091672" cy="457200"/>
           </a:xfrm>
           <a:prstGeom prst="rect">
             <a:avLst/>
@@ -26545,7 +26497,7 @@
           <p:nvPr>
             <p:extLst>
               <p:ext uri="{D42A27DB-BD31-4B8C-83A1-F6EECF244321}">
-                <p14:modId xmlns:p14="http://schemas.microsoft.com/office/powerpoint/2010/main" val="1380598143"/>
+                <p14:modId xmlns:p14="http://schemas.microsoft.com/office/powerpoint/2010/main" val="974591889"/>
               </p:ext>
             </p:extLst>
           </p:nvPr>
@@ -26861,7 +26813,7 @@
                           <a:ea typeface="Malgun Gothic" pitchFamily="34" charset="-122"/>
                           <a:cs typeface="Malgun Gothic" pitchFamily="34" charset="-120"/>
                         </a:rPr>
-                        <a:t>세 시</a:t>
+                        <a:t>세 시</a:t>
                       </a:r>
                       <a:endParaRPr lang="en-US" sz="1200" dirty="0"/>
                     </a:p>
@@ -27811,7 +27763,7 @@
         <p:spPr>
           <a:xfrm>
             <a:off x="548640" y="1325880"/>
-            <a:ext cx="11064240" cy="548640"/>
+            <a:ext cx="11091672" cy="548640"/>
           </a:xfrm>
           <a:prstGeom prst="rect">
             <a:avLst/>
@@ -27911,8 +27863,8 @@
         </p:nvSpPr>
         <p:spPr>
           <a:xfrm>
-            <a:off x="1188720" y="1965960"/>
-            <a:ext cx="6080760" cy="738835"/>
+            <a:off x="2000707" y="1965960"/>
+            <a:ext cx="5268773" cy="738835"/>
           </a:xfrm>
           <a:prstGeom prst="rect">
             <a:avLst/>
@@ -28137,8 +28089,8 @@
         </p:nvSpPr>
         <p:spPr>
           <a:xfrm>
-            <a:off x="1188720" y="2832811"/>
-            <a:ext cx="6080760" cy="738835"/>
+            <a:off x="2000707" y="2832811"/>
+            <a:ext cx="5268773" cy="738835"/>
           </a:xfrm>
           <a:prstGeom prst="rect">
             <a:avLst/>
@@ -28156,7 +28108,7 @@
               <a:buNone/>
             </a:pPr>
             <a:r>
-              <a:rPr lang="ko-KR" altLang="en-US" sz="2400" dirty="0">
+              <a:rPr lang="ko-KR" altLang="en-US" sz="2300" dirty="0">
                 <a:solidFill>
                   <a:srgbClr val="14142B"/>
                 </a:solidFill>
@@ -28167,7 +28119,7 @@
               <a:t>고향</a:t>
             </a:r>
             <a:r>
-              <a:rPr lang="en-US" sz="2400" dirty="0">
+              <a:rPr lang="en-US" sz="2300" dirty="0">
                 <a:solidFill>
                   <a:srgbClr val="14142B"/>
                 </a:solidFill>
@@ -28175,7 +28127,7 @@
               <a:t>___ </a:t>
             </a:r>
             <a:r>
-              <a:rPr lang="ko-KR" altLang="en-US" sz="2400" dirty="0">
+              <a:rPr lang="ko-KR" altLang="en-US" sz="2300" dirty="0">
                 <a:solidFill>
                   <a:srgbClr val="14142B"/>
                 </a:solidFill>
@@ -28186,7 +28138,7 @@
               <a:t>어디예요</a:t>
             </a:r>
             <a:r>
-              <a:rPr lang="en-US" sz="2400" dirty="0">
+              <a:rPr lang="en-US" sz="2300" dirty="0">
                 <a:solidFill>
                   <a:srgbClr val="14142B"/>
                 </a:solidFill>
@@ -28194,7 +28146,7 @@
               <a:t>? — </a:t>
             </a:r>
             <a:r>
-              <a:rPr lang="ko-KR" altLang="en-US" sz="2400" dirty="0">
+              <a:rPr lang="ko-KR" altLang="en-US" sz="2300" dirty="0">
                 <a:solidFill>
                   <a:srgbClr val="14142B"/>
                 </a:solidFill>
@@ -28205,7 +28157,7 @@
               <a:t>제 고향</a:t>
             </a:r>
             <a:r>
-              <a:rPr lang="en-US" sz="2400" dirty="0">
+              <a:rPr lang="en-US" sz="2300" dirty="0">
                 <a:solidFill>
                   <a:srgbClr val="14142B"/>
                 </a:solidFill>
@@ -28213,7 +28165,7 @@
               <a:t>___ </a:t>
             </a:r>
             <a:r>
-              <a:rPr lang="ko-KR" altLang="en-US" sz="2400" dirty="0">
+              <a:rPr lang="ko-KR" altLang="en-US" sz="2300" dirty="0">
                 <a:solidFill>
                   <a:srgbClr val="14142B"/>
                 </a:solidFill>
@@ -28224,14 +28176,14 @@
               <a:t>멕시코예요</a:t>
             </a:r>
             <a:r>
-              <a:rPr lang="en-US" sz="2400" dirty="0">
+              <a:rPr lang="en-US" sz="2300" dirty="0">
                 <a:solidFill>
                   <a:srgbClr val="14142B"/>
                 </a:solidFill>
               </a:rPr>
               <a:t>.</a:t>
             </a:r>
-            <a:endParaRPr lang="en-US" sz="2400" dirty="0"/>
+            <a:endParaRPr lang="en-US" sz="2300" dirty="0"/>
           </a:p>
         </p:txBody>
       </p:sp>
@@ -28385,16 +28337,40 @@
           </a:p>
         </p:txBody>
       </p:sp>
-      <p:sp>
-        <p:nvSpPr>
-          <p:cNvPr id="16" name="Text 14"/>
+      <p:pic>
+        <p:nvPicPr>
+          <p:cNvPr id="16" name="item_img_2" descr="C:\Users\Chingu\AppData\Local\Temp\claude\C--Users-Chingu-Desktop-ACADEMIASEULWEB\d4111e1b-5523-44ea-97b2-b1a1d9545b9e\scratchpad\decks\cache\img_d7e7e3d0226a61ea.png"/>
+          <p:cNvPicPr>
+            <a:picLocks noChangeAspect="1"/>
+          </p:cNvPicPr>
+          <p:nvPr/>
+        </p:nvPicPr>
+        <p:blipFill>
+          <a:blip r:embed="rId3"/>
+          <a:stretch>
+            <a:fillRect/>
+          </a:stretch>
+        </p:blipFill>
+        <p:spPr>
+          <a:xfrm>
+            <a:off x="1115568" y="3717950"/>
+            <a:ext cx="702259" cy="702259"/>
+          </a:xfrm>
+          <a:prstGeom prst="rect">
+            <a:avLst/>
+          </a:prstGeom>
+        </p:spPr>
+      </p:pic>
+      <p:sp>
+        <p:nvSpPr>
+          <p:cNvPr id="17" name="Text 14"/>
           <p:cNvSpPr txBox="1"/>
           <p:nvPr/>
         </p:nvSpPr>
         <p:spPr>
           <a:xfrm>
-            <a:off x="1188720" y="3699662"/>
-            <a:ext cx="6080760" cy="738835"/>
+            <a:off x="2000707" y="3699662"/>
+            <a:ext cx="5268773" cy="738835"/>
           </a:xfrm>
           <a:prstGeom prst="rect">
             <a:avLst/>
@@ -28412,7 +28388,7 @@
               <a:buNone/>
             </a:pPr>
             <a:r>
-              <a:rPr lang="ko-KR" altLang="en-US" sz="2400" dirty="0">
+              <a:rPr lang="ko-KR" altLang="en-US" sz="2300" dirty="0">
                 <a:solidFill>
                   <a:srgbClr val="14142B"/>
                 </a:solidFill>
@@ -28423,20 +28399,20 @@
               <a:t>(dibujo) 집에 강아지가 </a:t>
             </a:r>
             <a:r>
-              <a:rPr lang="en-US" sz="2400" dirty="0">
+              <a:rPr lang="en-US" sz="2300" dirty="0">
                 <a:solidFill>
                   <a:srgbClr val="14142B"/>
                 </a:solidFill>
               </a:rPr>
               <a:t>______.</a:t>
             </a:r>
-            <a:endParaRPr lang="en-US" sz="2400" dirty="0"/>
+            <a:endParaRPr lang="en-US" sz="2300" dirty="0"/>
           </a:p>
         </p:txBody>
       </p:sp>
       <p:sp>
         <p:nvSpPr>
-          <p:cNvPr id="17" name="rev_2_caja"/>
+          <p:cNvPr id="18" name="rev_2_caja"/>
           <p:cNvSpPr/>
           <p:nvPr/>
         </p:nvSpPr>
@@ -28463,7 +28439,7 @@
       </p:sp>
       <p:sp>
         <p:nvSpPr>
-          <p:cNvPr id="18" name="rev_2_txt"/>
+          <p:cNvPr id="19" name="rev_2_txt"/>
           <p:cNvSpPr txBox="1"/>
           <p:nvPr/>
         </p:nvSpPr>
@@ -28504,7 +28480,7 @@
       </p:sp>
       <p:sp>
         <p:nvSpPr>
-          <p:cNvPr id="19" name="num_3"/>
+          <p:cNvPr id="20" name="num_3"/>
           <p:cNvSpPr/>
           <p:nvPr/>
         </p:nvSpPr>
@@ -28529,7 +28505,7 @@
       </p:sp>
       <p:sp>
         <p:nvSpPr>
-          <p:cNvPr id="20" name="Text 18"/>
+          <p:cNvPr id="21" name="Text 18"/>
           <p:cNvSpPr txBox="1"/>
           <p:nvPr/>
         </p:nvSpPr>
@@ -28567,14 +28543,14 @@
       </p:sp>
       <p:sp>
         <p:nvSpPr>
-          <p:cNvPr id="21" name="Text 19"/>
+          <p:cNvPr id="22" name="Text 19"/>
           <p:cNvSpPr txBox="1"/>
           <p:nvPr/>
         </p:nvSpPr>
         <p:spPr>
           <a:xfrm>
-            <a:off x="1188720" y="4566514"/>
-            <a:ext cx="6080760" cy="738835"/>
+            <a:off x="2000707" y="4566514"/>
+            <a:ext cx="5268773" cy="738835"/>
           </a:xfrm>
           <a:prstGeom prst="rect">
             <a:avLst/>
@@ -28635,7 +28611,7 @@
       </p:sp>
       <p:sp>
         <p:nvSpPr>
-          <p:cNvPr id="22" name="rev_3_caja"/>
+          <p:cNvPr id="23" name="rev_3_caja"/>
           <p:cNvSpPr/>
           <p:nvPr/>
         </p:nvSpPr>
@@ -28662,7 +28638,7 @@
       </p:sp>
       <p:sp>
         <p:nvSpPr>
-          <p:cNvPr id="23" name="rev_3_txt"/>
+          <p:cNvPr id="24" name="rev_3_txt"/>
           <p:cNvSpPr txBox="1"/>
           <p:nvPr/>
         </p:nvSpPr>
@@ -28703,7 +28679,7 @@
       </p:sp>
       <p:sp>
         <p:nvSpPr>
-          <p:cNvPr id="24" name="num_4"/>
+          <p:cNvPr id="25" name="num_4"/>
           <p:cNvSpPr/>
           <p:nvPr/>
         </p:nvSpPr>
@@ -28728,7 +28704,7 @@
       </p:sp>
       <p:sp>
         <p:nvSpPr>
-          <p:cNvPr id="25" name="Text 23"/>
+          <p:cNvPr id="26" name="Text 23"/>
           <p:cNvSpPr txBox="1"/>
           <p:nvPr/>
         </p:nvSpPr>
@@ -28766,14 +28742,14 @@
       </p:sp>
       <p:sp>
         <p:nvSpPr>
-          <p:cNvPr id="26" name="Text 24"/>
+          <p:cNvPr id="27" name="Text 24"/>
           <p:cNvSpPr txBox="1"/>
           <p:nvPr/>
         </p:nvSpPr>
         <p:spPr>
           <a:xfrm>
-            <a:off x="1188720" y="5433365"/>
-            <a:ext cx="6080760" cy="738835"/>
+            <a:off x="2000707" y="5433365"/>
+            <a:ext cx="5268773" cy="738835"/>
           </a:xfrm>
           <a:prstGeom prst="rect">
             <a:avLst/>
@@ -28791,7 +28767,7 @@
               <a:buNone/>
             </a:pPr>
             <a:r>
-              <a:rPr lang="ko-KR" altLang="en-US" sz="2200" dirty="0">
+              <a:rPr lang="ko-KR" altLang="en-US" sz="1500" dirty="0">
                 <a:solidFill>
                   <a:srgbClr val="14142B"/>
                 </a:solidFill>
@@ -28802,7 +28778,7 @@
               <a:t>무엇에 대한 이야기입니까</a:t>
             </a:r>
             <a:r>
-              <a:rPr lang="en-US" sz="2200" dirty="0">
+              <a:rPr lang="en-US" sz="1500" dirty="0">
                 <a:solidFill>
                   <a:srgbClr val="14142B"/>
                 </a:solidFill>
@@ -28810,7 +28786,7 @@
               <a:t>? 「</a:t>
             </a:r>
             <a:r>
-              <a:rPr lang="ko-KR" altLang="en-US" sz="2200" dirty="0">
+              <a:rPr lang="ko-KR" altLang="en-US" sz="1500" dirty="0">
                 <a:solidFill>
                   <a:srgbClr val="14142B"/>
                 </a:solidFill>
@@ -28821,7 +28797,7 @@
               <a:t>저는 요리를 좋아해요</a:t>
             </a:r>
             <a:r>
-              <a:rPr lang="en-US" sz="2200" dirty="0">
+              <a:rPr lang="en-US" sz="1500" dirty="0">
                 <a:solidFill>
                   <a:srgbClr val="14142B"/>
                 </a:solidFill>
@@ -28829,7 +28805,7 @@
               <a:t>. </a:t>
             </a:r>
             <a:r>
-              <a:rPr lang="ko-KR" altLang="en-US" sz="2200" dirty="0">
+              <a:rPr lang="ko-KR" altLang="en-US" sz="1500" dirty="0">
                 <a:solidFill>
                   <a:srgbClr val="14142B"/>
                 </a:solidFill>
@@ -28840,7 +28816,7 @@
               <a:t>요즘 한국 요리를 배워요</a:t>
             </a:r>
             <a:r>
-              <a:rPr lang="en-US" sz="2200" dirty="0">
+              <a:rPr lang="en-US" sz="1500" dirty="0">
                 <a:solidFill>
                   <a:srgbClr val="14142B"/>
                 </a:solidFill>
@@ -28848,7 +28824,7 @@
               <a:t>.」 ① </a:t>
             </a:r>
             <a:r>
-              <a:rPr lang="ko-KR" altLang="en-US" sz="2200" dirty="0">
+              <a:rPr lang="ko-KR" altLang="en-US" sz="1500" dirty="0">
                 <a:solidFill>
                   <a:srgbClr val="14142B"/>
                 </a:solidFill>
@@ -28859,7 +28835,7 @@
               <a:t>직업 </a:t>
             </a:r>
             <a:r>
-              <a:rPr lang="en-US" sz="2200" dirty="0">
+              <a:rPr lang="en-US" sz="1500" dirty="0">
                 <a:solidFill>
                   <a:srgbClr val="14142B"/>
                 </a:solidFill>
@@ -28867,7 +28843,7 @@
               <a:t>② </a:t>
             </a:r>
             <a:r>
-              <a:rPr lang="ko-KR" altLang="en-US" sz="2200" dirty="0">
+              <a:rPr lang="ko-KR" altLang="en-US" sz="1500" dirty="0">
                 <a:solidFill>
                   <a:srgbClr val="14142B"/>
                 </a:solidFill>
@@ -28878,7 +28854,7 @@
               <a:t>가족 </a:t>
             </a:r>
             <a:r>
-              <a:rPr lang="en-US" sz="2200" dirty="0">
+              <a:rPr lang="en-US" sz="1500" dirty="0">
                 <a:solidFill>
                   <a:srgbClr val="14142B"/>
                 </a:solidFill>
@@ -28886,7 +28862,7 @@
               <a:t>③ </a:t>
             </a:r>
             <a:r>
-              <a:rPr lang="ko-KR" altLang="en-US" sz="2200" dirty="0">
+              <a:rPr lang="ko-KR" altLang="en-US" sz="1500" dirty="0">
                 <a:solidFill>
                   <a:srgbClr val="14142B"/>
                 </a:solidFill>
@@ -28897,7 +28873,7 @@
               <a:t>취미 </a:t>
             </a:r>
             <a:r>
-              <a:rPr lang="en-US" sz="2200" dirty="0">
+              <a:rPr lang="en-US" sz="1500" dirty="0">
                 <a:solidFill>
                   <a:srgbClr val="14142B"/>
                 </a:solidFill>
@@ -28905,7 +28881,7 @@
               <a:t>④ </a:t>
             </a:r>
             <a:r>
-              <a:rPr lang="ko-KR" altLang="en-US" sz="2200" dirty="0">
+              <a:rPr lang="ko-KR" altLang="en-US" sz="1500" dirty="0">
                 <a:solidFill>
                   <a:srgbClr val="14142B"/>
                 </a:solidFill>
@@ -28915,13 +28891,13 @@
               </a:rPr>
               <a:t>고향</a:t>
             </a:r>
-            <a:endParaRPr lang="en-US" sz="2200" dirty="0"/>
+            <a:endParaRPr lang="en-US" sz="1500" dirty="0"/>
           </a:p>
         </p:txBody>
       </p:sp>
       <p:sp>
         <p:nvSpPr>
-          <p:cNvPr id="27" name="rev_4_caja"/>
+          <p:cNvPr id="28" name="rev_4_caja"/>
           <p:cNvSpPr/>
           <p:nvPr/>
         </p:nvSpPr>
@@ -28948,7 +28924,7 @@
       </p:sp>
       <p:sp>
         <p:nvSpPr>
-          <p:cNvPr id="28" name="rev_4_txt"/>
+          <p:cNvPr id="29" name="rev_4_txt"/>
           <p:cNvSpPr txBox="1"/>
           <p:nvPr/>
         </p:nvSpPr>
@@ -28989,7 +28965,7 @@
       </p:sp>
       <p:sp>
         <p:nvSpPr>
-          <p:cNvPr id="29" name="Slide Number Placeholder 0"/>
+          <p:cNvPr id="30" name="Slide Number Placeholder 0"/>
           <p:cNvSpPr>
             <a:spLocks noGrp="1"/>
           </p:cNvSpPr>
@@ -29218,7 +29194,7 @@
                                           </p:stCondLst>
                                         </p:cTn>
                                         <p:tgtEl>
-                                          <p:spTgt spid="17"/>
+                                          <p:spTgt spid="18"/>
                                         </p:tgtEl>
                                         <p:attrNameLst>
                                           <p:attrName>style.visibility</p:attrName>
@@ -29245,7 +29221,7 @@
                                           </p:stCondLst>
                                         </p:cTn>
                                         <p:tgtEl>
-                                          <p:spTgt spid="18"/>
+                                          <p:spTgt spid="19"/>
                                         </p:tgtEl>
                                         <p:attrNameLst>
                                           <p:attrName>style.visibility</p:attrName>
@@ -29290,7 +29266,7 @@
                                           </p:stCondLst>
                                         </p:cTn>
                                         <p:tgtEl>
-                                          <p:spTgt spid="22"/>
+                                          <p:spTgt spid="23"/>
                                         </p:tgtEl>
                                         <p:attrNameLst>
                                           <p:attrName>style.visibility</p:attrName>
@@ -29317,7 +29293,7 @@
                                           </p:stCondLst>
                                         </p:cTn>
                                         <p:tgtEl>
-                                          <p:spTgt spid="23"/>
+                                          <p:spTgt spid="24"/>
                                         </p:tgtEl>
                                         <p:attrNameLst>
                                           <p:attrName>style.visibility</p:attrName>
@@ -29362,7 +29338,7 @@
                                           </p:stCondLst>
                                         </p:cTn>
                                         <p:tgtEl>
-                                          <p:spTgt spid="27"/>
+                                          <p:spTgt spid="28"/>
                                         </p:tgtEl>
                                         <p:attrNameLst>
                                           <p:attrName>style.visibility</p:attrName>
@@ -29389,7 +29365,7 @@
                                           </p:stCondLst>
                                         </p:cTn>
                                         <p:tgtEl>
-                                          <p:spTgt spid="28"/>
+                                          <p:spTgt spid="29"/>
                                         </p:tgtEl>
                                         <p:attrNameLst>
                                           <p:attrName>style.visibility</p:attrName>
@@ -29432,9 +29408,9 @@
     <p:bldLst>
       <p:bldP spid="8" grpId="0" animBg="1"/>
       <p:bldP spid="13" grpId="0" animBg="1"/>
-      <p:bldP spid="18" grpId="0" animBg="1"/>
-      <p:bldP spid="23" grpId="0" animBg="1"/>
-      <p:bldP spid="28" grpId="0" animBg="1"/>
+      <p:bldP spid="19" grpId="0" animBg="1"/>
+      <p:bldP spid="24" grpId="0" animBg="1"/>
+      <p:bldP spid="29" grpId="0" animBg="1"/>
     </p:bldLst>
   </p:timing>
 </p:sld>
@@ -29574,7 +29550,7 @@
               <a:buChar char="•"/>
             </a:pPr>
             <a:r>
-              <a:rPr lang="ko-KR" altLang="en-US" sz="2400" dirty="0">
+              <a:rPr lang="ko-KR" altLang="en-US" sz="2800" dirty="0">
                 <a:solidFill>
                   <a:srgbClr val="14142B"/>
                 </a:solidFill>
@@ -29585,7 +29561,7 @@
               <a:t>몇 살이에요</a:t>
             </a:r>
             <a:r>
-              <a:rPr lang="en-US" sz="2400" dirty="0">
+              <a:rPr lang="en-US" sz="2800" dirty="0">
                 <a:solidFill>
                   <a:srgbClr val="14142B"/>
                 </a:solidFill>
@@ -29593,7 +29569,7 @@
               <a:t>? — </a:t>
             </a:r>
             <a:r>
-              <a:rPr lang="ko-KR" altLang="en-US" sz="2400" dirty="0">
+              <a:rPr lang="ko-KR" altLang="en-US" sz="2800" dirty="0">
                 <a:solidFill>
                   <a:srgbClr val="14142B"/>
                 </a:solidFill>
@@ -29604,14 +29580,14 @@
               <a:t>스물다섯 살이에요</a:t>
             </a:r>
             <a:r>
-              <a:rPr lang="en-US" sz="2400" dirty="0">
+              <a:rPr lang="en-US" sz="2800" dirty="0">
                 <a:solidFill>
                   <a:srgbClr val="14142B"/>
                 </a:solidFill>
               </a:rPr>
               <a:t>. (¿Cuántos años tienes? — Veinticinco.)</a:t>
             </a:r>
-            <a:endParaRPr lang="en-US" sz="2400" dirty="0"/>
+            <a:endParaRPr lang="en-US" sz="2800" dirty="0"/>
           </a:p>
           <a:p>
             <a:pPr marL="228600" indent="-228600" eaLnBrk="1">
@@ -29622,7 +29598,7 @@
               <a:buChar char="•"/>
             </a:pPr>
             <a:r>
-              <a:rPr lang="ko-KR" altLang="en-US" sz="2400" dirty="0">
+              <a:rPr lang="ko-KR" altLang="en-US" sz="2800" dirty="0">
                 <a:solidFill>
                   <a:srgbClr val="14142B"/>
                 </a:solidFill>
@@ -29633,7 +29609,7 @@
               <a:t>생일이 언제예요</a:t>
             </a:r>
             <a:r>
-              <a:rPr lang="en-US" sz="2400" dirty="0">
+              <a:rPr lang="en-US" sz="2800" dirty="0">
                 <a:solidFill>
                   <a:srgbClr val="14142B"/>
                 </a:solidFill>
@@ -29641,7 +29617,7 @@
               <a:t>? — </a:t>
             </a:r>
             <a:r>
-              <a:rPr lang="ko-KR" altLang="en-US" sz="2400" dirty="0">
+              <a:rPr lang="ko-KR" altLang="en-US" sz="2800" dirty="0">
                 <a:solidFill>
                   <a:srgbClr val="14142B"/>
                 </a:solidFill>
@@ -29652,14 +29628,14 @@
               <a:t>유월 십오 일이에요</a:t>
             </a:r>
             <a:r>
-              <a:rPr lang="en-US" sz="2400" dirty="0">
+              <a:rPr lang="en-US" sz="2800" dirty="0">
                 <a:solidFill>
                   <a:srgbClr val="14142B"/>
                 </a:solidFill>
               </a:rPr>
               <a:t>. (¿Tu cumpleaños? — El 15 de junio.)</a:t>
             </a:r>
-            <a:endParaRPr lang="en-US" sz="2400" dirty="0"/>
+            <a:endParaRPr lang="en-US" sz="2800" dirty="0"/>
           </a:p>
           <a:p>
             <a:pPr marL="228600" indent="-228600" eaLnBrk="1">
@@ -29670,7 +29646,7 @@
               <a:buChar char="•"/>
             </a:pPr>
             <a:r>
-              <a:rPr lang="ko-KR" altLang="en-US" sz="2400" dirty="0">
+              <a:rPr lang="ko-KR" altLang="en-US" sz="2800" dirty="0">
                 <a:solidFill>
                   <a:srgbClr val="14142B"/>
                 </a:solidFill>
@@ -29678,17 +29654,17 @@
                 <a:ea typeface="Malgun Gothic" pitchFamily="34" charset="-122"/>
                 <a:cs typeface="Malgun Gothic" pitchFamily="34" charset="-120"/>
               </a:rPr>
-              <a:t>일곱 시에 일어나요</a:t>
-            </a:r>
-            <a:r>
-              <a:rPr lang="en-US" sz="2400" dirty="0">
+              <a:t>일곱 시에 일어나요</a:t>
+            </a:r>
+            <a:r>
+              <a:rPr lang="en-US" sz="2800" dirty="0">
                 <a:solidFill>
                   <a:srgbClr val="14142B"/>
                 </a:solidFill>
               </a:rPr>
               <a:t>. (Me levanto a las siete.)</a:t>
             </a:r>
-            <a:endParaRPr lang="en-US" sz="2400" dirty="0"/>
+            <a:endParaRPr lang="en-US" sz="2800" dirty="0"/>
           </a:p>
         </p:txBody>
       </p:sp>
@@ -29884,7 +29860,7 @@
         <p:spPr>
           <a:xfrm>
             <a:off x="548640" y="1325880"/>
-            <a:ext cx="11064240" cy="457200"/>
+            <a:ext cx="11091672" cy="457200"/>
           </a:xfrm>
           <a:prstGeom prst="rect">
             <a:avLst/>
@@ -29922,7 +29898,7 @@
           <p:nvPr>
             <p:extLst>
               <p:ext uri="{D42A27DB-BD31-4B8C-83A1-F6EECF244321}">
-                <p14:modId xmlns:p14="http://schemas.microsoft.com/office/powerpoint/2010/main" val="1538290038"/>
+                <p14:modId xmlns:p14="http://schemas.microsoft.com/office/powerpoint/2010/main" val="580504928"/>
               </p:ext>
             </p:extLst>
           </p:nvPr>
@@ -31667,7 +31643,7 @@
         <p:spPr>
           <a:xfrm>
             <a:off x="548640" y="1325880"/>
-            <a:ext cx="11064240" cy="457200"/>
+            <a:ext cx="11091672" cy="457200"/>
           </a:xfrm>
           <a:prstGeom prst="rect">
             <a:avLst/>
@@ -31705,7 +31681,7 @@
           <p:nvPr>
             <p:extLst>
               <p:ext uri="{D42A27DB-BD31-4B8C-83A1-F6EECF244321}">
-                <p14:modId xmlns:p14="http://schemas.microsoft.com/office/powerpoint/2010/main" val="3975160831"/>
+                <p14:modId xmlns:p14="http://schemas.microsoft.com/office/powerpoint/2010/main" val="2748825530"/>
               </p:ext>
             </p:extLst>
           </p:nvPr>
@@ -33747,7 +33723,7 @@
         <p:spPr>
           <a:xfrm>
             <a:off x="548640" y="1325880"/>
-            <a:ext cx="11064240" cy="457200"/>
+            <a:ext cx="11091672" cy="457200"/>
           </a:xfrm>
           <a:prstGeom prst="rect">
             <a:avLst/>
@@ -33785,7 +33761,7 @@
           <p:nvPr>
             <p:extLst>
               <p:ext uri="{D42A27DB-BD31-4B8C-83A1-F6EECF244321}">
-                <p14:modId xmlns:p14="http://schemas.microsoft.com/office/powerpoint/2010/main" val="229485636"/>
+                <p14:modId xmlns:p14="http://schemas.microsoft.com/office/powerpoint/2010/main" val="3271241190"/>
               </p:ext>
             </p:extLst>
           </p:nvPr>
@@ -35808,7 +35784,7 @@
         <p:spPr>
           <a:xfrm>
             <a:off x="548640" y="1325880"/>
-            <a:ext cx="11064240" cy="457200"/>
+            <a:ext cx="11091672" cy="457200"/>
           </a:xfrm>
           <a:prstGeom prst="rect">
             <a:avLst/>
@@ -35853,7 +35829,7 @@
                 <a:ea typeface="Malgun Gothic" pitchFamily="34" charset="-122"/>
                 <a:cs typeface="Malgun Gothic" pitchFamily="34" charset="-120"/>
               </a:rPr>
-              <a:t>천 원 </a:t>
+              <a:t>천 원 </a:t>
             </a:r>
             <a:r>
               <a:rPr lang="en-US" sz="1800" i="1" dirty="0">
@@ -35872,7 +35848,7 @@
                 <a:ea typeface="Malgun Gothic" pitchFamily="34" charset="-122"/>
                 <a:cs typeface="Malgun Gothic" pitchFamily="34" charset="-120"/>
               </a:rPr>
-              <a:t>만 원 </a:t>
+              <a:t>만 원 </a:t>
             </a:r>
             <a:r>
               <a:rPr lang="en-US" sz="1800" i="1" dirty="0">
@@ -35914,7 +35890,7 @@
           <p:nvPr>
             <p:extLst>
               <p:ext uri="{D42A27DB-BD31-4B8C-83A1-F6EECF244321}">
-                <p14:modId xmlns:p14="http://schemas.microsoft.com/office/powerpoint/2010/main" val="3496318466"/>
+                <p14:modId xmlns:p14="http://schemas.microsoft.com/office/powerpoint/2010/main" val="2734058553"/>
               </p:ext>
             </p:extLst>
           </p:nvPr>
@@ -37865,7 +37841,7 @@
         <p:spPr>
           <a:xfrm>
             <a:off x="548640" y="1325880"/>
-            <a:ext cx="11064240" cy="457200"/>
+            <a:ext cx="11091672" cy="457200"/>
           </a:xfrm>
           <a:prstGeom prst="rect">
             <a:avLst/>
@@ -37903,7 +37879,7 @@
           <p:nvPr>
             <p:extLst>
               <p:ext uri="{D42A27DB-BD31-4B8C-83A1-F6EECF244321}">
-                <p14:modId xmlns:p14="http://schemas.microsoft.com/office/powerpoint/2010/main" val="1539695541"/>
+                <p14:modId xmlns:p14="http://schemas.microsoft.com/office/powerpoint/2010/main" val="3078848322"/>
               </p:ext>
             </p:extLst>
           </p:nvPr>
@@ -38481,7 +38457,7 @@
         <p:spPr>
           <a:xfrm>
             <a:off x="548640" y="1325880"/>
-            <a:ext cx="11064240" cy="457200"/>
+            <a:ext cx="11091672" cy="457200"/>
           </a:xfrm>
           <a:prstGeom prst="rect">
             <a:avLst/>
@@ -38575,15 +38551,39 @@
           </a:p>
         </p:txBody>
       </p:sp>
-      <p:sp>
-        <p:nvSpPr>
-          <p:cNvPr id="6" name="Text 4"/>
+      <p:pic>
+        <p:nvPicPr>
+          <p:cNvPr id="6" name="col_img_0" descr="C:\Users\Chingu\AppData\Local\Temp\claude\C--Users-Chingu-Desktop-ACADEMIASEULWEB\d4111e1b-5523-44ea-97b2-b1a1d9545b9e\scratchpad\decks\cache\img_16738ba3ed1b3d97.png"/>
+          <p:cNvPicPr>
+            <a:picLocks noChangeAspect="1"/>
+          </p:cNvPicPr>
+          <p:nvPr/>
+        </p:nvPicPr>
+        <p:blipFill>
+          <a:blip r:embed="rId3"/>
+          <a:stretch>
+            <a:fillRect/>
+          </a:stretch>
+        </p:blipFill>
+        <p:spPr>
+          <a:xfrm>
+            <a:off x="1632204" y="2651760"/>
+            <a:ext cx="3218688" cy="1463040"/>
+          </a:xfrm>
+          <a:prstGeom prst="rect">
+            <a:avLst/>
+          </a:prstGeom>
+        </p:spPr>
+      </p:pic>
+      <p:sp>
+        <p:nvSpPr>
+          <p:cNvPr id="7" name="Text 4"/>
           <p:cNvSpPr txBox="1"/>
           <p:nvPr/>
         </p:nvSpPr>
         <p:spPr>
           <a:xfrm>
-            <a:off x="777240" y="2651760"/>
+            <a:off x="777240" y="4206240"/>
             <a:ext cx="4928616" cy="914400"/>
           </a:xfrm>
           <a:prstGeom prst="rect">
@@ -38618,14 +38618,14 @@
       </p:sp>
       <p:sp>
         <p:nvSpPr>
-          <p:cNvPr id="7" name="lista"/>
+          <p:cNvPr id="8" name="lista"/>
           <p:cNvSpPr txBox="1"/>
           <p:nvPr/>
         </p:nvSpPr>
         <p:spPr>
           <a:xfrm>
-            <a:off x="731520" y="3657600"/>
-            <a:ext cx="5020056" cy="2377440"/>
+            <a:off x="731520" y="5212080"/>
+            <a:ext cx="5020056" cy="822960"/>
           </a:xfrm>
           <a:prstGeom prst="rect">
             <a:avLst/>
@@ -38655,7 +38655,7 @@
                 <a:ea typeface="Malgun Gothic" pitchFamily="34" charset="-122"/>
                 <a:cs typeface="Malgun Gothic" pitchFamily="34" charset="-120"/>
               </a:rPr>
-              <a:t>지금 칠레는 밤 아홉 시예요</a:t>
+              <a:t>지금 칠레는 밤 아홉 시예요</a:t>
             </a:r>
             <a:r>
               <a:rPr lang="en-US" sz="2000" dirty="0">
@@ -38700,7 +38700,7 @@
       </p:sp>
       <p:sp>
         <p:nvSpPr>
-          <p:cNvPr id="8" name="col_1"/>
+          <p:cNvPr id="9" name="col_1"/>
           <p:cNvSpPr/>
           <p:nvPr/>
         </p:nvSpPr>
@@ -38727,7 +38727,7 @@
       </p:sp>
       <p:sp>
         <p:nvSpPr>
-          <p:cNvPr id="9" name="Text 7"/>
+          <p:cNvPr id="10" name="Text 7"/>
           <p:cNvSpPr txBox="1"/>
           <p:nvPr/>
         </p:nvSpPr>
@@ -38763,15 +38763,39 @@
           </a:p>
         </p:txBody>
       </p:sp>
-      <p:sp>
-        <p:nvSpPr>
-          <p:cNvPr id="10" name="Text 8"/>
+      <p:pic>
+        <p:nvPicPr>
+          <p:cNvPr id="11" name="col_img_1" descr="C:\Users\Chingu\AppData\Local\Temp\claude\C--Users-Chingu-Desktop-ACADEMIASEULWEB\d4111e1b-5523-44ea-97b2-b1a1d9545b9e\scratchpad\decks\cache\img_fd61cdca6d0ef88d.png"/>
+          <p:cNvPicPr>
+            <a:picLocks noChangeAspect="1"/>
+          </p:cNvPicPr>
+          <p:nvPr/>
+        </p:nvPicPr>
+        <p:blipFill>
+          <a:blip r:embed="rId4"/>
+          <a:stretch>
+            <a:fillRect/>
+          </a:stretch>
+        </p:blipFill>
+        <p:spPr>
+          <a:xfrm>
+            <a:off x="7338060" y="2651760"/>
+            <a:ext cx="3218688" cy="1463040"/>
+          </a:xfrm>
+          <a:prstGeom prst="rect">
+            <a:avLst/>
+          </a:prstGeom>
+        </p:spPr>
+      </p:pic>
+      <p:sp>
+        <p:nvSpPr>
+          <p:cNvPr id="12" name="Text 8"/>
           <p:cNvSpPr txBox="1"/>
           <p:nvPr/>
         </p:nvSpPr>
         <p:spPr>
           <a:xfrm>
-            <a:off x="6483096" y="2651760"/>
+            <a:off x="6483096" y="4206240"/>
             <a:ext cx="4928616" cy="914400"/>
           </a:xfrm>
           <a:prstGeom prst="rect">
@@ -38806,14 +38830,14 @@
       </p:sp>
       <p:sp>
         <p:nvSpPr>
-          <p:cNvPr id="11" name="lista"/>
+          <p:cNvPr id="13" name="lista"/>
           <p:cNvSpPr txBox="1"/>
           <p:nvPr/>
         </p:nvSpPr>
         <p:spPr>
           <a:xfrm>
-            <a:off x="6437376" y="3657600"/>
-            <a:ext cx="5020056" cy="2377440"/>
+            <a:off x="6437376" y="5212080"/>
+            <a:ext cx="5020056" cy="822960"/>
           </a:xfrm>
           <a:prstGeom prst="rect">
             <a:avLst/>
@@ -38843,7 +38867,7 @@
                 <a:ea typeface="Malgun Gothic" pitchFamily="34" charset="-122"/>
                 <a:cs typeface="Malgun Gothic" pitchFamily="34" charset="-120"/>
               </a:rPr>
-              <a:t>한국은 아침 아홉 시예요</a:t>
+              <a:t>한국은 아침 아홉 시예요</a:t>
             </a:r>
             <a:r>
               <a:rPr lang="en-US" sz="2000" dirty="0">
@@ -39035,7 +39059,7 @@
         <p:spPr>
           <a:xfrm>
             <a:off x="548640" y="1325880"/>
-            <a:ext cx="11064240" cy="457200"/>
+            <a:ext cx="11091672" cy="457200"/>
           </a:xfrm>
           <a:prstGeom prst="rect">
             <a:avLst/>
@@ -39624,7 +39648,7 @@
                 <a:ea typeface="Malgun Gothic" pitchFamily="34" charset="-122"/>
                 <a:cs typeface="Malgun Gothic" pitchFamily="34" charset="-120"/>
               </a:rPr>
-              <a:t>세 시 삼십 분</a:t>
+              <a:t>세 시 삼십 분</a:t>
             </a:r>
             <a:endParaRPr lang="en-US" sz="3600" dirty="0"/>
           </a:p>
@@ -39882,7 +39906,7 @@
         <p:spPr>
           <a:xfrm>
             <a:off x="548640" y="1325880"/>
-            <a:ext cx="11064240" cy="457200"/>
+            <a:ext cx="11091672" cy="457200"/>
           </a:xfrm>
           <a:prstGeom prst="rect">
             <a:avLst/>
@@ -40014,7 +40038,7 @@
               <a:buNone/>
             </a:pPr>
             <a:r>
-              <a:rPr lang="ko-KR" altLang="en-US" sz="4500" b="1" dirty="0">
+              <a:rPr lang="ko-KR" altLang="en-US" sz="3000" b="1" dirty="0">
                 <a:solidFill>
                   <a:srgbClr val="4236F6"/>
                 </a:solidFill>
@@ -40024,7 +40048,7 @@
               </a:rPr>
               <a:t>하나</a:t>
             </a:r>
-            <a:endParaRPr lang="en-US" sz="4500" dirty="0"/>
+            <a:endParaRPr lang="en-US" sz="3000" dirty="0"/>
           </a:p>
         </p:txBody>
       </p:sp>
@@ -40120,7 +40144,7 @@
               <a:buNone/>
             </a:pPr>
             <a:r>
-              <a:rPr lang="ko-KR" altLang="en-US" sz="7600" b="1" dirty="0">
+              <a:rPr lang="ko-KR" altLang="en-US" sz="3000" b="1" dirty="0">
                 <a:solidFill>
                   <a:srgbClr val="4236F6"/>
                 </a:solidFill>
@@ -40130,7 +40154,7 @@
               </a:rPr>
               <a:t>둘</a:t>
             </a:r>
-            <a:endParaRPr lang="en-US" sz="7600" dirty="0"/>
+            <a:endParaRPr lang="en-US" sz="3000" dirty="0"/>
           </a:p>
         </p:txBody>
       </p:sp>
@@ -40226,7 +40250,7 @@
               <a:buNone/>
             </a:pPr>
             <a:r>
-              <a:rPr lang="ko-KR" altLang="en-US" sz="7600" b="1" dirty="0">
+              <a:rPr lang="ko-KR" altLang="en-US" sz="3000" b="1" dirty="0">
                 <a:solidFill>
                   <a:srgbClr val="4236F6"/>
                 </a:solidFill>
@@ -40236,7 +40260,7 @@
               </a:rPr>
               <a:t>셋</a:t>
             </a:r>
-            <a:endParaRPr lang="en-US" sz="7600" dirty="0"/>
+            <a:endParaRPr lang="en-US" sz="3000" dirty="0"/>
           </a:p>
         </p:txBody>
       </p:sp>
@@ -40332,7 +40356,7 @@
               <a:buNone/>
             </a:pPr>
             <a:r>
-              <a:rPr lang="ko-KR" altLang="en-US" sz="7600" b="1" dirty="0">
+              <a:rPr lang="ko-KR" altLang="en-US" sz="3000" b="1" dirty="0">
                 <a:solidFill>
                   <a:srgbClr val="4236F6"/>
                 </a:solidFill>
@@ -40342,7 +40366,7 @@
               </a:rPr>
               <a:t>넷</a:t>
             </a:r>
-            <a:endParaRPr lang="en-US" sz="7600" dirty="0"/>
+            <a:endParaRPr lang="en-US" sz="3000" dirty="0"/>
           </a:p>
         </p:txBody>
       </p:sp>
@@ -40438,7 +40462,7 @@
               <a:buNone/>
             </a:pPr>
             <a:r>
-              <a:rPr lang="ko-KR" altLang="en-US" sz="4500" b="1" dirty="0">
+              <a:rPr lang="ko-KR" altLang="en-US" sz="3000" b="1" dirty="0">
                 <a:solidFill>
                   <a:srgbClr val="4236F6"/>
                 </a:solidFill>
@@ -40448,7 +40472,7 @@
               </a:rPr>
               <a:t>다섯</a:t>
             </a:r>
-            <a:endParaRPr lang="en-US" sz="4500" dirty="0"/>
+            <a:endParaRPr lang="en-US" sz="3000" dirty="0"/>
           </a:p>
         </p:txBody>
       </p:sp>
@@ -40544,7 +40568,7 @@
               <a:buNone/>
             </a:pPr>
             <a:r>
-              <a:rPr lang="ko-KR" altLang="en-US" sz="4500" b="1" dirty="0">
+              <a:rPr lang="ko-KR" altLang="en-US" sz="3000" b="1" dirty="0">
                 <a:solidFill>
                   <a:srgbClr val="4236F6"/>
                 </a:solidFill>
@@ -40554,7 +40578,7 @@
               </a:rPr>
               <a:t>여섯</a:t>
             </a:r>
-            <a:endParaRPr lang="en-US" sz="4500" dirty="0"/>
+            <a:endParaRPr lang="en-US" sz="3000" dirty="0"/>
           </a:p>
         </p:txBody>
       </p:sp>
@@ -40650,7 +40674,7 @@
               <a:buNone/>
             </a:pPr>
             <a:r>
-              <a:rPr lang="ko-KR" altLang="en-US" sz="4500" b="1" dirty="0">
+              <a:rPr lang="ko-KR" altLang="en-US" sz="3000" b="1" dirty="0">
                 <a:solidFill>
                   <a:srgbClr val="4236F6"/>
                 </a:solidFill>
@@ -40660,7 +40684,7 @@
               </a:rPr>
               <a:t>일곱</a:t>
             </a:r>
-            <a:endParaRPr lang="en-US" sz="4500" dirty="0"/>
+            <a:endParaRPr lang="en-US" sz="3000" dirty="0"/>
           </a:p>
         </p:txBody>
       </p:sp>
@@ -40756,7 +40780,7 @@
               <a:buNone/>
             </a:pPr>
             <a:r>
-              <a:rPr lang="ko-KR" altLang="en-US" sz="4500" b="1" dirty="0">
+              <a:rPr lang="ko-KR" altLang="en-US" sz="3000" b="1" dirty="0">
                 <a:solidFill>
                   <a:srgbClr val="4236F6"/>
                 </a:solidFill>
@@ -40766,7 +40790,7 @@
               </a:rPr>
               <a:t>여덟</a:t>
             </a:r>
-            <a:endParaRPr lang="en-US" sz="4500" dirty="0"/>
+            <a:endParaRPr lang="en-US" sz="3000" dirty="0"/>
           </a:p>
         </p:txBody>
       </p:sp>
@@ -40862,7 +40886,7 @@
               <a:buNone/>
             </a:pPr>
             <a:r>
-              <a:rPr lang="ko-KR" altLang="en-US" sz="4500" b="1" dirty="0">
+              <a:rPr lang="ko-KR" altLang="en-US" sz="3000" b="1" dirty="0">
                 <a:solidFill>
                   <a:srgbClr val="4236F6"/>
                 </a:solidFill>
@@ -40872,7 +40896,7 @@
               </a:rPr>
               <a:t>아홉</a:t>
             </a:r>
-            <a:endParaRPr lang="en-US" sz="4500" dirty="0"/>
+            <a:endParaRPr lang="en-US" sz="3000" dirty="0"/>
           </a:p>
         </p:txBody>
       </p:sp>
@@ -40968,7 +40992,7 @@
               <a:buNone/>
             </a:pPr>
             <a:r>
-              <a:rPr lang="ko-KR" altLang="en-US" sz="7600" b="1" dirty="0">
+              <a:rPr lang="ko-KR" altLang="en-US" sz="3000" b="1" dirty="0">
                 <a:solidFill>
                   <a:srgbClr val="4236F6"/>
                 </a:solidFill>
@@ -40978,7 +41002,7 @@
               </a:rPr>
               <a:t>열</a:t>
             </a:r>
-            <a:endParaRPr lang="en-US" sz="7600" dirty="0"/>
+            <a:endParaRPr lang="en-US" sz="3000" dirty="0"/>
           </a:p>
         </p:txBody>
       </p:sp>
@@ -41180,7 +41204,7 @@
               <a:buNone/>
             </a:pPr>
             <a:r>
-              <a:rPr lang="ko-KR" altLang="en-US" sz="4500" b="1" dirty="0">
+              <a:rPr lang="ko-KR" altLang="en-US" sz="3000" b="1" dirty="0">
                 <a:solidFill>
                   <a:srgbClr val="4236F6"/>
                 </a:solidFill>
@@ -41190,7 +41214,7 @@
               </a:rPr>
               <a:t>열둘</a:t>
             </a:r>
-            <a:endParaRPr lang="en-US" sz="4500" dirty="0"/>
+            <a:endParaRPr lang="en-US" sz="3000" dirty="0"/>
           </a:p>
         </p:txBody>
       </p:sp>
@@ -41555,7 +41579,7 @@
         <p:spPr>
           <a:xfrm>
             <a:off x="548640" y="1325880"/>
-            <a:ext cx="11064240" cy="457200"/>
+            <a:ext cx="11091672" cy="457200"/>
           </a:xfrm>
           <a:prstGeom prst="rect">
             <a:avLst/>
@@ -41581,7 +41605,7 @@
                 <a:ea typeface="Malgun Gothic" pitchFamily="34" charset="-122"/>
                 <a:cs typeface="Malgun Gothic" pitchFamily="34" charset="-120"/>
               </a:rPr>
-              <a:t>Como en español: un año, veintiún años · el resto no cambia: 다섯 시</a:t>
+              <a:t>Como en español: un año, veintiún años · el resto no cambia: 다섯 시</a:t>
             </a:r>
             <a:r>
               <a:rPr lang="en-US" sz="1800" i="1" dirty="0">
@@ -41600,7 +41624,7 @@
                 <a:ea typeface="Malgun Gothic" pitchFamily="34" charset="-122"/>
                 <a:cs typeface="Malgun Gothic" pitchFamily="34" charset="-120"/>
               </a:rPr>
-              <a:t>여섯 살</a:t>
+              <a:t>여섯 살</a:t>
             </a:r>
             <a:endParaRPr lang="en-US" sz="1800" dirty="0"/>
           </a:p>
@@ -41615,7 +41639,7 @@
           <p:nvPr>
             <p:extLst>
               <p:ext uri="{D42A27DB-BD31-4B8C-83A1-F6EECF244321}">
-                <p14:modId xmlns:p14="http://schemas.microsoft.com/office/powerpoint/2010/main" val="3448557376"/>
+                <p14:modId xmlns:p14="http://schemas.microsoft.com/office/powerpoint/2010/main" val="2146100103"/>
               </p:ext>
             </p:extLst>
           </p:nvPr>
@@ -42017,7 +42041,7 @@
                           <a:ea typeface="Malgun Gothic" pitchFamily="34" charset="-122"/>
                           <a:cs typeface="Malgun Gothic" pitchFamily="34" charset="-120"/>
                         </a:rPr>
-                        <a:t>한 시 </a:t>
+                        <a:t>한 시 </a:t>
                       </a:r>
                       <a:r>
                         <a:rPr lang="en-US" sz="1800" dirty="0">
@@ -42036,7 +42060,7 @@
                           <a:ea typeface="Malgun Gothic" pitchFamily="34" charset="-122"/>
                           <a:cs typeface="Malgun Gothic" pitchFamily="34" charset="-120"/>
                         </a:rPr>
-                        <a:t>한 살</a:t>
+                        <a:t>한 살</a:t>
                       </a:r>
                       <a:endParaRPr lang="en-US" sz="1200" dirty="0"/>
                     </a:p>
@@ -42243,7 +42267,7 @@
                           <a:ea typeface="Malgun Gothic" pitchFamily="34" charset="-122"/>
                           <a:cs typeface="Malgun Gothic" pitchFamily="34" charset="-120"/>
                         </a:rPr>
-                        <a:t>두 시 </a:t>
+                        <a:t>두 시 </a:t>
                       </a:r>
                       <a:r>
                         <a:rPr lang="en-US" sz="1800" dirty="0">
@@ -42469,7 +42493,7 @@
                           <a:ea typeface="Malgun Gothic" pitchFamily="34" charset="-122"/>
                           <a:cs typeface="Malgun Gothic" pitchFamily="34" charset="-120"/>
                         </a:rPr>
-                        <a:t>세 시 </a:t>
+                        <a:t>세 시 </a:t>
                       </a:r>
                       <a:r>
                         <a:rPr lang="en-US" sz="1800" dirty="0">
@@ -42695,7 +42719,7 @@
                           <a:ea typeface="Malgun Gothic" pitchFamily="34" charset="-122"/>
                           <a:cs typeface="Malgun Gothic" pitchFamily="34" charset="-120"/>
                         </a:rPr>
-                        <a:t>네 시 </a:t>
+                        <a:t>네 시 </a:t>
                       </a:r>
                       <a:r>
                         <a:rPr lang="en-US" sz="1800" dirty="0">
@@ -42921,7 +42945,7 @@
                           <a:ea typeface="Malgun Gothic" pitchFamily="34" charset="-122"/>
                           <a:cs typeface="Malgun Gothic" pitchFamily="34" charset="-120"/>
                         </a:rPr>
-                        <a:t>스무 살 </a:t>
+                        <a:t>스무 살 </a:t>
                       </a:r>
                       <a:r>
                         <a:rPr lang="en-US" sz="1800" dirty="0">
@@ -43145,16 +43169,40 @@
           </a:p>
         </p:txBody>
       </p:sp>
-      <p:sp>
-        <p:nvSpPr>
-          <p:cNvPr id="3" name="Text 1"/>
+      <p:pic>
+        <p:nvPicPr>
+          <p:cNvPr id="3" name="imagen" descr="C:\Users\Chingu\AppData\Local\Temp\claude\C--Users-Chingu-Desktop-ACADEMIASEULWEB\d4111e1b-5523-44ea-97b2-b1a1d9545b9e\scratchpad\decks\cache\img_a2642c762ac659bd.png"/>
+          <p:cNvPicPr>
+            <a:picLocks noChangeAspect="1"/>
+          </p:cNvPicPr>
+          <p:nvPr/>
+        </p:nvPicPr>
+        <p:blipFill>
+          <a:blip r:embed="rId3"/>
+          <a:stretch>
+            <a:fillRect/>
+          </a:stretch>
+        </p:blipFill>
+        <p:spPr>
+          <a:xfrm>
+            <a:off x="7754112" y="1508760"/>
+            <a:ext cx="3886200" cy="4480560"/>
+          </a:xfrm>
+          <a:prstGeom prst="rect">
+            <a:avLst/>
+          </a:prstGeom>
+        </p:spPr>
+      </p:pic>
+      <p:sp>
+        <p:nvSpPr>
+          <p:cNvPr id="4" name="Text 1"/>
           <p:cNvSpPr txBox="1"/>
           <p:nvPr/>
         </p:nvSpPr>
         <p:spPr>
           <a:xfrm>
             <a:off x="548640" y="1325880"/>
-            <a:ext cx="11064240" cy="457200"/>
+            <a:ext cx="6931152" cy="457200"/>
           </a:xfrm>
           <a:prstGeom prst="rect">
             <a:avLst/>
@@ -43215,18 +43263,18 @@
       </p:sp>
       <p:sp>
         <p:nvSpPr>
-          <p:cNvPr id="4" name="tile_0"/>
+          <p:cNvPr id="5" name="tile_0"/>
           <p:cNvSpPr/>
           <p:nvPr/>
         </p:nvSpPr>
         <p:spPr>
           <a:xfrm>
             <a:off x="548640" y="1874520"/>
-            <a:ext cx="1388582" cy="2034540"/>
+            <a:ext cx="1561338" cy="1280160"/>
           </a:xfrm>
           <a:prstGeom prst="roundRect">
             <a:avLst>
-              <a:gd name="adj" fmla="val 9878"/>
+              <a:gd name="adj" fmla="val 10714"/>
             </a:avLst>
           </a:prstGeom>
           <a:solidFill>
@@ -43242,14 +43290,14 @@
       </p:sp>
       <p:sp>
         <p:nvSpPr>
-          <p:cNvPr id="5" name="Text 3"/>
+          <p:cNvPr id="6" name="Text 3"/>
           <p:cNvSpPr txBox="1"/>
           <p:nvPr/>
         </p:nvSpPr>
         <p:spPr>
           <a:xfrm>
             <a:off x="548640" y="1947672"/>
-            <a:ext cx="1388582" cy="1261415"/>
+            <a:ext cx="1561338" cy="793699"/>
           </a:xfrm>
           <a:prstGeom prst="rect">
             <a:avLst/>
@@ -43267,7 +43315,7 @@
               <a:buNone/>
             </a:pPr>
             <a:r>
-              <a:rPr lang="ko-KR" altLang="en-US" sz="3900" b="1" dirty="0">
+              <a:rPr lang="ko-KR" altLang="en-US" sz="3100" b="1" dirty="0">
                 <a:solidFill>
                   <a:srgbClr val="4236F6"/>
                 </a:solidFill>
@@ -43275,22 +43323,22 @@
                 <a:ea typeface="Malgun Gothic" pitchFamily="34" charset="-122"/>
                 <a:cs typeface="Malgun Gothic" pitchFamily="34" charset="-120"/>
               </a:rPr>
-              <a:t>한 시</a:t>
-            </a:r>
-            <a:endParaRPr lang="en-US" sz="3900" dirty="0"/>
+              <a:t>한 시</a:t>
+            </a:r>
+            <a:endParaRPr lang="en-US" sz="3100" dirty="0"/>
           </a:p>
         </p:txBody>
       </p:sp>
       <p:sp>
         <p:nvSpPr>
-          <p:cNvPr id="6" name="Text 4"/>
+          <p:cNvPr id="7" name="Text 4"/>
           <p:cNvSpPr txBox="1"/>
           <p:nvPr/>
         </p:nvSpPr>
         <p:spPr>
           <a:xfrm>
-            <a:off x="594360" y="3176626"/>
-            <a:ext cx="1297142" cy="695858"/>
+            <a:off x="594360" y="2693822"/>
+            <a:ext cx="1469898" cy="424282"/>
           </a:xfrm>
           <a:prstGeom prst="rect">
             <a:avLst/>
@@ -43308,31 +43356,31 @@
               <a:buNone/>
             </a:pPr>
             <a:r>
-              <a:rPr lang="en-US" sz="1700" dirty="0">
+              <a:rPr lang="en-US" sz="1200" dirty="0">
                 <a:solidFill>
                   <a:srgbClr val="5C5F6B"/>
                 </a:solidFill>
               </a:rPr>
               <a:t>1:00</a:t>
             </a:r>
-            <a:endParaRPr lang="en-US" sz="1700" dirty="0"/>
+            <a:endParaRPr lang="en-US" sz="1200" dirty="0"/>
           </a:p>
         </p:txBody>
       </p:sp>
       <p:sp>
         <p:nvSpPr>
-          <p:cNvPr id="7" name="tile_1"/>
+          <p:cNvPr id="8" name="tile_1"/>
           <p:cNvSpPr/>
           <p:nvPr/>
         </p:nvSpPr>
         <p:spPr>
           <a:xfrm>
-            <a:off x="2165822" y="1874520"/>
-            <a:ext cx="1388582" cy="2034540"/>
+            <a:off x="2338578" y="1874520"/>
+            <a:ext cx="1561338" cy="1280160"/>
           </a:xfrm>
           <a:prstGeom prst="roundRect">
             <a:avLst>
-              <a:gd name="adj" fmla="val 9878"/>
+              <a:gd name="adj" fmla="val 10714"/>
             </a:avLst>
           </a:prstGeom>
           <a:solidFill>
@@ -43348,14 +43396,14 @@
       </p:sp>
       <p:sp>
         <p:nvSpPr>
-          <p:cNvPr id="8" name="Text 6"/>
+          <p:cNvPr id="9" name="Text 6"/>
           <p:cNvSpPr txBox="1"/>
           <p:nvPr/>
         </p:nvSpPr>
         <p:spPr>
           <a:xfrm>
-            <a:off x="2165822" y="1947672"/>
-            <a:ext cx="1388582" cy="1261415"/>
+            <a:off x="2338578" y="1947672"/>
+            <a:ext cx="1561338" cy="793699"/>
           </a:xfrm>
           <a:prstGeom prst="rect">
             <a:avLst/>
@@ -43373,7 +43421,7 @@
               <a:buNone/>
             </a:pPr>
             <a:r>
-              <a:rPr lang="ko-KR" altLang="en-US" sz="3900" b="1" dirty="0">
+              <a:rPr lang="ko-KR" altLang="en-US" sz="3100" b="1" dirty="0">
                 <a:solidFill>
                   <a:srgbClr val="4236F6"/>
                 </a:solidFill>
@@ -43381,22 +43429,22 @@
                 <a:ea typeface="Malgun Gothic" pitchFamily="34" charset="-122"/>
                 <a:cs typeface="Malgun Gothic" pitchFamily="34" charset="-120"/>
               </a:rPr>
-              <a:t>두 시</a:t>
-            </a:r>
-            <a:endParaRPr lang="en-US" sz="3900" dirty="0"/>
+              <a:t>두 시</a:t>
+            </a:r>
+            <a:endParaRPr lang="en-US" sz="3100" dirty="0"/>
           </a:p>
         </p:txBody>
       </p:sp>
       <p:sp>
         <p:nvSpPr>
-          <p:cNvPr id="9" name="Text 7"/>
+          <p:cNvPr id="10" name="Text 7"/>
           <p:cNvSpPr txBox="1"/>
           <p:nvPr/>
         </p:nvSpPr>
         <p:spPr>
           <a:xfrm>
-            <a:off x="2211542" y="3176626"/>
-            <a:ext cx="1297142" cy="695858"/>
+            <a:off x="2384298" y="2693822"/>
+            <a:ext cx="1469898" cy="424282"/>
           </a:xfrm>
           <a:prstGeom prst="rect">
             <a:avLst/>
@@ -43414,31 +43462,31 @@
               <a:buNone/>
             </a:pPr>
             <a:r>
-              <a:rPr lang="en-US" sz="1700" dirty="0">
+              <a:rPr lang="en-US" sz="1200" dirty="0">
                 <a:solidFill>
                   <a:srgbClr val="5C5F6B"/>
                 </a:solidFill>
               </a:rPr>
               <a:t>2:00</a:t>
             </a:r>
-            <a:endParaRPr lang="en-US" sz="1700" dirty="0"/>
+            <a:endParaRPr lang="en-US" sz="1200" dirty="0"/>
           </a:p>
         </p:txBody>
       </p:sp>
       <p:sp>
         <p:nvSpPr>
-          <p:cNvPr id="10" name="tile_2"/>
+          <p:cNvPr id="11" name="tile_2"/>
           <p:cNvSpPr/>
           <p:nvPr/>
         </p:nvSpPr>
         <p:spPr>
           <a:xfrm>
-            <a:off x="3783003" y="1874520"/>
-            <a:ext cx="1388582" cy="2034540"/>
+            <a:off x="4128516" y="1874520"/>
+            <a:ext cx="1561338" cy="1280160"/>
           </a:xfrm>
           <a:prstGeom prst="roundRect">
             <a:avLst>
-              <a:gd name="adj" fmla="val 9878"/>
+              <a:gd name="adj" fmla="val 10714"/>
             </a:avLst>
           </a:prstGeom>
           <a:solidFill>
@@ -43454,14 +43502,14 @@
       </p:sp>
       <p:sp>
         <p:nvSpPr>
-          <p:cNvPr id="11" name="Text 9"/>
+          <p:cNvPr id="12" name="Text 9"/>
           <p:cNvSpPr txBox="1"/>
           <p:nvPr/>
         </p:nvSpPr>
         <p:spPr>
           <a:xfrm>
-            <a:off x="3783003" y="1947672"/>
-            <a:ext cx="1388582" cy="1261415"/>
+            <a:off x="4128516" y="1947672"/>
+            <a:ext cx="1561338" cy="793699"/>
           </a:xfrm>
           <a:prstGeom prst="rect">
             <a:avLst/>
@@ -43479,7 +43527,7 @@
               <a:buNone/>
             </a:pPr>
             <a:r>
-              <a:rPr lang="ko-KR" altLang="en-US" sz="3900" b="1" dirty="0">
+              <a:rPr lang="ko-KR" altLang="en-US" sz="3100" b="1" dirty="0">
                 <a:solidFill>
                   <a:srgbClr val="4236F6"/>
                 </a:solidFill>
@@ -43487,22 +43535,22 @@
                 <a:ea typeface="Malgun Gothic" pitchFamily="34" charset="-122"/>
                 <a:cs typeface="Malgun Gothic" pitchFamily="34" charset="-120"/>
               </a:rPr>
-              <a:t>세 시</a:t>
-            </a:r>
-            <a:endParaRPr lang="en-US" sz="3900" dirty="0"/>
+              <a:t>세 시</a:t>
+            </a:r>
+            <a:endParaRPr lang="en-US" sz="3100" dirty="0"/>
           </a:p>
         </p:txBody>
       </p:sp>
       <p:sp>
         <p:nvSpPr>
-          <p:cNvPr id="12" name="Text 10"/>
+          <p:cNvPr id="13" name="Text 10"/>
           <p:cNvSpPr txBox="1"/>
           <p:nvPr/>
         </p:nvSpPr>
         <p:spPr>
           <a:xfrm>
-            <a:off x="3828723" y="3176626"/>
-            <a:ext cx="1297142" cy="695858"/>
+            <a:off x="4174236" y="2693822"/>
+            <a:ext cx="1469898" cy="424282"/>
           </a:xfrm>
           <a:prstGeom prst="rect">
             <a:avLst/>
@@ -43520,31 +43568,31 @@
               <a:buNone/>
             </a:pPr>
             <a:r>
-              <a:rPr lang="en-US" sz="1700" dirty="0">
+              <a:rPr lang="en-US" sz="1200" dirty="0">
                 <a:solidFill>
                   <a:srgbClr val="5C5F6B"/>
                 </a:solidFill>
               </a:rPr>
               <a:t>3:00</a:t>
             </a:r>
-            <a:endParaRPr lang="en-US" sz="1700" dirty="0"/>
+            <a:endParaRPr lang="en-US" sz="1200" dirty="0"/>
           </a:p>
         </p:txBody>
       </p:sp>
       <p:sp>
         <p:nvSpPr>
-          <p:cNvPr id="13" name="tile_3"/>
+          <p:cNvPr id="14" name="tile_3"/>
           <p:cNvSpPr/>
           <p:nvPr/>
         </p:nvSpPr>
         <p:spPr>
           <a:xfrm>
-            <a:off x="5400185" y="1874520"/>
-            <a:ext cx="1388582" cy="2034540"/>
+            <a:off x="5918454" y="1874520"/>
+            <a:ext cx="1561338" cy="1280160"/>
           </a:xfrm>
           <a:prstGeom prst="roundRect">
             <a:avLst>
-              <a:gd name="adj" fmla="val 9878"/>
+              <a:gd name="adj" fmla="val 10714"/>
             </a:avLst>
           </a:prstGeom>
           <a:solidFill>
@@ -43560,14 +43608,14 @@
       </p:sp>
       <p:sp>
         <p:nvSpPr>
-          <p:cNvPr id="14" name="Text 12"/>
+          <p:cNvPr id="15" name="Text 12"/>
           <p:cNvSpPr txBox="1"/>
           <p:nvPr/>
         </p:nvSpPr>
         <p:spPr>
           <a:xfrm>
-            <a:off x="5400185" y="1947672"/>
-            <a:ext cx="1388582" cy="1261415"/>
+            <a:off x="5918454" y="1947672"/>
+            <a:ext cx="1561338" cy="793699"/>
           </a:xfrm>
           <a:prstGeom prst="rect">
             <a:avLst/>
@@ -43585,7 +43633,7 @@
               <a:buNone/>
             </a:pPr>
             <a:r>
-              <a:rPr lang="ko-KR" altLang="en-US" sz="3900" b="1" dirty="0">
+              <a:rPr lang="ko-KR" altLang="en-US" sz="3100" b="1" dirty="0">
                 <a:solidFill>
                   <a:srgbClr val="4236F6"/>
                 </a:solidFill>
@@ -43593,22 +43641,22 @@
                 <a:ea typeface="Malgun Gothic" pitchFamily="34" charset="-122"/>
                 <a:cs typeface="Malgun Gothic" pitchFamily="34" charset="-120"/>
               </a:rPr>
-              <a:t>네 시</a:t>
-            </a:r>
-            <a:endParaRPr lang="en-US" sz="3900" dirty="0"/>
+              <a:t>네 시</a:t>
+            </a:r>
+            <a:endParaRPr lang="en-US" sz="3100" dirty="0"/>
           </a:p>
         </p:txBody>
       </p:sp>
       <p:sp>
         <p:nvSpPr>
-          <p:cNvPr id="15" name="Text 13"/>
+          <p:cNvPr id="16" name="Text 13"/>
           <p:cNvSpPr txBox="1"/>
           <p:nvPr/>
         </p:nvSpPr>
         <p:spPr>
           <a:xfrm>
-            <a:off x="5445905" y="3176626"/>
-            <a:ext cx="1297142" cy="695858"/>
+            <a:off x="5964174" y="2693822"/>
+            <a:ext cx="1469898" cy="424282"/>
           </a:xfrm>
           <a:prstGeom prst="rect">
             <a:avLst/>
@@ -43626,31 +43674,31 @@
               <a:buNone/>
             </a:pPr>
             <a:r>
-              <a:rPr lang="en-US" sz="1700" dirty="0">
+              <a:rPr lang="en-US" sz="1200" dirty="0">
                 <a:solidFill>
                   <a:srgbClr val="5C5F6B"/>
                 </a:solidFill>
               </a:rPr>
               <a:t>4:00</a:t>
             </a:r>
-            <a:endParaRPr lang="en-US" sz="1700" dirty="0"/>
+            <a:endParaRPr lang="en-US" sz="1200" dirty="0"/>
           </a:p>
         </p:txBody>
       </p:sp>
       <p:sp>
         <p:nvSpPr>
-          <p:cNvPr id="16" name="tile_4"/>
+          <p:cNvPr id="17" name="tile_4"/>
           <p:cNvSpPr/>
           <p:nvPr/>
         </p:nvSpPr>
         <p:spPr>
           <a:xfrm>
-            <a:off x="7017367" y="1874520"/>
-            <a:ext cx="1388582" cy="2034540"/>
+            <a:off x="548640" y="3383280"/>
+            <a:ext cx="1561338" cy="1280160"/>
           </a:xfrm>
           <a:prstGeom prst="roundRect">
             <a:avLst>
-              <a:gd name="adj" fmla="val 9878"/>
+              <a:gd name="adj" fmla="val 10714"/>
             </a:avLst>
           </a:prstGeom>
           <a:solidFill>
@@ -43666,14 +43714,14 @@
       </p:sp>
       <p:sp>
         <p:nvSpPr>
-          <p:cNvPr id="17" name="Text 15"/>
+          <p:cNvPr id="18" name="Text 15"/>
           <p:cNvSpPr txBox="1"/>
           <p:nvPr/>
         </p:nvSpPr>
         <p:spPr>
           <a:xfrm>
-            <a:off x="7017367" y="1947672"/>
-            <a:ext cx="1388582" cy="1261415"/>
+            <a:off x="548640" y="3456432"/>
+            <a:ext cx="1561338" cy="793699"/>
           </a:xfrm>
           <a:prstGeom prst="rect">
             <a:avLst/>
@@ -43691,7 +43739,7 @@
               <a:buNone/>
             </a:pPr>
             <a:r>
-              <a:rPr lang="ko-KR" altLang="en-US" sz="3800" b="1" dirty="0">
+              <a:rPr lang="ko-KR" altLang="en-US" sz="3100" b="1" dirty="0">
                 <a:solidFill>
                   <a:srgbClr val="4236F6"/>
                 </a:solidFill>
@@ -43699,39 +43747,22 @@
                 <a:ea typeface="Malgun Gothic" pitchFamily="34" charset="-122"/>
                 <a:cs typeface="Malgun Gothic" pitchFamily="34" charset="-120"/>
               </a:rPr>
-              <a:t>다섯</a:t>
-            </a:r>
-            <a:endParaRPr lang="en-US" sz="3800" dirty="0"/>
-          </a:p>
-          <a:p>
-            <a:pPr marL="0" indent="0" algn="ctr" eaLnBrk="1">
-              <a:buNone/>
-            </a:pPr>
-            <a:r>
-              <a:rPr lang="ko-KR" altLang="en-US" sz="3800" b="1" dirty="0">
-                <a:solidFill>
-                  <a:srgbClr val="4236F6"/>
-                </a:solidFill>
-                <a:latin typeface="Malgun Gothic" pitchFamily="34" charset="0"/>
-                <a:ea typeface="Malgun Gothic" pitchFamily="34" charset="-122"/>
-                <a:cs typeface="Malgun Gothic" pitchFamily="34" charset="-120"/>
-              </a:rPr>
-              <a:t>시</a:t>
-            </a:r>
-            <a:endParaRPr lang="en-US" sz="3800" dirty="0"/>
+              <a:t>다섯 시</a:t>
+            </a:r>
+            <a:endParaRPr lang="en-US" sz="3100" dirty="0"/>
           </a:p>
         </p:txBody>
       </p:sp>
       <p:sp>
         <p:nvSpPr>
-          <p:cNvPr id="18" name="Text 16"/>
+          <p:cNvPr id="19" name="Text 16"/>
           <p:cNvSpPr txBox="1"/>
           <p:nvPr/>
         </p:nvSpPr>
         <p:spPr>
           <a:xfrm>
-            <a:off x="7063087" y="3176626"/>
-            <a:ext cx="1297142" cy="695858"/>
+            <a:off x="594360" y="4202582"/>
+            <a:ext cx="1469898" cy="424282"/>
           </a:xfrm>
           <a:prstGeom prst="rect">
             <a:avLst/>
@@ -43749,31 +43780,31 @@
               <a:buNone/>
             </a:pPr>
             <a:r>
-              <a:rPr lang="en-US" sz="1700" dirty="0">
+              <a:rPr lang="en-US" sz="1200" dirty="0">
                 <a:solidFill>
                   <a:srgbClr val="5C5F6B"/>
                 </a:solidFill>
               </a:rPr>
               <a:t>5:00</a:t>
             </a:r>
-            <a:endParaRPr lang="en-US" sz="1700" dirty="0"/>
+            <a:endParaRPr lang="en-US" sz="1200" dirty="0"/>
           </a:p>
         </p:txBody>
       </p:sp>
       <p:sp>
         <p:nvSpPr>
-          <p:cNvPr id="19" name="tile_5"/>
+          <p:cNvPr id="20" name="tile_5"/>
           <p:cNvSpPr/>
           <p:nvPr/>
         </p:nvSpPr>
         <p:spPr>
           <a:xfrm>
-            <a:off x="8634549" y="1874520"/>
-            <a:ext cx="1388582" cy="2034540"/>
+            <a:off x="2338578" y="3383280"/>
+            <a:ext cx="1561338" cy="1280160"/>
           </a:xfrm>
           <a:prstGeom prst="roundRect">
             <a:avLst>
-              <a:gd name="adj" fmla="val 9878"/>
+              <a:gd name="adj" fmla="val 10714"/>
             </a:avLst>
           </a:prstGeom>
           <a:solidFill>
@@ -43789,14 +43820,14 @@
       </p:sp>
       <p:sp>
         <p:nvSpPr>
-          <p:cNvPr id="20" name="Text 18"/>
+          <p:cNvPr id="21" name="Text 18"/>
           <p:cNvSpPr txBox="1"/>
           <p:nvPr/>
         </p:nvSpPr>
         <p:spPr>
           <a:xfrm>
-            <a:off x="8634549" y="1947672"/>
-            <a:ext cx="1388582" cy="1261415"/>
+            <a:off x="2338578" y="3456432"/>
+            <a:ext cx="1561338" cy="793699"/>
           </a:xfrm>
           <a:prstGeom prst="rect">
             <a:avLst/>
@@ -43814,7 +43845,7 @@
               <a:buNone/>
             </a:pPr>
             <a:r>
-              <a:rPr lang="ko-KR" altLang="en-US" sz="3800" b="1" dirty="0">
+              <a:rPr lang="ko-KR" altLang="en-US" sz="3100" b="1" dirty="0">
                 <a:solidFill>
                   <a:srgbClr val="4236F6"/>
                 </a:solidFill>
@@ -43822,39 +43853,22 @@
                 <a:ea typeface="Malgun Gothic" pitchFamily="34" charset="-122"/>
                 <a:cs typeface="Malgun Gothic" pitchFamily="34" charset="-120"/>
               </a:rPr>
-              <a:t>여섯</a:t>
-            </a:r>
-            <a:endParaRPr lang="en-US" sz="3800" dirty="0"/>
-          </a:p>
-          <a:p>
-            <a:pPr marL="0" indent="0" algn="ctr" eaLnBrk="1">
-              <a:buNone/>
-            </a:pPr>
-            <a:r>
-              <a:rPr lang="ko-KR" altLang="en-US" sz="3800" b="1" dirty="0">
-                <a:solidFill>
-                  <a:srgbClr val="4236F6"/>
-                </a:solidFill>
-                <a:latin typeface="Malgun Gothic" pitchFamily="34" charset="0"/>
-                <a:ea typeface="Malgun Gothic" pitchFamily="34" charset="-122"/>
-                <a:cs typeface="Malgun Gothic" pitchFamily="34" charset="-120"/>
-              </a:rPr>
-              <a:t>시</a:t>
-            </a:r>
-            <a:endParaRPr lang="en-US" sz="3800" dirty="0"/>
+              <a:t>여섯 시</a:t>
+            </a:r>
+            <a:endParaRPr lang="en-US" sz="3100" dirty="0"/>
           </a:p>
         </p:txBody>
       </p:sp>
       <p:sp>
         <p:nvSpPr>
-          <p:cNvPr id="21" name="Text 19"/>
+          <p:cNvPr id="22" name="Text 19"/>
           <p:cNvSpPr txBox="1"/>
           <p:nvPr/>
         </p:nvSpPr>
         <p:spPr>
           <a:xfrm>
-            <a:off x="8680269" y="3176626"/>
-            <a:ext cx="1297142" cy="695858"/>
+            <a:off x="2384298" y="4202582"/>
+            <a:ext cx="1469898" cy="424282"/>
           </a:xfrm>
           <a:prstGeom prst="rect">
             <a:avLst/>
@@ -43872,31 +43886,31 @@
               <a:buNone/>
             </a:pPr>
             <a:r>
-              <a:rPr lang="en-US" sz="1700" dirty="0">
+              <a:rPr lang="en-US" sz="1200" dirty="0">
                 <a:solidFill>
                   <a:srgbClr val="5C5F6B"/>
                 </a:solidFill>
               </a:rPr>
               <a:t>6:00</a:t>
             </a:r>
-            <a:endParaRPr lang="en-US" sz="1700" dirty="0"/>
+            <a:endParaRPr lang="en-US" sz="1200" dirty="0"/>
           </a:p>
         </p:txBody>
       </p:sp>
       <p:sp>
         <p:nvSpPr>
-          <p:cNvPr id="22" name="tile_6"/>
+          <p:cNvPr id="23" name="tile_6"/>
           <p:cNvSpPr/>
           <p:nvPr/>
         </p:nvSpPr>
         <p:spPr>
           <a:xfrm>
-            <a:off x="10251730" y="1874520"/>
-            <a:ext cx="1388582" cy="2034540"/>
+            <a:off x="4128516" y="3383280"/>
+            <a:ext cx="1561338" cy="1280160"/>
           </a:xfrm>
           <a:prstGeom prst="roundRect">
             <a:avLst>
-              <a:gd name="adj" fmla="val 9878"/>
+              <a:gd name="adj" fmla="val 10714"/>
             </a:avLst>
           </a:prstGeom>
           <a:solidFill>
@@ -43912,14 +43926,14 @@
       </p:sp>
       <p:sp>
         <p:nvSpPr>
-          <p:cNvPr id="23" name="Text 21"/>
+          <p:cNvPr id="24" name="Text 21"/>
           <p:cNvSpPr txBox="1"/>
           <p:nvPr/>
         </p:nvSpPr>
         <p:spPr>
           <a:xfrm>
-            <a:off x="10251730" y="1947672"/>
-            <a:ext cx="1388582" cy="1261415"/>
+            <a:off x="4128516" y="3456432"/>
+            <a:ext cx="1561338" cy="793699"/>
           </a:xfrm>
           <a:prstGeom prst="rect">
             <a:avLst/>
@@ -43937,7 +43951,7 @@
               <a:buNone/>
             </a:pPr>
             <a:r>
-              <a:rPr lang="ko-KR" altLang="en-US" sz="3800" b="1" dirty="0">
+              <a:rPr lang="ko-KR" altLang="en-US" sz="3100" b="1" dirty="0">
                 <a:solidFill>
                   <a:srgbClr val="4236F6"/>
                 </a:solidFill>
@@ -43945,39 +43959,22 @@
                 <a:ea typeface="Malgun Gothic" pitchFamily="34" charset="-122"/>
                 <a:cs typeface="Malgun Gothic" pitchFamily="34" charset="-120"/>
               </a:rPr>
-              <a:t>일곱</a:t>
-            </a:r>
-            <a:endParaRPr lang="en-US" sz="3800" dirty="0"/>
-          </a:p>
-          <a:p>
-            <a:pPr marL="0" indent="0" algn="ctr" eaLnBrk="1">
-              <a:buNone/>
-            </a:pPr>
-            <a:r>
-              <a:rPr lang="ko-KR" altLang="en-US" sz="3800" b="1" dirty="0">
-                <a:solidFill>
-                  <a:srgbClr val="4236F6"/>
-                </a:solidFill>
-                <a:latin typeface="Malgun Gothic" pitchFamily="34" charset="0"/>
-                <a:ea typeface="Malgun Gothic" pitchFamily="34" charset="-122"/>
-                <a:cs typeface="Malgun Gothic" pitchFamily="34" charset="-120"/>
-              </a:rPr>
-              <a:t>시</a:t>
-            </a:r>
-            <a:endParaRPr lang="en-US" sz="3800" dirty="0"/>
+              <a:t>일곱 시</a:t>
+            </a:r>
+            <a:endParaRPr lang="en-US" sz="3100" dirty="0"/>
           </a:p>
         </p:txBody>
       </p:sp>
       <p:sp>
         <p:nvSpPr>
-          <p:cNvPr id="24" name="Text 22"/>
+          <p:cNvPr id="25" name="Text 22"/>
           <p:cNvSpPr txBox="1"/>
           <p:nvPr/>
         </p:nvSpPr>
         <p:spPr>
           <a:xfrm>
-            <a:off x="10297450" y="3176626"/>
-            <a:ext cx="1297142" cy="695858"/>
+            <a:off x="4174236" y="4202582"/>
+            <a:ext cx="1469898" cy="424282"/>
           </a:xfrm>
           <a:prstGeom prst="rect">
             <a:avLst/>
@@ -43995,31 +43992,31 @@
               <a:buNone/>
             </a:pPr>
             <a:r>
-              <a:rPr lang="en-US" sz="1700" dirty="0">
+              <a:rPr lang="en-US" sz="1200" dirty="0">
                 <a:solidFill>
                   <a:srgbClr val="5C5F6B"/>
                 </a:solidFill>
               </a:rPr>
               <a:t>7:00</a:t>
             </a:r>
-            <a:endParaRPr lang="en-US" sz="1700" dirty="0"/>
+            <a:endParaRPr lang="en-US" sz="1200" dirty="0"/>
           </a:p>
         </p:txBody>
       </p:sp>
       <p:sp>
         <p:nvSpPr>
-          <p:cNvPr id="25" name="tile_7"/>
+          <p:cNvPr id="26" name="tile_7"/>
           <p:cNvSpPr/>
           <p:nvPr/>
         </p:nvSpPr>
         <p:spPr>
           <a:xfrm>
-            <a:off x="548640" y="4137660"/>
-            <a:ext cx="1388582" cy="2034540"/>
+            <a:off x="5918454" y="3383280"/>
+            <a:ext cx="1561338" cy="1280160"/>
           </a:xfrm>
           <a:prstGeom prst="roundRect">
             <a:avLst>
-              <a:gd name="adj" fmla="val 9878"/>
+              <a:gd name="adj" fmla="val 10714"/>
             </a:avLst>
           </a:prstGeom>
           <a:solidFill>
@@ -44035,14 +44032,14 @@
       </p:sp>
       <p:sp>
         <p:nvSpPr>
-          <p:cNvPr id="26" name="Text 24"/>
+          <p:cNvPr id="27" name="Text 24"/>
           <p:cNvSpPr txBox="1"/>
           <p:nvPr/>
         </p:nvSpPr>
         <p:spPr>
           <a:xfrm>
-            <a:off x="548640" y="4210812"/>
-            <a:ext cx="1388582" cy="1261415"/>
+            <a:off x="5918454" y="3456432"/>
+            <a:ext cx="1561338" cy="793699"/>
           </a:xfrm>
           <a:prstGeom prst="rect">
             <a:avLst/>
@@ -44060,7 +44057,7 @@
               <a:buNone/>
             </a:pPr>
             <a:r>
-              <a:rPr lang="ko-KR" altLang="en-US" sz="3800" b="1" dirty="0">
+              <a:rPr lang="ko-KR" altLang="en-US" sz="3100" b="1" dirty="0">
                 <a:solidFill>
                   <a:srgbClr val="4236F6"/>
                 </a:solidFill>
@@ -44068,39 +44065,22 @@
                 <a:ea typeface="Malgun Gothic" pitchFamily="34" charset="-122"/>
                 <a:cs typeface="Malgun Gothic" pitchFamily="34" charset="-120"/>
               </a:rPr>
-              <a:t>여덟</a:t>
-            </a:r>
-            <a:endParaRPr lang="en-US" sz="3800" dirty="0"/>
-          </a:p>
-          <a:p>
-            <a:pPr marL="0" indent="0" algn="ctr" eaLnBrk="1">
-              <a:buNone/>
-            </a:pPr>
-            <a:r>
-              <a:rPr lang="ko-KR" altLang="en-US" sz="3800" b="1" dirty="0">
-                <a:solidFill>
-                  <a:srgbClr val="4236F6"/>
-                </a:solidFill>
-                <a:latin typeface="Malgun Gothic" pitchFamily="34" charset="0"/>
-                <a:ea typeface="Malgun Gothic" pitchFamily="34" charset="-122"/>
-                <a:cs typeface="Malgun Gothic" pitchFamily="34" charset="-120"/>
-              </a:rPr>
-              <a:t>시</a:t>
-            </a:r>
-            <a:endParaRPr lang="en-US" sz="3800" dirty="0"/>
+              <a:t>여덟 시</a:t>
+            </a:r>
+            <a:endParaRPr lang="en-US" sz="3100" dirty="0"/>
           </a:p>
         </p:txBody>
       </p:sp>
       <p:sp>
         <p:nvSpPr>
-          <p:cNvPr id="27" name="Text 25"/>
+          <p:cNvPr id="28" name="Text 25"/>
           <p:cNvSpPr txBox="1"/>
           <p:nvPr/>
         </p:nvSpPr>
         <p:spPr>
           <a:xfrm>
-            <a:off x="594360" y="5439766"/>
-            <a:ext cx="1297142" cy="695858"/>
+            <a:off x="5964174" y="4202582"/>
+            <a:ext cx="1469898" cy="424282"/>
           </a:xfrm>
           <a:prstGeom prst="rect">
             <a:avLst/>
@@ -44118,31 +44098,31 @@
               <a:buNone/>
             </a:pPr>
             <a:r>
-              <a:rPr lang="en-US" sz="1700" dirty="0">
+              <a:rPr lang="en-US" sz="1200" dirty="0">
                 <a:solidFill>
                   <a:srgbClr val="5C5F6B"/>
                 </a:solidFill>
               </a:rPr>
               <a:t>8:00</a:t>
             </a:r>
-            <a:endParaRPr lang="en-US" sz="1700" dirty="0"/>
+            <a:endParaRPr lang="en-US" sz="1200" dirty="0"/>
           </a:p>
         </p:txBody>
       </p:sp>
       <p:sp>
         <p:nvSpPr>
-          <p:cNvPr id="28" name="tile_8"/>
+          <p:cNvPr id="29" name="tile_8"/>
           <p:cNvSpPr/>
           <p:nvPr/>
         </p:nvSpPr>
         <p:spPr>
           <a:xfrm>
-            <a:off x="2165822" y="4137660"/>
-            <a:ext cx="1388582" cy="2034540"/>
+            <a:off x="548640" y="4892040"/>
+            <a:ext cx="1561338" cy="1280160"/>
           </a:xfrm>
           <a:prstGeom prst="roundRect">
             <a:avLst>
-              <a:gd name="adj" fmla="val 9878"/>
+              <a:gd name="adj" fmla="val 10714"/>
             </a:avLst>
           </a:prstGeom>
           <a:solidFill>
@@ -44158,14 +44138,14 @@
       </p:sp>
       <p:sp>
         <p:nvSpPr>
-          <p:cNvPr id="29" name="Text 27"/>
+          <p:cNvPr id="30" name="Text 27"/>
           <p:cNvSpPr txBox="1"/>
           <p:nvPr/>
         </p:nvSpPr>
         <p:spPr>
           <a:xfrm>
-            <a:off x="2165822" y="4210812"/>
-            <a:ext cx="1388582" cy="1261415"/>
+            <a:off x="548640" y="4965192"/>
+            <a:ext cx="1561338" cy="793699"/>
           </a:xfrm>
           <a:prstGeom prst="rect">
             <a:avLst/>
@@ -44183,7 +44163,7 @@
               <a:buNone/>
             </a:pPr>
             <a:r>
-              <a:rPr lang="ko-KR" altLang="en-US" sz="3800" b="1" dirty="0">
+              <a:rPr lang="ko-KR" altLang="en-US" sz="3100" b="1" dirty="0">
                 <a:solidFill>
                   <a:srgbClr val="4236F6"/>
                 </a:solidFill>
@@ -44191,39 +44171,22 @@
                 <a:ea typeface="Malgun Gothic" pitchFamily="34" charset="-122"/>
                 <a:cs typeface="Malgun Gothic" pitchFamily="34" charset="-120"/>
               </a:rPr>
-              <a:t>아홉</a:t>
-            </a:r>
-            <a:endParaRPr lang="en-US" sz="3800" dirty="0"/>
-          </a:p>
-          <a:p>
-            <a:pPr marL="0" indent="0" algn="ctr" eaLnBrk="1">
-              <a:buNone/>
-            </a:pPr>
-            <a:r>
-              <a:rPr lang="ko-KR" altLang="en-US" sz="3800" b="1" dirty="0">
-                <a:solidFill>
-                  <a:srgbClr val="4236F6"/>
-                </a:solidFill>
-                <a:latin typeface="Malgun Gothic" pitchFamily="34" charset="0"/>
-                <a:ea typeface="Malgun Gothic" pitchFamily="34" charset="-122"/>
-                <a:cs typeface="Malgun Gothic" pitchFamily="34" charset="-120"/>
-              </a:rPr>
-              <a:t>시</a:t>
-            </a:r>
-            <a:endParaRPr lang="en-US" sz="3800" dirty="0"/>
+              <a:t>아홉 시</a:t>
+            </a:r>
+            <a:endParaRPr lang="en-US" sz="3100" dirty="0"/>
           </a:p>
         </p:txBody>
       </p:sp>
       <p:sp>
         <p:nvSpPr>
-          <p:cNvPr id="30" name="Text 28"/>
+          <p:cNvPr id="31" name="Text 28"/>
           <p:cNvSpPr txBox="1"/>
           <p:nvPr/>
         </p:nvSpPr>
         <p:spPr>
           <a:xfrm>
-            <a:off x="2211542" y="5439766"/>
-            <a:ext cx="1297142" cy="695858"/>
+            <a:off x="594360" y="5711342"/>
+            <a:ext cx="1469898" cy="424282"/>
           </a:xfrm>
           <a:prstGeom prst="rect">
             <a:avLst/>
@@ -44241,31 +44204,31 @@
               <a:buNone/>
             </a:pPr>
             <a:r>
-              <a:rPr lang="en-US" sz="1700" dirty="0">
+              <a:rPr lang="en-US" sz="1200" dirty="0">
                 <a:solidFill>
                   <a:srgbClr val="5C5F6B"/>
                 </a:solidFill>
               </a:rPr>
               <a:t>9:00</a:t>
             </a:r>
-            <a:endParaRPr lang="en-US" sz="1700" dirty="0"/>
+            <a:endParaRPr lang="en-US" sz="1200" dirty="0"/>
           </a:p>
         </p:txBody>
       </p:sp>
       <p:sp>
         <p:nvSpPr>
-          <p:cNvPr id="31" name="tile_9"/>
+          <p:cNvPr id="32" name="tile_9"/>
           <p:cNvSpPr/>
           <p:nvPr/>
         </p:nvSpPr>
         <p:spPr>
           <a:xfrm>
-            <a:off x="3783003" y="4137660"/>
-            <a:ext cx="1388582" cy="2034540"/>
+            <a:off x="2338578" y="4892040"/>
+            <a:ext cx="1561338" cy="1280160"/>
           </a:xfrm>
           <a:prstGeom prst="roundRect">
             <a:avLst>
-              <a:gd name="adj" fmla="val 9878"/>
+              <a:gd name="adj" fmla="val 10714"/>
             </a:avLst>
           </a:prstGeom>
           <a:solidFill>
@@ -44281,14 +44244,14 @@
       </p:sp>
       <p:sp>
         <p:nvSpPr>
-          <p:cNvPr id="32" name="Text 30"/>
+          <p:cNvPr id="33" name="Text 30"/>
           <p:cNvSpPr txBox="1"/>
           <p:nvPr/>
         </p:nvSpPr>
         <p:spPr>
           <a:xfrm>
-            <a:off x="3783003" y="4210812"/>
-            <a:ext cx="1388582" cy="1261415"/>
+            <a:off x="2338578" y="4965192"/>
+            <a:ext cx="1561338" cy="793699"/>
           </a:xfrm>
           <a:prstGeom prst="rect">
             <a:avLst/>
@@ -44306,7 +44269,7 @@
               <a:buNone/>
             </a:pPr>
             <a:r>
-              <a:rPr lang="ko-KR" altLang="en-US" sz="3900" b="1" dirty="0">
+              <a:rPr lang="ko-KR" altLang="en-US" sz="3100" b="1" dirty="0">
                 <a:solidFill>
                   <a:srgbClr val="4236F6"/>
                 </a:solidFill>
@@ -44314,22 +44277,22 @@
                 <a:ea typeface="Malgun Gothic" pitchFamily="34" charset="-122"/>
                 <a:cs typeface="Malgun Gothic" pitchFamily="34" charset="-120"/>
               </a:rPr>
-              <a:t>열 시</a:t>
-            </a:r>
-            <a:endParaRPr lang="en-US" sz="3900" dirty="0"/>
+              <a:t>열 시</a:t>
+            </a:r>
+            <a:endParaRPr lang="en-US" sz="3100" dirty="0"/>
           </a:p>
         </p:txBody>
       </p:sp>
       <p:sp>
         <p:nvSpPr>
-          <p:cNvPr id="33" name="Text 31"/>
+          <p:cNvPr id="34" name="Text 31"/>
           <p:cNvSpPr txBox="1"/>
           <p:nvPr/>
         </p:nvSpPr>
         <p:spPr>
           <a:xfrm>
-            <a:off x="3828723" y="5439766"/>
-            <a:ext cx="1297142" cy="695858"/>
+            <a:off x="2384298" y="5711342"/>
+            <a:ext cx="1469898" cy="424282"/>
           </a:xfrm>
           <a:prstGeom prst="rect">
             <a:avLst/>
@@ -44347,31 +44310,31 @@
               <a:buNone/>
             </a:pPr>
             <a:r>
-              <a:rPr lang="en-US" sz="1700" dirty="0">
+              <a:rPr lang="en-US" sz="1200" dirty="0">
                 <a:solidFill>
                   <a:srgbClr val="5C5F6B"/>
                 </a:solidFill>
               </a:rPr>
               <a:t>10:00</a:t>
             </a:r>
-            <a:endParaRPr lang="en-US" sz="1700" dirty="0"/>
+            <a:endParaRPr lang="en-US" sz="1200" dirty="0"/>
           </a:p>
         </p:txBody>
       </p:sp>
       <p:sp>
         <p:nvSpPr>
-          <p:cNvPr id="34" name="tile_10"/>
+          <p:cNvPr id="35" name="tile_10"/>
           <p:cNvSpPr/>
           <p:nvPr/>
         </p:nvSpPr>
         <p:spPr>
           <a:xfrm>
-            <a:off x="5400185" y="4137660"/>
-            <a:ext cx="1388582" cy="2034540"/>
+            <a:off x="4128516" y="4892040"/>
+            <a:ext cx="1561338" cy="1280160"/>
           </a:xfrm>
           <a:prstGeom prst="roundRect">
             <a:avLst>
-              <a:gd name="adj" fmla="val 9878"/>
+              <a:gd name="adj" fmla="val 10714"/>
             </a:avLst>
           </a:prstGeom>
           <a:solidFill>
@@ -44387,14 +44350,14 @@
       </p:sp>
       <p:sp>
         <p:nvSpPr>
-          <p:cNvPr id="35" name="Text 33"/>
+          <p:cNvPr id="36" name="Text 33"/>
           <p:cNvSpPr txBox="1"/>
           <p:nvPr/>
         </p:nvSpPr>
         <p:spPr>
           <a:xfrm>
-            <a:off x="5400185" y="4210812"/>
-            <a:ext cx="1388582" cy="1261415"/>
+            <a:off x="4128516" y="4965192"/>
+            <a:ext cx="1561338" cy="793699"/>
           </a:xfrm>
           <a:prstGeom prst="rect">
             <a:avLst/>
@@ -44412,7 +44375,7 @@
               <a:buNone/>
             </a:pPr>
             <a:r>
-              <a:rPr lang="ko-KR" altLang="en-US" sz="3800" b="1" dirty="0">
+              <a:rPr lang="ko-KR" altLang="en-US" sz="3100" b="1" dirty="0">
                 <a:solidFill>
                   <a:srgbClr val="4236F6"/>
                 </a:solidFill>
@@ -44420,39 +44383,22 @@
                 <a:ea typeface="Malgun Gothic" pitchFamily="34" charset="-122"/>
                 <a:cs typeface="Malgun Gothic" pitchFamily="34" charset="-120"/>
               </a:rPr>
-              <a:t>열한</a:t>
-            </a:r>
-            <a:endParaRPr lang="en-US" sz="3800" dirty="0"/>
-          </a:p>
-          <a:p>
-            <a:pPr marL="0" indent="0" algn="ctr" eaLnBrk="1">
-              <a:buNone/>
-            </a:pPr>
-            <a:r>
-              <a:rPr lang="ko-KR" altLang="en-US" sz="3800" b="1" dirty="0">
-                <a:solidFill>
-                  <a:srgbClr val="4236F6"/>
-                </a:solidFill>
-                <a:latin typeface="Malgun Gothic" pitchFamily="34" charset="0"/>
-                <a:ea typeface="Malgun Gothic" pitchFamily="34" charset="-122"/>
-                <a:cs typeface="Malgun Gothic" pitchFamily="34" charset="-120"/>
-              </a:rPr>
-              <a:t>시</a:t>
-            </a:r>
-            <a:endParaRPr lang="en-US" sz="3800" dirty="0"/>
+              <a:t>열한 시</a:t>
+            </a:r>
+            <a:endParaRPr lang="en-US" sz="3100" dirty="0"/>
           </a:p>
         </p:txBody>
       </p:sp>
       <p:sp>
         <p:nvSpPr>
-          <p:cNvPr id="36" name="Text 34"/>
+          <p:cNvPr id="37" name="Text 34"/>
           <p:cNvSpPr txBox="1"/>
           <p:nvPr/>
         </p:nvSpPr>
         <p:spPr>
           <a:xfrm>
-            <a:off x="5445905" y="5439766"/>
-            <a:ext cx="1297142" cy="695858"/>
+            <a:off x="4174236" y="5711342"/>
+            <a:ext cx="1469898" cy="424282"/>
           </a:xfrm>
           <a:prstGeom prst="rect">
             <a:avLst/>
@@ -44470,31 +44416,31 @@
               <a:buNone/>
             </a:pPr>
             <a:r>
-              <a:rPr lang="en-US" sz="1700" dirty="0">
+              <a:rPr lang="en-US" sz="1200" dirty="0">
                 <a:solidFill>
                   <a:srgbClr val="5C5F6B"/>
                 </a:solidFill>
               </a:rPr>
               <a:t>11:00</a:t>
             </a:r>
-            <a:endParaRPr lang="en-US" sz="1700" dirty="0"/>
+            <a:endParaRPr lang="en-US" sz="1200" dirty="0"/>
           </a:p>
         </p:txBody>
       </p:sp>
       <p:sp>
         <p:nvSpPr>
-          <p:cNvPr id="37" name="tile_11"/>
+          <p:cNvPr id="38" name="tile_11"/>
           <p:cNvSpPr/>
           <p:nvPr/>
         </p:nvSpPr>
         <p:spPr>
           <a:xfrm>
-            <a:off x="7017367" y="4137660"/>
-            <a:ext cx="1388582" cy="2034540"/>
+            <a:off x="5918454" y="4892040"/>
+            <a:ext cx="1561338" cy="1280160"/>
           </a:xfrm>
           <a:prstGeom prst="roundRect">
             <a:avLst>
-              <a:gd name="adj" fmla="val 9878"/>
+              <a:gd name="adj" fmla="val 10714"/>
             </a:avLst>
           </a:prstGeom>
           <a:solidFill>
@@ -44510,14 +44456,14 @@
       </p:sp>
       <p:sp>
         <p:nvSpPr>
-          <p:cNvPr id="38" name="Text 36"/>
+          <p:cNvPr id="39" name="Text 36"/>
           <p:cNvSpPr txBox="1"/>
           <p:nvPr/>
         </p:nvSpPr>
         <p:spPr>
           <a:xfrm>
-            <a:off x="7017367" y="4210812"/>
-            <a:ext cx="1388582" cy="1261415"/>
+            <a:off x="5918454" y="4965192"/>
+            <a:ext cx="1561338" cy="793699"/>
           </a:xfrm>
           <a:prstGeom prst="rect">
             <a:avLst/>
@@ -44535,7 +44481,7 @@
               <a:buNone/>
             </a:pPr>
             <a:r>
-              <a:rPr lang="ko-KR" altLang="en-US" sz="3800" b="1" dirty="0">
+              <a:rPr lang="ko-KR" altLang="en-US" sz="3100" b="1" dirty="0">
                 <a:solidFill>
                   <a:srgbClr val="4236F6"/>
                 </a:solidFill>
@@ -44543,39 +44489,22 @@
                 <a:ea typeface="Malgun Gothic" pitchFamily="34" charset="-122"/>
                 <a:cs typeface="Malgun Gothic" pitchFamily="34" charset="-120"/>
               </a:rPr>
-              <a:t>열두</a:t>
-            </a:r>
-            <a:endParaRPr lang="en-US" sz="3800" dirty="0"/>
-          </a:p>
-          <a:p>
-            <a:pPr marL="0" indent="0" algn="ctr" eaLnBrk="1">
-              <a:buNone/>
-            </a:pPr>
-            <a:r>
-              <a:rPr lang="ko-KR" altLang="en-US" sz="3800" b="1" dirty="0">
-                <a:solidFill>
-                  <a:srgbClr val="4236F6"/>
-                </a:solidFill>
-                <a:latin typeface="Malgun Gothic" pitchFamily="34" charset="0"/>
-                <a:ea typeface="Malgun Gothic" pitchFamily="34" charset="-122"/>
-                <a:cs typeface="Malgun Gothic" pitchFamily="34" charset="-120"/>
-              </a:rPr>
-              <a:t>시</a:t>
-            </a:r>
-            <a:endParaRPr lang="en-US" sz="3800" dirty="0"/>
+              <a:t>열두 시</a:t>
+            </a:r>
+            <a:endParaRPr lang="en-US" sz="3100" dirty="0"/>
           </a:p>
         </p:txBody>
       </p:sp>
       <p:sp>
         <p:nvSpPr>
-          <p:cNvPr id="39" name="Text 37"/>
+          <p:cNvPr id="40" name="Text 37"/>
           <p:cNvSpPr txBox="1"/>
           <p:nvPr/>
         </p:nvSpPr>
         <p:spPr>
           <a:xfrm>
-            <a:off x="7063087" y="5439766"/>
-            <a:ext cx="1297142" cy="695858"/>
+            <a:off x="5964174" y="5711342"/>
+            <a:ext cx="1469898" cy="424282"/>
           </a:xfrm>
           <a:prstGeom prst="rect">
             <a:avLst/>
@@ -44593,20 +44522,20 @@
               <a:buNone/>
             </a:pPr>
             <a:r>
-              <a:rPr lang="en-US" sz="1700" dirty="0">
+              <a:rPr lang="en-US" sz="1200" dirty="0">
                 <a:solidFill>
                   <a:srgbClr val="5C5F6B"/>
                 </a:solidFill>
               </a:rPr>
               <a:t>12:00</a:t>
             </a:r>
-            <a:endParaRPr lang="en-US" sz="1700" dirty="0"/>
+            <a:endParaRPr lang="en-US" sz="1200" dirty="0"/>
           </a:p>
         </p:txBody>
       </p:sp>
       <p:sp>
         <p:nvSpPr>
-          <p:cNvPr id="40" name="Slide Number Placeholder 0"/>
+          <p:cNvPr id="41" name="Slide Number Placeholder 0"/>
           <p:cNvSpPr>
             <a:spLocks noGrp="1"/>
           </p:cNvSpPr>

--- a/Curriculo/Fase3_Basico2/decks/Basico2_S02_Jay.pptx
+++ b/Curriculo/Fase3_Basico2/decks/Basico2_S02_Jay.pptx
@@ -141,7 +141,7 @@
   <p:extLst>
     <p:ext uri="{521415D9-36F7-43E2-AB2F-B90AF26B5E84}">
       <p14:sectionLst xmlns:p14="http://schemas.microsoft.com/office/powerpoint/2010/main">
-        <p14:section name="Semana 2" id="{1F39AF7E-1B5D-EFBF-38C0-B4D36D1F4A42}">
+        <p14:section name="Semana 2" id="{4B2F9EFF-043C-6704-135D-9F08144844ED}">
           <p14:sldIdLst>
             <p14:sldId id="256"/>
             <p14:sldId id="257"/>
@@ -214,7 +214,7 @@
     </p:spTree>
     <p:extLst>
       <p:ext uri="{BB962C8B-B14F-4D97-AF65-F5344CB8AC3E}">
-        <p14:creationId xmlns:p14="http://schemas.microsoft.com/office/powerpoint/2010/main" val="3878583602"/>
+        <p14:creationId xmlns:p14="http://schemas.microsoft.com/office/powerpoint/2010/main" val="225564795"/>
       </p:ext>
     </p:extLst>
   </p:cSld>
@@ -360,7 +360,7 @@
           <a:p>
             <a:r>
               <a:rPr lang="en-US" dirty="0"/>
-              <a:t>21:00–21:01. Inicia la grabación en la nube (Basico2_S02_2026-10-21). A 2–3 por nombre: «카밀라 씨, 안녕하세요! 요즘 어떻게 지내요?» → «잘 지내요. 선생님은요?» (si alguien te dice ___ 씨는요?, sonríe y modela 선생님은요?). Pon el chat en 'solo anfitrión' para el quiz y crea 5 salas vacías con 'elegir sala' (sin abrirlas).
+              <a:t>21:00–21:01. Inicia la grabación en la nube (Basico2_S02_2026-10-28). A 2–3 por nombre: «카밀라 씨, 안녕하세요! 요즘 어떻게 지내요?» → «잘 지내요. 선생님은요?» (si alguien te dice ___ 씨는요?, sonríe y modela 선생님은요?). Pon el chat en 'solo anfitrión' para el quiz y crea 5 salas vacías con 'elegir sala' (sin abrirlas).
 Imagen: incluida (dibujo de la casa).
 Fuente: Nueva
 Lámina 1</a:t>
@@ -719,7 +719,7 @@
           <a:p>
             <a:r>
               <a:rPr lang="en-US" dirty="0"/>
-              <a:t>21:16–21:17 (1 min). «En español decimos 'miércoles 21 de octubre de 2026'. En coreano va al revés, de lo grande a lo chico, como una dirección: año, mes, día, día de la semana. Se escribe 10월 21일 y se lee 시월 이십일 일.» Coro: «오늘은 시월 이십일 일 수요일이에요.» Explica 생일이 언제예요? y 오늘은 며칠이에요? (며칠 se escribe así, nunca 몇 일: lo van a ver mal escrito hasta en Corea). Di tu fecha («제 생일은 ___월 ___일이에요.») y lanza «여러분, 생일이 언제예요?» sin esperar respuesta: es la pregunta de la cadena.
+              <a:t>21:16–21:17 (1 min). «En español decimos 'miércoles 28 de octubre de 2026'. En coreano va al revés, de lo grande a lo chico, como una dirección: año, mes, día, día de la semana. Se escribe 10월 28일 y se lee 시월 이십팔 일.» Coro: «오늘은 시월 이십팔 일 수요일이에요.» Explica 생일이 언제예요? y 오늘은 며칠이에요? (며칠 se escribe así, nunca 몇 일: lo van a ver mal escrito hasta en Corea). Di tu fecha («제 생일은 ___월 ___일이에요.») y lanza «여러분, 생일이 언제예요?» sin esperar respuesta: es la pregunta de la cadena.
 Fuente: Sesion_05_Fechas_Numeros_v4.pptx L9 + L11, adaptadas
 Lámina 13</a:t>
             </a:r>
@@ -2234,7 +2234,7 @@
           <a:p>
             <a:r>
               <a:rPr lang="en-US" dirty="0"/>
-              <a:t>21:55–21:57. Primero (1 min), 3 alumnos (un A, un B y un C, el C al final) dicen una frase en coreano de algo que hoy pueden decir y ayer no (제 생일은 유월 십오 일이에요 · 일곱 시에 일어나요 · 오늘은 시월 이십일 일이에요). Luego (1 min) los tres errores, con la forma correcta y el grupo repitiendo: «삼 시 → 세 시: la hora es nativa» · «오늘에, 매일에 → 오늘, 매일: sin 에» · «육월 → 유월; [며시] → 몇 시 [멷씨]». Ajústalos a lo que oíste en las salas.
+              <a:t>21:55–21:57. Primero (1 min), 3 alumnos (un A, un B y un C, el C al final) dicen una frase en coreano de algo que hoy pueden decir y ayer no (제 생일은 유월 십오 일이에요 · 일곱 시에 일어나요 · 오늘은 시월 이십팔 일이에요). Luego (1 min) los tres errores, con la forma correcta y el grupo repitiendo: «삼 시 → 세 시: la hora es nativa» · «오늘에, 매일에 → 오늘, 매일: sin 에» · «육월 → 유월; [며시] → 몇 시 [멷씨]». Ajústalos a lo que oíste en las salas.
 Fuente: Nueva
 Lámina 26</a:t>
             </a:r>
@@ -3036,7 +3036,7 @@
           <a:p>
             <a:r>
               <a:rPr lang="en-US" dirty="0"/>
-              <a:t>21:05–21:06 (1 min 30). Señala cada reloj: «여러분, 지금 칠레는 밤 아홉 시예요. 한국은 아침 아홉 시예요.» «오늘은 시월 이십일 일 수요일이에요. 한국은… 시월 이십이 일 목요일이에요!» (ES) «En Corea ya es mañana: jueves, nueve de la mañana; mientras ustedes terminan el día, allá la gente llega a la oficina. Hoy van a poder decir todo esto: la hora, la fecha, tu edad, tu cumpleaños y tu teléfono.»
+              <a:t>21:05–21:06 (1 min 30). Señala cada reloj: «여러분, 지금 칠레는 밤 아홉 시예요. 한국은 아침 아홉 시예요.» «오늘은 시월 이십팔 일 수요일이에요. 한국은… 시월 이십구 일 목요일이에요!» (ES) «En Corea ya es mañana: jueves, nueve de la mañana; mientras ustedes terminan el día, allá la gente llega a la oficina. Hoy van a poder decir todo esto: la hora, la fecha, tu edad, tu cumpleaños y tu teléfono.»
 Imagen: incluida (dibujo de la casa).
 Fuente: Nueva (calendario) + A1_Nivel_1/05_Fechas_Numeros/Clase_Numeros_Fechas_Hora.pptx L3 (fotos de reloj y calendario)
 Lámina 5</a:t>
@@ -3126,7 +3126,7 @@
           <a:p>
             <a:r>
               <a:rPr lang="en-US" dirty="0"/>
-              <a:t>21:06–21:08 (1 min 30). «Fíjense en lo que acabo de decir: 아홉 시 y 이십일 일, dos números distintos. Los sino-coreanos, 일, 이, 삼, son para leer cifras: fechas, minutos, teléfonos, precios. Los nativos, 하나, 둘, 셋, son para contar: cosas, personas, años de edad… y la hora del reloj. Y la hora mezcla los dos.» Comparte el Lector (Aprender 7, 'Trucos que salvan vidas') con sonido, toca el audio de 세 시 삼십 분 y coro ×2. A los de julio: «Lo llamaron 'el gran mestizaje': hoy lo mismo, sin letras latinas en los corchetes.»
+              <a:t>21:06–21:08 (1 min 30). «Fíjense en lo que acabo de decir: 아홉 시 y 이십팔 일, dos números distintos. Los sino-coreanos, 일, 이, 삼, son para leer cifras: fechas, minutos, teléfonos, precios. Los nativos, 하나, 둘, 셋, son para contar: cosas, personas, años de edad… y la hora del reloj. Y la hora mezcla los dos.» Comparte el Lector (Aprender 7, 'Trucos que salvan vidas') con sonido, toca el audio de 세 시 삼십 분 y coro ×2. A los de julio: «Lo llamaron 'el gran mestizaje': hoy lo mismo, sin letras latinas en los corchetes.»
 Fuente: Adaptada de Clase_Numeros_Fechas_Hora.pptx L4 · clip del Lector (Aprender 7)
 Lámina 6</a:t>
             </a:r>
@@ -5752,7 +5752,7 @@
         </p:nvSpPr>
         <p:spPr>
           <a:xfrm>
-            <a:off x="548640" y="4892040"/>
+            <a:off x="1443609" y="4892040"/>
             <a:ext cx="1561338" cy="1280160"/>
           </a:xfrm>
           <a:prstGeom prst="roundRect">
@@ -5779,7 +5779,7 @@
         </p:nvSpPr>
         <p:spPr>
           <a:xfrm>
-            <a:off x="548640" y="4965192"/>
+            <a:off x="1443609" y="4965192"/>
             <a:ext cx="1561338" cy="793699"/>
           </a:xfrm>
           <a:prstGeom prst="rect">
@@ -5820,7 +5820,7 @@
         </p:nvSpPr>
         <p:spPr>
           <a:xfrm>
-            <a:off x="594360" y="5711342"/>
+            <a:off x="1489329" y="5711342"/>
             <a:ext cx="1469898" cy="424282"/>
           </a:xfrm>
           <a:prstGeom prst="rect">
@@ -5858,7 +5858,7 @@
         </p:nvSpPr>
         <p:spPr>
           <a:xfrm>
-            <a:off x="2338578" y="4892040"/>
+            <a:off x="3233547" y="4892040"/>
             <a:ext cx="1561338" cy="1280160"/>
           </a:xfrm>
           <a:prstGeom prst="roundRect">
@@ -5885,7 +5885,7 @@
         </p:nvSpPr>
         <p:spPr>
           <a:xfrm>
-            <a:off x="2338578" y="4965192"/>
+            <a:off x="3233547" y="4965192"/>
             <a:ext cx="1561338" cy="793699"/>
           </a:xfrm>
           <a:prstGeom prst="rect">
@@ -5926,7 +5926,7 @@
         </p:nvSpPr>
         <p:spPr>
           <a:xfrm>
-            <a:off x="2384298" y="5711342"/>
+            <a:off x="3279267" y="5711342"/>
             <a:ext cx="1469898" cy="424282"/>
           </a:xfrm>
           <a:prstGeom prst="rect">
@@ -5964,7 +5964,7 @@
         </p:nvSpPr>
         <p:spPr>
           <a:xfrm>
-            <a:off x="4128516" y="4892040"/>
+            <a:off x="5023485" y="4892040"/>
             <a:ext cx="1561338" cy="1280160"/>
           </a:xfrm>
           <a:prstGeom prst="roundRect">
@@ -5991,7 +5991,7 @@
         </p:nvSpPr>
         <p:spPr>
           <a:xfrm>
-            <a:off x="4128516" y="4965192"/>
+            <a:off x="5023485" y="4965192"/>
             <a:ext cx="1561338" cy="793699"/>
           </a:xfrm>
           <a:prstGeom prst="rect">
@@ -6032,7 +6032,7 @@
         </p:nvSpPr>
         <p:spPr>
           <a:xfrm>
-            <a:off x="4174236" y="5711342"/>
+            <a:off x="5069205" y="5711342"/>
             <a:ext cx="1469898" cy="424282"/>
           </a:xfrm>
           <a:prstGeom prst="rect">
@@ -8569,7 +8569,7 @@
         </p:nvSpPr>
         <p:spPr>
           <a:xfrm>
-            <a:off x="548640" y="4137660"/>
+            <a:off x="2165822" y="4137660"/>
             <a:ext cx="1388582" cy="2034540"/>
           </a:xfrm>
           <a:prstGeom prst="roundRect">
@@ -8596,7 +8596,7 @@
         </p:nvSpPr>
         <p:spPr>
           <a:xfrm>
-            <a:off x="548640" y="4210812"/>
+            <a:off x="2165822" y="4210812"/>
             <a:ext cx="1388582" cy="1261415"/>
           </a:xfrm>
           <a:prstGeom prst="rect">
@@ -8637,7 +8637,7 @@
         </p:nvSpPr>
         <p:spPr>
           <a:xfrm>
-            <a:off x="594360" y="5439766"/>
+            <a:off x="2211542" y="5439766"/>
             <a:ext cx="1297142" cy="695858"/>
           </a:xfrm>
           <a:prstGeom prst="rect">
@@ -8675,7 +8675,7 @@
         </p:nvSpPr>
         <p:spPr>
           <a:xfrm>
-            <a:off x="2165822" y="4137660"/>
+            <a:off x="3783003" y="4137660"/>
             <a:ext cx="1388582" cy="2034540"/>
           </a:xfrm>
           <a:prstGeom prst="roundRect">
@@ -8702,7 +8702,7 @@
         </p:nvSpPr>
         <p:spPr>
           <a:xfrm>
-            <a:off x="2165822" y="4210812"/>
+            <a:off x="3783003" y="4210812"/>
             <a:ext cx="1388582" cy="1261415"/>
           </a:xfrm>
           <a:prstGeom prst="rect">
@@ -8743,7 +8743,7 @@
         </p:nvSpPr>
         <p:spPr>
           <a:xfrm>
-            <a:off x="2211542" y="5439766"/>
+            <a:off x="3828723" y="5439766"/>
             <a:ext cx="1297142" cy="695858"/>
           </a:xfrm>
           <a:prstGeom prst="rect">
@@ -8781,7 +8781,7 @@
         </p:nvSpPr>
         <p:spPr>
           <a:xfrm>
-            <a:off x="3783003" y="4137660"/>
+            <a:off x="5400185" y="4137660"/>
             <a:ext cx="1388582" cy="2034540"/>
           </a:xfrm>
           <a:prstGeom prst="roundRect">
@@ -8808,7 +8808,7 @@
         </p:nvSpPr>
         <p:spPr>
           <a:xfrm>
-            <a:off x="3783003" y="4210812"/>
+            <a:off x="5400185" y="4210812"/>
             <a:ext cx="1388582" cy="1261415"/>
           </a:xfrm>
           <a:prstGeom prst="rect">
@@ -8849,7 +8849,7 @@
         </p:nvSpPr>
         <p:spPr>
           <a:xfrm>
-            <a:off x="3828723" y="5439766"/>
+            <a:off x="5445905" y="5439766"/>
             <a:ext cx="1297142" cy="695858"/>
           </a:xfrm>
           <a:prstGeom prst="rect">
@@ -8898,7 +8898,7 @@
         </p:nvSpPr>
         <p:spPr>
           <a:xfrm>
-            <a:off x="5400185" y="4137660"/>
+            <a:off x="7017367" y="4137660"/>
             <a:ext cx="1388582" cy="2034540"/>
           </a:xfrm>
           <a:prstGeom prst="roundRect">
@@ -8925,7 +8925,7 @@
         </p:nvSpPr>
         <p:spPr>
           <a:xfrm>
-            <a:off x="5400185" y="4210812"/>
+            <a:off x="7017367" y="4210812"/>
             <a:ext cx="1388582" cy="1261415"/>
           </a:xfrm>
           <a:prstGeom prst="rect">
@@ -8966,7 +8966,7 @@
         </p:nvSpPr>
         <p:spPr>
           <a:xfrm>
-            <a:off x="5445905" y="5439766"/>
+            <a:off x="7063087" y="5439766"/>
             <a:ext cx="1297142" cy="695858"/>
           </a:xfrm>
           <a:prstGeom prst="rect">
@@ -9004,7 +9004,7 @@
         </p:nvSpPr>
         <p:spPr>
           <a:xfrm>
-            <a:off x="7017367" y="4137660"/>
+            <a:off x="8634549" y="4137660"/>
             <a:ext cx="1388582" cy="2034540"/>
           </a:xfrm>
           <a:prstGeom prst="roundRect">
@@ -9031,7 +9031,7 @@
         </p:nvSpPr>
         <p:spPr>
           <a:xfrm>
-            <a:off x="7017367" y="4210812"/>
+            <a:off x="8634549" y="4210812"/>
             <a:ext cx="1388582" cy="1261415"/>
           </a:xfrm>
           <a:prstGeom prst="rect">
@@ -9072,7 +9072,7 @@
         </p:nvSpPr>
         <p:spPr>
           <a:xfrm>
-            <a:off x="7063087" y="5439766"/>
+            <a:off x="8680269" y="5439766"/>
             <a:ext cx="1297142" cy="695858"/>
           </a:xfrm>
           <a:prstGeom prst="rect">
@@ -9330,7 +9330,7 @@
                 <a:ea typeface="Malgun Gothic" pitchFamily="34" charset="-122"/>
                 <a:cs typeface="Malgun Gothic" pitchFamily="34" charset="-120"/>
               </a:rPr>
-              <a:t>miércoles 21 de octubre de 2026 = 2026년 </a:t>
+              <a:t>miércoles 28 de octubre de 2026 = 2026년 </a:t>
             </a:r>
             <a:r>
               <a:rPr lang="en-US" sz="2400" dirty="0">
@@ -9357,7 +9357,7 @@
                   <a:srgbClr val="14142B"/>
                 </a:solidFill>
               </a:rPr>
-              <a:t>21</a:t>
+              <a:t>28</a:t>
             </a:r>
             <a:r>
               <a:rPr lang="ko-KR" altLang="en-US" sz="2400" dirty="0">
@@ -9397,7 +9397,7 @@
                   <a:srgbClr val="14142B"/>
                 </a:solidFill>
               </a:rPr>
-              <a:t>21</a:t>
+              <a:t>28</a:t>
             </a:r>
             <a:r>
               <a:rPr lang="ko-KR" altLang="en-US" sz="2400" dirty="0">
@@ -9427,7 +9427,7 @@
                 <a:ea typeface="Malgun Gothic" pitchFamily="34" charset="-122"/>
                 <a:cs typeface="Malgun Gothic" pitchFamily="34" charset="-120"/>
               </a:rPr>
-              <a:t>시월 이십일 일</a:t>
+              <a:t>시월 이십팔 일</a:t>
             </a:r>
             <a:endParaRPr lang="en-US" sz="2400" dirty="0"/>
           </a:p>
@@ -9860,7 +9860,7 @@
           <p:nvPr>
             <p:extLst>
               <p:ext uri="{D42A27DB-BD31-4B8C-83A1-F6EECF244321}">
-                <p14:modId xmlns:p14="http://schemas.microsoft.com/office/powerpoint/2010/main" val="2681782397"/>
+                <p14:modId xmlns:p14="http://schemas.microsoft.com/office/powerpoint/2010/main" val="3607068006"/>
               </p:ext>
             </p:extLst>
           </p:nvPr>
@@ -13933,7 +13933,7 @@
           <p:nvPr>
             <p:extLst>
               <p:ext uri="{D42A27DB-BD31-4B8C-83A1-F6EECF244321}">
-                <p14:modId xmlns:p14="http://schemas.microsoft.com/office/powerpoint/2010/main" val="3121648736"/>
+                <p14:modId xmlns:p14="http://schemas.microsoft.com/office/powerpoint/2010/main" val="1021490626"/>
               </p:ext>
             </p:extLst>
           </p:nvPr>
@@ -15824,7 +15824,7 @@
                   <a:srgbClr val="E8B84B"/>
                 </a:solidFill>
               </a:rPr>
-              <a:t>Básico 2 (A1.2) · Números aplicados · 21 de octubre</a:t>
+              <a:t>Básico 2 (A1.2) · Números aplicados · 28 de octubre</a:t>
             </a:r>
             <a:endParaRPr lang="en-US" sz="2200" dirty="0"/>
           </a:p>
@@ -15838,7 +15838,7 @@
                   <a:srgbClr val="E8B84B"/>
                 </a:solidFill>
               </a:rPr>
-              <a:t>Miércoles 21 de octubre de 2026 · 21:00 (hora de Chile)</a:t>
+              <a:t>Miércoles 28 de octubre de 2026 · 21:00 (hora de Chile)</a:t>
             </a:r>
             <a:endParaRPr lang="en-US" sz="2200" dirty="0"/>
           </a:p>
@@ -25162,7 +25162,7 @@
           <p:nvPr>
             <p:extLst>
               <p:ext uri="{D42A27DB-BD31-4B8C-83A1-F6EECF244321}">
-                <p14:modId xmlns:p14="http://schemas.microsoft.com/office/powerpoint/2010/main" val="2294293003"/>
+                <p14:modId xmlns:p14="http://schemas.microsoft.com/office/powerpoint/2010/main" val="2480561673"/>
               </p:ext>
             </p:extLst>
           </p:nvPr>
@@ -26497,7 +26497,7 @@
           <p:nvPr>
             <p:extLst>
               <p:ext uri="{D42A27DB-BD31-4B8C-83A1-F6EECF244321}">
-                <p14:modId xmlns:p14="http://schemas.microsoft.com/office/powerpoint/2010/main" val="974591889"/>
+                <p14:modId xmlns:p14="http://schemas.microsoft.com/office/powerpoint/2010/main" val="3696312078"/>
               </p:ext>
             </p:extLst>
           </p:nvPr>
@@ -29883,7 +29883,7 @@
                   <a:srgbClr val="4236F6"/>
                 </a:solidFill>
               </a:rPr>
-              <a:t>Plazo: miércoles 28 de octubre, 21:00 (hora de Chile) · en el Lector, tapa la línea de corrección (trae letras latinas)</a:t>
+              <a:t>Plazo: miércoles 4 de noviembre, 21:00 (hora de Chile) · en el Lector, tapa la línea de corrección (trae letras latinas)</a:t>
             </a:r>
             <a:endParaRPr lang="en-US" sz="1800" dirty="0"/>
           </a:p>
@@ -29898,7 +29898,7 @@
           <p:nvPr>
             <p:extLst>
               <p:ext uri="{D42A27DB-BD31-4B8C-83A1-F6EECF244321}">
-                <p14:modId xmlns:p14="http://schemas.microsoft.com/office/powerpoint/2010/main" val="580504928"/>
+                <p14:modId xmlns:p14="http://schemas.microsoft.com/office/powerpoint/2010/main" val="357598145"/>
               </p:ext>
             </p:extLst>
           </p:nvPr>
@@ -31681,7 +31681,7 @@
           <p:nvPr>
             <p:extLst>
               <p:ext uri="{D42A27DB-BD31-4B8C-83A1-F6EECF244321}">
-                <p14:modId xmlns:p14="http://schemas.microsoft.com/office/powerpoint/2010/main" val="2748825530"/>
+                <p14:modId xmlns:p14="http://schemas.microsoft.com/office/powerpoint/2010/main" val="852800722"/>
               </p:ext>
             </p:extLst>
           </p:nvPr>
@@ -33761,7 +33761,7 @@
           <p:nvPr>
             <p:extLst>
               <p:ext uri="{D42A27DB-BD31-4B8C-83A1-F6EECF244321}">
-                <p14:modId xmlns:p14="http://schemas.microsoft.com/office/powerpoint/2010/main" val="3271241190"/>
+                <p14:modId xmlns:p14="http://schemas.microsoft.com/office/powerpoint/2010/main" val="1809892931"/>
               </p:ext>
             </p:extLst>
           </p:nvPr>
@@ -35890,7 +35890,7 @@
           <p:nvPr>
             <p:extLst>
               <p:ext uri="{D42A27DB-BD31-4B8C-83A1-F6EECF244321}">
-                <p14:modId xmlns:p14="http://schemas.microsoft.com/office/powerpoint/2010/main" val="2734058553"/>
+                <p14:modId xmlns:p14="http://schemas.microsoft.com/office/powerpoint/2010/main" val="244471164"/>
               </p:ext>
             </p:extLst>
           </p:nvPr>
@@ -37879,7 +37879,7 @@
           <p:nvPr>
             <p:extLst>
               <p:ext uri="{D42A27DB-BD31-4B8C-83A1-F6EECF244321}">
-                <p14:modId xmlns:p14="http://schemas.microsoft.com/office/powerpoint/2010/main" val="3078848322"/>
+                <p14:modId xmlns:p14="http://schemas.microsoft.com/office/powerpoint/2010/main" val="2083655526"/>
               </p:ext>
             </p:extLst>
           </p:nvPr>
@@ -38553,7 +38553,7 @@
       </p:sp>
       <p:pic>
         <p:nvPicPr>
-          <p:cNvPr id="6" name="col_img_0" descr="C:\Users\Chingu\AppData\Local\Temp\claude\C--Users-Chingu-Desktop-ACADEMIASEULWEB\d4111e1b-5523-44ea-97b2-b1a1d9545b9e\scratchpad\decks\cache\img_16738ba3ed1b3d97.png"/>
+          <p:cNvPr id="6" name="col_img_0" descr="C:\Users\Chingu\AppData\Local\Temp\claude\C--Users-Chingu-Desktop-ACADEMIASEULWEB\d4111e1b-5523-44ea-97b2-b1a1d9545b9e\scratchpad\decks\cache\img_4b3ebda6b50c1040.png"/>
           <p:cNvPicPr>
             <a:picLocks noChangeAspect="1"/>
           </p:cNvPicPr>
@@ -38684,7 +38684,7 @@
                 <a:ea typeface="Malgun Gothic" pitchFamily="34" charset="-122"/>
                 <a:cs typeface="Malgun Gothic" pitchFamily="34" charset="-120"/>
               </a:rPr>
-              <a:t>오늘은 시월 이십일 일 수요일이에요</a:t>
+              <a:t>오늘은 시월 이십팔 일 수요일이에요</a:t>
             </a:r>
             <a:r>
               <a:rPr lang="en-US" sz="2000" dirty="0">
@@ -38765,7 +38765,7 @@
       </p:sp>
       <p:pic>
         <p:nvPicPr>
-          <p:cNvPr id="11" name="col_img_1" descr="C:\Users\Chingu\AppData\Local\Temp\claude\C--Users-Chingu-Desktop-ACADEMIASEULWEB\d4111e1b-5523-44ea-97b2-b1a1d9545b9e\scratchpad\decks\cache\img_fd61cdca6d0ef88d.png"/>
+          <p:cNvPr id="11" name="col_img_1" descr="C:\Users\Chingu\AppData\Local\Temp\claude\C--Users-Chingu-Desktop-ACADEMIASEULWEB\d4111e1b-5523-44ea-97b2-b1a1d9545b9e\scratchpad\decks\cache\img_38af6a8a5117e93d.png"/>
           <p:cNvPicPr>
             <a:picLocks noChangeAspect="1"/>
           </p:cNvPicPr>
@@ -38915,7 +38915,7 @@
                 <a:ea typeface="Malgun Gothic" pitchFamily="34" charset="-122"/>
                 <a:cs typeface="Malgun Gothic" pitchFamily="34" charset="-120"/>
               </a:rPr>
-              <a:t>시월 이십이 일 목요일이에요</a:t>
+              <a:t>시월 이십구 일 목요일이에요</a:t>
             </a:r>
             <a:r>
               <a:rPr lang="en-US" sz="2000" dirty="0">
@@ -40734,7 +40734,7 @@
         </p:nvSpPr>
         <p:spPr>
           <a:xfrm>
-            <a:off x="548640" y="4137660"/>
+            <a:off x="1357231" y="4137660"/>
             <a:ext cx="1388582" cy="2034540"/>
           </a:xfrm>
           <a:prstGeom prst="roundRect">
@@ -40761,7 +40761,7 @@
         </p:nvSpPr>
         <p:spPr>
           <a:xfrm>
-            <a:off x="548640" y="4210812"/>
+            <a:off x="1357231" y="4210812"/>
             <a:ext cx="1388582" cy="1261415"/>
           </a:xfrm>
           <a:prstGeom prst="rect">
@@ -40802,7 +40802,7 @@
         </p:nvSpPr>
         <p:spPr>
           <a:xfrm>
-            <a:off x="594360" y="5439766"/>
+            <a:off x="1402951" y="5439766"/>
             <a:ext cx="1297142" cy="695858"/>
           </a:xfrm>
           <a:prstGeom prst="rect">
@@ -40840,7 +40840,7 @@
         </p:nvSpPr>
         <p:spPr>
           <a:xfrm>
-            <a:off x="2165822" y="4137660"/>
+            <a:off x="2974413" y="4137660"/>
             <a:ext cx="1388582" cy="2034540"/>
           </a:xfrm>
           <a:prstGeom prst="roundRect">
@@ -40867,7 +40867,7 @@
         </p:nvSpPr>
         <p:spPr>
           <a:xfrm>
-            <a:off x="2165822" y="4210812"/>
+            <a:off x="2974413" y="4210812"/>
             <a:ext cx="1388582" cy="1261415"/>
           </a:xfrm>
           <a:prstGeom prst="rect">
@@ -40908,7 +40908,7 @@
         </p:nvSpPr>
         <p:spPr>
           <a:xfrm>
-            <a:off x="2211542" y="5439766"/>
+            <a:off x="3020133" y="5439766"/>
             <a:ext cx="1297142" cy="695858"/>
           </a:xfrm>
           <a:prstGeom prst="rect">
@@ -40946,7 +40946,7 @@
         </p:nvSpPr>
         <p:spPr>
           <a:xfrm>
-            <a:off x="3783003" y="4137660"/>
+            <a:off x="4591594" y="4137660"/>
             <a:ext cx="1388582" cy="2034540"/>
           </a:xfrm>
           <a:prstGeom prst="roundRect">
@@ -40973,7 +40973,7 @@
         </p:nvSpPr>
         <p:spPr>
           <a:xfrm>
-            <a:off x="3783003" y="4210812"/>
+            <a:off x="4591594" y="4210812"/>
             <a:ext cx="1388582" cy="1261415"/>
           </a:xfrm>
           <a:prstGeom prst="rect">
@@ -41014,7 +41014,7 @@
         </p:nvSpPr>
         <p:spPr>
           <a:xfrm>
-            <a:off x="3828723" y="5439766"/>
+            <a:off x="4637314" y="5439766"/>
             <a:ext cx="1297142" cy="695858"/>
           </a:xfrm>
           <a:prstGeom prst="rect">
@@ -41052,7 +41052,7 @@
         </p:nvSpPr>
         <p:spPr>
           <a:xfrm>
-            <a:off x="5400185" y="4137660"/>
+            <a:off x="6208776" y="4137660"/>
             <a:ext cx="1388582" cy="2034540"/>
           </a:xfrm>
           <a:prstGeom prst="roundRect">
@@ -41079,7 +41079,7 @@
         </p:nvSpPr>
         <p:spPr>
           <a:xfrm>
-            <a:off x="5400185" y="4210812"/>
+            <a:off x="6208776" y="4210812"/>
             <a:ext cx="1388582" cy="1261415"/>
           </a:xfrm>
           <a:prstGeom prst="rect">
@@ -41120,7 +41120,7 @@
         </p:nvSpPr>
         <p:spPr>
           <a:xfrm>
-            <a:off x="5445905" y="5439766"/>
+            <a:off x="6254496" y="5439766"/>
             <a:ext cx="1297142" cy="695858"/>
           </a:xfrm>
           <a:prstGeom prst="rect">
@@ -41158,7 +41158,7 @@
         </p:nvSpPr>
         <p:spPr>
           <a:xfrm>
-            <a:off x="7017367" y="4137660"/>
+            <a:off x="7825958" y="4137660"/>
             <a:ext cx="1388582" cy="2034540"/>
           </a:xfrm>
           <a:prstGeom prst="roundRect">
@@ -41185,7 +41185,7 @@
         </p:nvSpPr>
         <p:spPr>
           <a:xfrm>
-            <a:off x="7017367" y="4210812"/>
+            <a:off x="7825958" y="4210812"/>
             <a:ext cx="1388582" cy="1261415"/>
           </a:xfrm>
           <a:prstGeom prst="rect">
@@ -41226,7 +41226,7 @@
         </p:nvSpPr>
         <p:spPr>
           <a:xfrm>
-            <a:off x="7063087" y="5439766"/>
+            <a:off x="7871678" y="5439766"/>
             <a:ext cx="1297142" cy="695858"/>
           </a:xfrm>
           <a:prstGeom prst="rect">
@@ -41264,7 +41264,7 @@
         </p:nvSpPr>
         <p:spPr>
           <a:xfrm>
-            <a:off x="8634549" y="4137660"/>
+            <a:off x="9443139" y="4137660"/>
             <a:ext cx="1388582" cy="2034540"/>
           </a:xfrm>
           <a:prstGeom prst="roundRect">
@@ -41291,7 +41291,7 @@
         </p:nvSpPr>
         <p:spPr>
           <a:xfrm>
-            <a:off x="8634549" y="4210812"/>
+            <a:off x="9443139" y="4210812"/>
             <a:ext cx="1388582" cy="1261415"/>
           </a:xfrm>
           <a:prstGeom prst="rect">
@@ -41332,7 +41332,7 @@
         </p:nvSpPr>
         <p:spPr>
           <a:xfrm>
-            <a:off x="8680269" y="5439766"/>
+            <a:off x="9488859" y="5439766"/>
             <a:ext cx="1297142" cy="695858"/>
           </a:xfrm>
           <a:prstGeom prst="rect">
@@ -41639,7 +41639,7 @@
           <p:nvPr>
             <p:extLst>
               <p:ext uri="{D42A27DB-BD31-4B8C-83A1-F6EECF244321}">
-                <p14:modId xmlns:p14="http://schemas.microsoft.com/office/powerpoint/2010/main" val="2146100103"/>
+                <p14:modId xmlns:p14="http://schemas.microsoft.com/office/powerpoint/2010/main" val="3436418037"/>
               </p:ext>
             </p:extLst>
           </p:nvPr>
